--- a/deck/NoticeDecoder_NovaNexus_PS02.pptx
+++ b/deck/NoticeDecoder_NovaNexus_PS02.pptx
@@ -3835,55 +3835,37 @@
           </a:p>
         </p:txBody>
       </p:sp>
-      <p:sp>
-        <p:nvSpPr>
-          <p:cNvPr id="16" name="Rounded Rectangle 15"/>
-          <p:cNvSpPr/>
-          <p:nvPr/>
-        </p:nvSpPr>
-        <p:spPr>
-          <a:xfrm>
-            <a:off x="7818120" y="4846320"/>
-            <a:ext cx="3867912" cy="1417320"/>
-          </a:xfrm>
-          <a:prstGeom prst="roundRect">
-            <a:avLst>
-              <a:gd name="adj" fmla="val 6000"/>
-            </a:avLst>
-          </a:prstGeom>
-          <a:solidFill>
-            <a:srgbClr val="FFFFFF"/>
-          </a:solidFill>
-          <a:ln w="12700">
+      <p:pic>
+        <p:nvPicPr>
+          <p:cNvPr id="16" name="Picture 15" descr="qr-live.png">
+            <a:hlinkClick r:id="rId3"/>
+          </p:cNvPr>
+          <p:cNvPicPr>
+            <a:picLocks noChangeAspect="1"/>
+          </p:cNvPicPr>
+          <p:nvPr/>
+        </p:nvPicPr>
+        <p:blipFill>
+          <a:blip r:embed="rId2"/>
+          <a:stretch>
+            <a:fillRect/>
+          </a:stretch>
+        </p:blipFill>
+        <p:spPr>
+          <a:xfrm>
+            <a:off x="8001000" y="4773168"/>
+            <a:ext cx="1325880" cy="1325880"/>
+          </a:xfrm>
+          <a:prstGeom prst="rect">
+            <a:avLst/>
+          </a:prstGeom>
+          <a:ln w="9525">
             <a:solidFill>
               <a:srgbClr val="D5D8E3"/>
             </a:solidFill>
-            <a:prstDash val="dash"/>
           </a:ln>
-          <a:effectLst/>
-        </p:spPr>
-        <p:style>
-          <a:lnRef idx="1">
-            <a:schemeClr val="accent1"/>
-          </a:lnRef>
-          <a:fillRef idx="3">
-            <a:schemeClr val="accent1"/>
-          </a:fillRef>
-          <a:effectRef idx="2">
-            <a:schemeClr val="accent1"/>
-          </a:effectRef>
-          <a:fontRef idx="minor">
-            <a:schemeClr val="lt1"/>
-          </a:fontRef>
-        </p:style>
-        <p:txBody>
-          <a:bodyPr rtlCol="0" anchor="ctr"/>
-          <a:lstStyle/>
-          <a:p>
-            <a:pPr algn="ctr"/>
-          </a:p>
-        </p:txBody>
-      </p:sp>
+        </p:spPr>
+      </p:pic>
       <p:sp>
         <p:nvSpPr>
           <p:cNvPr id="17" name="TextBox 16"/>
@@ -3892,8 +3874,8 @@
         </p:nvSpPr>
         <p:spPr>
           <a:xfrm>
-            <a:off x="7955279" y="4956048"/>
-            <a:ext cx="3611880" cy="1188720"/>
+            <a:off x="9464040" y="4846320"/>
+            <a:ext cx="2286000" cy="1280160"/>
           </a:xfrm>
           <a:prstGeom prst="rect">
             <a:avLst/>
@@ -3901,14 +3883,14 @@
           <a:noFill/>
         </p:spPr>
         <p:txBody>
-          <a:bodyPr wrap="square" anchor="ctr" lIns="45720" rIns="45720" tIns="27432" bIns="27432">
+          <a:bodyPr wrap="square" anchor="t" lIns="45720" rIns="45720" tIns="27432" bIns="27432">
             <a:spAutoFit/>
           </a:bodyPr>
           <a:lstStyle/>
           <a:p>
-            <a:pPr algn="ctr">
+            <a:pPr algn="l">
               <a:spcAft>
-                <a:spcPts val="600"/>
+                <a:spcPts val="200"/>
               </a:spcAft>
             </a:pPr>
             <a:r>
@@ -3922,19 +3904,34 @@
             </a:r>
           </a:p>
           <a:p>
-            <a:pPr algn="ctr">
+            <a:pPr algn="l">
               <a:spcAft>
-                <a:spcPts val="600"/>
+                <a:spcPts val="200"/>
               </a:spcAft>
             </a:pPr>
             <a:r>
               <a:rPr sz="1400" b="0">
                 <a:solidFill>
-                  <a:srgbClr val="5E6070"/>
-                </a:solidFill>
-                <a:latin typeface="Arial"/>
-              </a:rPr>
-              <a:t>QR code and link go here after deploy</a:t>
+                  <a:srgbClr val="22222E"/>
+                </a:solidFill>
+                <a:latin typeface="Arial"/>
+              </a:rPr>
+              <a:t>Scan, or open:</a:t>
+            </a:r>
+          </a:p>
+          <a:p>
+            <a:r>
+              <a:rPr sz="1300" b="1">
+                <a:solidFill>
+                  <a:srgbClr val="0033EE"/>
+                </a:solidFill>
+                <a:latin typeface="Arial"/>
+                <a:hlinkClick r:id="rId3"/>
+              </a:rPr>
+              <a:t>anki1kr.me/NoticeDecoder/app</a:t>
+            </a:r>
+            <a:r>
+              <a:t> </a:t>
             </a:r>
           </a:p>
         </p:txBody>

--- a/deck/NoticeDecoder_NovaNexus_PS02.pptx
+++ b/deck/NoticeDecoder_NovaNexus_PS02.pptx
@@ -3839,7 +3839,7 @@
                 </a:solidFill>
                 <a:latin typeface="Arial"/>
               </a:rPr>
-              <a:t>63 of 63</a:t>
+              <a:t>73 of 73</a:t>
             </a:r>
           </a:p>
           <a:p>
@@ -8673,7 +8673,7 @@
                 </a:solidFill>
                 <a:latin typeface="Arial"/>
               </a:rPr>
-              <a:t>27</a:t>
+              <a:t>32</a:t>
             </a:r>
           </a:p>
           <a:p>
@@ -8740,7 +8740,7 @@
                 </a:solidFill>
                 <a:latin typeface="Arial"/>
               </a:rPr>
-              <a:t>63</a:t>
+              <a:t>73</a:t>
             </a:r>
           </a:p>
           <a:p>
@@ -8807,7 +8807,7 @@
                 </a:solidFill>
                 <a:latin typeface="Arial"/>
               </a:rPr>
-              <a:t>8+7+5</a:t>
+              <a:t>9+7+5</a:t>
             </a:r>
           </a:p>
           <a:p>
@@ -9988,7 +9988,7 @@
                 </a:solidFill>
                 <a:latin typeface="Arial"/>
               </a:rPr>
-              <a:t> no college has paid yet. Built and tested: web app, class feed, Gmail script, Android companion; 27 + 8 + 7 + 5 engine and integration tests, 63 browser checks, CI on every push.</a:t>
+              <a:t> no college has paid yet. Built and tested: web app, class feed, Gmail script, Android companion; 32 + 9 + 7 + 5 engine and integration tests, 73 browser checks, CI on every push.</a:t>
             </a:r>
           </a:p>
         </p:txBody>

--- a/deck/NoticeDecoder_NovaNexus_PS02.pptx
+++ b/deck/NoticeDecoder_NovaNexus_PS02.pptx
@@ -5,7 +5,7 @@
     <p:sldMasterId id="2147483648" r:id="rId1"/>
   </p:sldMasterIdLst>
   <p:notesMasterIdLst>
-    <p:notesMasterId r:id="rId8"/>
+    <p:notesMasterId r:id="rId9"/>
   </p:notesMasterIdLst>
   <p:sldIdLst>
     <p:sldId id="291" r:id="rId2"/>
@@ -261,7 +261,7 @@
             <a:fld id="{C4D5ADD5-2BBC-4A94-8F86-D9013941F742}" type="datetimeFigureOut">
               <a:rPr lang="en-US"/>
               <a:pPr/>
-              <a:t>10/15/2026</a:t>
+              <a:t>6/2/2026</a:t>
             </a:fld>
             <a:endParaRPr lang="en-US"/>
           </a:p>
@@ -1351,6 +1351,184 @@
 </p:notes>
 </file>
 
+<file path=ppt/notesSlides/notesSlide6.xml><?xml version="1.0" encoding="utf-8"?>
+<p:notes xmlns:a="http://schemas.openxmlformats.org/drawingml/2006/main" xmlns:r="http://schemas.openxmlformats.org/officeDocument/2006/relationships" xmlns:p="http://schemas.openxmlformats.org/presentationml/2006/main">
+  <p:cSld>
+    <p:spTree>
+      <p:nvGrpSpPr>
+        <p:cNvPr id="1" name=""/>
+        <p:cNvGrpSpPr/>
+        <p:nvPr/>
+      </p:nvGrpSpPr>
+      <p:grpSpPr>
+        <a:xfrm>
+          <a:off x="0" y="0"/>
+          <a:ext cx="0" cy="0"/>
+          <a:chOff x="0" y="0"/>
+          <a:chExt cx="0" cy="0"/>
+        </a:xfrm>
+      </p:grpSpPr>
+      <p:sp>
+        <p:nvSpPr>
+          <p:cNvPr id="18433" name="Slide Image Placeholder 1"/>
+          <p:cNvSpPr>
+            <a:spLocks noGrp="1" noRot="1" noChangeAspect="1"/>
+          </p:cNvSpPr>
+          <p:nvPr>
+            <p:ph type="sldImg"/>
+          </p:nvPr>
+        </p:nvSpPr>
+        <p:spPr bwMode="auto">
+          <a:xfrm>
+            <a:off x="381000" y="685800"/>
+            <a:ext cx="6096000" cy="3429000"/>
+          </a:xfrm>
+          <a:noFill/>
+          <a:ln>
+            <a:solidFill>
+              <a:srgbClr val="000000"/>
+            </a:solidFill>
+            <a:miter lim="800000"/>
+            <a:headEnd/>
+            <a:tailEnd/>
+          </a:ln>
+        </p:spPr>
+      </p:sp>
+      <p:sp>
+        <p:nvSpPr>
+          <p:cNvPr id="18434" name="Notes Placeholder 2"/>
+          <p:cNvSpPr>
+            <a:spLocks noGrp="1"/>
+          </p:cNvSpPr>
+          <p:nvPr>
+            <p:ph type="body" idx="1"/>
+          </p:nvPr>
+        </p:nvSpPr>
+        <p:spPr bwMode="auto">
+          <a:noFill/>
+        </p:spPr>
+        <p:txBody>
+          <a:bodyPr wrap="square" numCol="1" anchor="t" anchorCtr="0" compatLnSpc="1">
+            <a:prstTxWarp prst="textNoShape">
+              <a:avLst/>
+            </a:prstTxWarp>
+          </a:bodyPr>
+          <a:lstStyle/>
+          <a:p>
+            <a:pPr eaLnBrk="1" hangingPunct="1">
+              <a:spcBef>
+                <a:spcPct val="0"/>
+              </a:spcBef>
+            </a:pPr>
+            <a:endParaRPr lang="en-US">
+              <a:ea typeface="ＭＳ Ｐゴシック" pitchFamily="1" charset="-128"/>
+            </a:endParaRPr>
+          </a:p>
+        </p:txBody>
+      </p:sp>
+      <p:sp>
+        <p:nvSpPr>
+          <p:cNvPr id="18435" name="Slide Number Placeholder 3"/>
+          <p:cNvSpPr>
+            <a:spLocks noGrp="1"/>
+          </p:cNvSpPr>
+          <p:nvPr>
+            <p:ph type="sldNum" sz="quarter" idx="5"/>
+          </p:nvPr>
+        </p:nvSpPr>
+        <p:spPr bwMode="auto">
+          <a:noFill/>
+          <a:ln>
+            <a:miter lim="800000"/>
+            <a:headEnd/>
+            <a:tailEnd/>
+          </a:ln>
+        </p:spPr>
+        <p:txBody>
+          <a:bodyPr/>
+          <a:lstStyle/>
+          <a:p>
+            <a:pPr marL="0" marR="0" lvl="0" indent="0" algn="r" defTabSz="457200" rtl="0" eaLnBrk="1" fontAlgn="base" latinLnBrk="0" hangingPunct="1">
+              <a:lnSpc>
+                <a:spcPct val="100000"/>
+              </a:lnSpc>
+              <a:spcBef>
+                <a:spcPct val="0"/>
+              </a:spcBef>
+              <a:spcAft>
+                <a:spcPct val="0"/>
+              </a:spcAft>
+              <a:buClrTx/>
+              <a:buSzTx/>
+              <a:buFontTx/>
+              <a:buNone/>
+              <a:tabLst/>
+              <a:defRPr/>
+            </a:pPr>
+            <a:fld id="{0CA7B74D-3791-4AC6-8451-F10DBCCCDD9A}" type="slidenum">
+              <a:rPr kumimoji="0" lang="en-US" sz="1200" b="0" i="0" u="none" strike="noStrike" kern="1200" cap="none" spc="0" normalizeH="0" baseline="0" noProof="0">
+                <a:ln>
+                  <a:noFill/>
+                </a:ln>
+                <a:solidFill>
+                  <a:prstClr val="black"/>
+                </a:solidFill>
+                <a:effectLst/>
+                <a:uLnTx/>
+                <a:uFillTx/>
+                <a:latin typeface="Calibri" pitchFamily="34" charset="0"/>
+                <a:ea typeface="ＭＳ Ｐゴシック" pitchFamily="1" charset="-128"/>
+                <a:cs typeface="+mn-cs"/>
+              </a:rPr>
+              <a:pPr marL="0" marR="0" lvl="0" indent="0" algn="r" defTabSz="457200" rtl="0" eaLnBrk="1" fontAlgn="base" latinLnBrk="0" hangingPunct="1">
+                <a:lnSpc>
+                  <a:spcPct val="100000"/>
+                </a:lnSpc>
+                <a:spcBef>
+                  <a:spcPct val="0"/>
+                </a:spcBef>
+                <a:spcAft>
+                  <a:spcPct val="0"/>
+                </a:spcAft>
+                <a:buClrTx/>
+                <a:buSzTx/>
+                <a:buFontTx/>
+                <a:buNone/>
+                <a:tabLst/>
+                <a:defRPr/>
+              </a:pPr>
+              <a:t>7</a:t>
+            </a:fld>
+            <a:endParaRPr kumimoji="0" lang="en-US" sz="1200" b="0" i="0" u="none" strike="noStrike" kern="1200" cap="none" spc="0" normalizeH="0" baseline="0" noProof="0">
+              <a:ln>
+                <a:noFill/>
+              </a:ln>
+              <a:solidFill>
+                <a:prstClr val="black"/>
+              </a:solidFill>
+              <a:effectLst/>
+              <a:uLnTx/>
+              <a:uFillTx/>
+              <a:latin typeface="Calibri" pitchFamily="34" charset="0"/>
+              <a:ea typeface="ＭＳ Ｐゴシック" pitchFamily="1" charset="-128"/>
+              <a:cs typeface="+mn-cs"/>
+            </a:endParaRPr>
+          </a:p>
+        </p:txBody>
+      </p:sp>
+    </p:spTree>
+    <p:extLst>
+      <p:ext uri="{BB962C8B-B14F-4D97-AF65-F5344CB8AC3E}">
+        <p14:creationId xmlns:p14="http://schemas.microsoft.com/office/powerpoint/2010/main" val="3783576877"/>
+      </p:ext>
+    </p:extLst>
+  </p:cSld>
+  <p:clrMapOvr>
+    <a:masterClrMapping/>
+  </p:clrMapOvr>
+</p:notes>
+</file>
+
 <file path=ppt/slideLayouts/slideLayout1.xml><?xml version="1.0" encoding="utf-8"?>
 <p:sldLayout xmlns:a="http://schemas.openxmlformats.org/drawingml/2006/main" xmlns:r="http://schemas.openxmlformats.org/officeDocument/2006/relationships" xmlns:p="http://schemas.openxmlformats.org/presentationml/2006/main" type="title" preserve="1">
   <p:cSld name="Title Slide">
@@ -1534,7 +1712,7 @@
           <a:p>
             <a:fld id="{E60792E3-D524-454C-8AFD-A91972900BCB}" type="datetime1">
               <a:rPr lang="en-US" smtClean="0"/>
-              <a:t>10/15/2026</a:t>
+              <a:t>6/2/2026</a:t>
             </a:fld>
             <a:endParaRPr lang="en-US"/>
           </a:p>
@@ -1716,7 +1894,7 @@
           <a:p>
             <a:fld id="{053C3A68-6922-42D3-8905-ECC2D82A3469}" type="datetime1">
               <a:rPr lang="en-US" smtClean="0"/>
-              <a:t>10/15/2026</a:t>
+              <a:t>6/2/2026</a:t>
             </a:fld>
             <a:endParaRPr lang="en-US"/>
           </a:p>
@@ -1908,7 +2086,7 @@
           <a:p>
             <a:fld id="{CB69E9F4-7604-4950-A8B2-8ACDEDB1506E}" type="datetime1">
               <a:rPr lang="en-US" smtClean="0"/>
-              <a:t>10/15/2026</a:t>
+              <a:t>6/2/2026</a:t>
             </a:fld>
             <a:endParaRPr lang="en-US"/>
           </a:p>
@@ -2090,7 +2268,7 @@
           <a:p>
             <a:fld id="{708B7524-32A2-4C20-A58C-BC3BAA1042FC}" type="datetime1">
               <a:rPr lang="en-US" smtClean="0"/>
-              <a:t>10/15/2026</a:t>
+              <a:t>6/2/2026</a:t>
             </a:fld>
             <a:endParaRPr lang="en-US"/>
           </a:p>
@@ -2349,7 +2527,7 @@
           <a:p>
             <a:fld id="{1E994447-D6B2-43BB-A877-57F1A267B999}" type="datetime1">
               <a:rPr lang="en-US" smtClean="0"/>
-              <a:t>10/15/2026</a:t>
+              <a:t>6/2/2026</a:t>
             </a:fld>
             <a:endParaRPr lang="en-US"/>
           </a:p>
@@ -2648,7 +2826,7 @@
           <a:p>
             <a:fld id="{68920E16-BD35-483C-AA6B-346FC7E46DEA}" type="datetime1">
               <a:rPr lang="en-US" smtClean="0"/>
-              <a:t>10/15/2026</a:t>
+              <a:t>6/2/2026</a:t>
             </a:fld>
             <a:endParaRPr lang="en-US"/>
           </a:p>
@@ -3081,7 +3259,7 @@
           <a:p>
             <a:fld id="{2FEAC6F8-5103-4FC0-A69E-5C6AE6469DA8}" type="datetime1">
               <a:rPr lang="en-US" smtClean="0"/>
-              <a:t>10/15/2026</a:t>
+              <a:t>6/2/2026</a:t>
             </a:fld>
             <a:endParaRPr lang="en-US"/>
           </a:p>
@@ -3212,7 +3390,7 @@
           <a:p>
             <a:fld id="{C60C6921-0627-4C8F-83D5-0CF936D2FFDD}" type="datetime1">
               <a:rPr lang="en-US" smtClean="0"/>
-              <a:t>10/15/2026</a:t>
+              <a:t>6/2/2026</a:t>
             </a:fld>
             <a:endParaRPr lang="en-US"/>
           </a:p>
@@ -3321,7 +3499,7 @@
           <a:p>
             <a:fld id="{2FF08AD7-8103-40F8-983C-E2BA6BB9CBE0}" type="datetime1">
               <a:rPr lang="en-US" smtClean="0"/>
-              <a:t>10/15/2026</a:t>
+              <a:t>6/2/2026</a:t>
             </a:fld>
             <a:endParaRPr lang="en-US"/>
           </a:p>
@@ -3610,7 +3788,7 @@
           <a:p>
             <a:fld id="{DF8C06B4-9380-4A4D-AF49-A3596E17DAF5}" type="datetime1">
               <a:rPr lang="en-US" smtClean="0"/>
-              <a:t>10/15/2026</a:t>
+              <a:t>6/2/2026</a:t>
             </a:fld>
             <a:endParaRPr lang="en-US"/>
           </a:p>
@@ -3879,7 +4057,7 @@
           <a:p>
             <a:fld id="{EF7FDEF1-C582-4E22-9E77-D68326471F28}" type="datetime1">
               <a:rPr lang="en-US" smtClean="0"/>
-              <a:t>10/15/2026</a:t>
+              <a:t>6/2/2026</a:t>
             </a:fld>
             <a:endParaRPr lang="en-US"/>
           </a:p>
@@ -4122,7 +4300,7 @@
           <a:p>
             <a:fld id="{780A9602-A9A9-453F-AEF1-37B5837E02CD}" type="datetime1">
               <a:rPr lang="en-US" smtClean="0"/>
-              <a:t>10/15/2026</a:t>
+              <a:t>6/2/2026</a:t>
             </a:fld>
             <a:endParaRPr lang="en-US"/>
           </a:p>
@@ -4708,7 +4886,6 @@
           <a:lstStyle/>
           <a:p>
             <a:pPr algn="ctr"/>
-            <a:endParaRPr/>
           </a:p>
         </p:txBody>
       </p:sp>
@@ -4729,7 +4906,7 @@
           </a:xfrm>
         </p:spPr>
         <p:txBody>
-          <a:bodyPr tIns="0" bIns="0" anchor="t"/>
+          <a:bodyPr anchor="t" tIns="0" bIns="0"/>
           <a:lstStyle/>
           <a:p>
             <a:pPr algn="l"/>
@@ -4892,7 +5069,7 @@
             </a:r>
             <a:r>
               <a:rPr sz="1800" b="0"/>
-              <a:t>Software (web + Android)</a:t>
+              <a:t>Software (web app)</a:t>
             </a:r>
           </a:p>
           <a:p>
@@ -4958,7 +5135,7 @@
           <a:noFill/>
         </p:spPr>
         <p:txBody>
-          <a:bodyPr wrap="square" lIns="45720" tIns="18288" rIns="45720" bIns="18288" anchor="t">
+          <a:bodyPr wrap="square" anchor="t" lIns="45720" rIns="45720" tIns="18288" bIns="18288">
             <a:spAutoFit/>
           </a:bodyPr>
           <a:lstStyle/>
@@ -4975,7 +5152,7 @@
                 </a:solidFill>
                 <a:latin typeface="Calibri"/>
               </a:rPr>
-              <a:t>A notice lands in the class group. It is in your calendar before you open the chat.</a:t>
+              <a:t>Paste a college notice. Its dates go into your calendar, with clashes marked.</a:t>
             </a:r>
           </a:p>
         </p:txBody>
@@ -4983,37 +5160,6 @@
       <p:pic>
         <p:nvPicPr>
           <p:cNvPr id="13" name="Picture 12" descr="phone-results-crop.png"/>
-          <p:cNvPicPr>
-            <a:picLocks noChangeAspect="1"/>
-          </p:cNvPicPr>
-          <p:nvPr/>
-        </p:nvPicPr>
-        <p:blipFill>
-          <a:blip r:embed="rId2"/>
-          <a:stretch>
-            <a:fillRect/>
-          </a:stretch>
-        </p:blipFill>
-        <p:spPr>
-          <a:xfrm>
-            <a:off x="7086600" y="1325880"/>
-            <a:ext cx="2331720" cy="3280351"/>
-          </a:xfrm>
-          <a:prstGeom prst="rect">
-            <a:avLst/>
-          </a:prstGeom>
-          <a:ln w="12700">
-            <a:solidFill>
-              <a:srgbClr val="C9D2DF"/>
-            </a:solidFill>
-          </a:ln>
-        </p:spPr>
-      </p:pic>
-      <p:pic>
-        <p:nvPicPr>
-          <p:cNvPr id="14" name="Picture 13" descr="qr-live.png">
-            <a:hlinkClick r:id="rId3"/>
-          </p:cNvPr>
           <p:cNvPicPr>
             <a:picLocks noChangeAspect="1"/>
           </p:cNvPicPr>
@@ -5027,8 +5173,39 @@
         </p:blipFill>
         <p:spPr>
           <a:xfrm>
-            <a:off x="9829800" y="2011680"/>
-            <a:ext cx="1600200" cy="1600200"/>
+            <a:off x="7086600" y="1325880"/>
+            <a:ext cx="2331720" cy="3280351"/>
+          </a:xfrm>
+          <a:prstGeom prst="rect">
+            <a:avLst/>
+          </a:prstGeom>
+          <a:ln w="12700">
+            <a:solidFill>
+              <a:srgbClr val="C9D2DF"/>
+            </a:solidFill>
+          </a:ln>
+        </p:spPr>
+      </p:pic>
+      <p:pic>
+        <p:nvPicPr>
+          <p:cNvPr id="14" name="Picture 13" descr="qr-demovideo.png">
+            <a:hlinkClick r:id="rId6"/>
+          </p:cNvPr>
+          <p:cNvPicPr>
+            <a:picLocks noChangeAspect="1"/>
+          </p:cNvPicPr>
+          <p:nvPr/>
+        </p:nvPicPr>
+        <p:blipFill>
+          <a:blip r:embed="rId5"/>
+          <a:stretch>
+            <a:fillRect/>
+          </a:stretch>
+        </p:blipFill>
+        <p:spPr>
+          <a:xfrm>
+            <a:off x="10195560" y="1097280"/>
+            <a:ext cx="1097280" cy="1097280"/>
           </a:xfrm>
           <a:prstGeom prst="rect">
             <a:avLst/>
@@ -5048,8 +5225,8 @@
         </p:nvSpPr>
         <p:spPr>
           <a:xfrm>
-            <a:off x="9464040" y="3639312"/>
-            <a:ext cx="2331720" cy="457200"/>
+            <a:off x="9829800" y="2221991"/>
+            <a:ext cx="1828800" cy="457200"/>
           </a:xfrm>
           <a:prstGeom prst="rect">
             <a:avLst/>
@@ -5069,9 +5246,9 @@
                   <a:srgbClr val="1F497D"/>
                 </a:solidFill>
                 <a:latin typeface="Calibri"/>
-                <a:hlinkClick r:id="rId3"/>
-              </a:rPr>
-              <a:t>Live demo</a:t>
+                <a:hlinkClick r:id="rId6"/>
+              </a:rPr>
+              <a:t>Demo video</a:t>
             </a:r>
             <a:r>
               <a:t> </a:t>
@@ -5079,16 +5256,47 @@
           </a:p>
         </p:txBody>
       </p:sp>
-      <p:sp>
-        <p:nvSpPr>
-          <p:cNvPr id="16" name="TextBox 15"/>
+      <p:pic>
+        <p:nvPicPr>
+          <p:cNvPr id="16" name="Picture 15" descr="qr-website.png">
+            <a:hlinkClick r:id="rId8"/>
+          </p:cNvPr>
+          <p:cNvPicPr>
+            <a:picLocks noChangeAspect="1"/>
+          </p:cNvPicPr>
+          <p:nvPr/>
+        </p:nvPicPr>
+        <p:blipFill>
+          <a:blip r:embed="rId7"/>
+          <a:stretch>
+            <a:fillRect/>
+          </a:stretch>
+        </p:blipFill>
+        <p:spPr>
+          <a:xfrm>
+            <a:off x="10195560" y="2788920"/>
+            <a:ext cx="1097280" cy="1097280"/>
+          </a:xfrm>
+          <a:prstGeom prst="rect">
+            <a:avLst/>
+          </a:prstGeom>
+          <a:ln w="9525">
+            <a:solidFill>
+              <a:srgbClr val="C9D2DF"/>
+            </a:solidFill>
+          </a:ln>
+        </p:spPr>
+      </p:pic>
+      <p:sp>
+        <p:nvSpPr>
+          <p:cNvPr id="17" name="TextBox 16"/>
           <p:cNvSpPr txBox="1"/>
           <p:nvPr/>
         </p:nvSpPr>
         <p:spPr>
           <a:xfrm>
-            <a:off x="9464040" y="4206240"/>
-            <a:ext cx="2377440" cy="822960"/>
+            <a:off x="9829800" y="3913632"/>
+            <a:ext cx="1828800" cy="457200"/>
           </a:xfrm>
           <a:prstGeom prst="rect">
             <a:avLst/>
@@ -5096,38 +5304,69 @@
           <a:noFill/>
         </p:spPr>
         <p:txBody>
-          <a:bodyPr wrap="square" lIns="45720" tIns="18288" rIns="45720" bIns="18288" anchor="t">
+          <a:bodyPr wrap="none">
             <a:spAutoFit/>
           </a:bodyPr>
           <a:lstStyle/>
           <a:p>
-            <a:pPr algn="ctr">
-              <a:spcAft>
-                <a:spcPts val="400"/>
-              </a:spcAft>
-            </a:pPr>
-            <a:r>
-              <a:rPr sz="1300" b="0">
-                <a:solidFill>
-                  <a:srgbClr val="5B6370"/>
+            <a:pPr algn="ctr"/>
+            <a:r>
+              <a:rPr sz="1300" b="1">
+                <a:solidFill>
+                  <a:srgbClr val="1F497D"/>
                 </a:solidFill>
                 <a:latin typeface="Calibri"/>
-              </a:rPr>
-              <a:t>Scan to open the working app on your phone.</a:t>
-            </a:r>
-          </a:p>
-        </p:txBody>
-      </p:sp>
-      <p:sp>
-        <p:nvSpPr>
-          <p:cNvPr id="17" name="TextBox 16"/>
+                <a:hlinkClick r:id="rId8"/>
+              </a:rPr>
+              <a:t>Website</a:t>
+            </a:r>
+            <a:r>
+              <a:t> </a:t>
+            </a:r>
+          </a:p>
+        </p:txBody>
+      </p:sp>
+      <p:pic>
+        <p:nvPicPr>
+          <p:cNvPr id="18" name="Picture 17" descr="qr-github.png">
+            <a:hlinkClick r:id="rId10"/>
+          </p:cNvPr>
+          <p:cNvPicPr>
+            <a:picLocks noChangeAspect="1"/>
+          </p:cNvPicPr>
+          <p:nvPr/>
+        </p:nvPicPr>
+        <p:blipFill>
+          <a:blip r:embed="rId9"/>
+          <a:stretch>
+            <a:fillRect/>
+          </a:stretch>
+        </p:blipFill>
+        <p:spPr>
+          <a:xfrm>
+            <a:off x="10195560" y="4480560"/>
+            <a:ext cx="1097280" cy="1097280"/>
+          </a:xfrm>
+          <a:prstGeom prst="rect">
+            <a:avLst/>
+          </a:prstGeom>
+          <a:ln w="9525">
+            <a:solidFill>
+              <a:srgbClr val="C9D2DF"/>
+            </a:solidFill>
+          </a:ln>
+        </p:spPr>
+      </p:pic>
+      <p:sp>
+        <p:nvSpPr>
+          <p:cNvPr id="19" name="TextBox 18"/>
           <p:cNvSpPr txBox="1"/>
           <p:nvPr/>
         </p:nvSpPr>
         <p:spPr>
           <a:xfrm>
-            <a:off x="9509760" y="228600"/>
-            <a:ext cx="2514600" cy="365760"/>
+            <a:off x="9829800" y="5605272"/>
+            <a:ext cx="1828800" cy="457200"/>
           </a:xfrm>
           <a:prstGeom prst="rect">
             <a:avLst/>
@@ -5135,7 +5374,46 @@
           <a:noFill/>
         </p:spPr>
         <p:txBody>
-          <a:bodyPr wrap="square" lIns="45720" tIns="18288" rIns="45720" bIns="18288" anchor="t">
+          <a:bodyPr wrap="none">
+            <a:spAutoFit/>
+          </a:bodyPr>
+          <a:lstStyle/>
+          <a:p>
+            <a:pPr algn="ctr"/>
+            <a:r>
+              <a:rPr sz="1300" b="1">
+                <a:solidFill>
+                  <a:srgbClr val="1F497D"/>
+                </a:solidFill>
+                <a:latin typeface="Calibri"/>
+                <a:hlinkClick r:id="rId10"/>
+              </a:rPr>
+              <a:t>GitHub</a:t>
+            </a:r>
+            <a:r>
+              <a:t> </a:t>
+            </a:r>
+          </a:p>
+        </p:txBody>
+      </p:sp>
+      <p:sp>
+        <p:nvSpPr>
+          <p:cNvPr id="20" name="TextBox 19"/>
+          <p:cNvSpPr txBox="1"/>
+          <p:nvPr/>
+        </p:nvSpPr>
+        <p:spPr>
+          <a:xfrm>
+            <a:off x="9509760" y="228600"/>
+            <a:ext cx="2514600" cy="365760"/>
+          </a:xfrm>
+          <a:prstGeom prst="rect">
+            <a:avLst/>
+          </a:prstGeom>
+          <a:noFill/>
+        </p:spPr>
+        <p:txBody>
+          <a:bodyPr wrap="square" anchor="t" lIns="45720" rIns="45720" tIns="18288" bIns="18288">
             <a:spAutoFit/>
           </a:bodyPr>
           <a:lstStyle/>
@@ -5225,7 +5503,6 @@
           <a:lstStyle/>
           <a:p>
             <a:pPr algn="ctr"/>
-            <a:endParaRPr/>
           </a:p>
         </p:txBody>
       </p:sp>
@@ -5307,7 +5584,7 @@
           <a:bodyPr anchor="ctr"/>
           <a:lstStyle/>
           <a:p>
-            <a:pPr algn="ctr" eaLnBrk="1" hangingPunct="1"/>
+            <a:pPr eaLnBrk="1" hangingPunct="1" algn="ctr"/>
             <a:r>
               <a:rPr lang="en-US" sz="3600" b="1" dirty="0">
                 <a:latin typeface="Times New Roman" panose="02020603050405020304" pitchFamily="18" charset="0"/>
@@ -5398,7 +5675,7 @@
                 <a16:creationId xmlns:a16="http://schemas.microsoft.com/office/drawing/2014/main" id="{5DBCE864-823D-4A13-9607-5DA1F0ED5FB8}"/>
               </a:ext>
               <a:ext uri="{C183D7F6-B498-43B3-948B-1728B52AA6E4}">
-                <adec:decorative xmlns:adec="http://schemas.microsoft.com/office/drawing/2017/decorative" val="0"/>
+                <adec:decorative xmlns:adec="http://schemas.microsoft.com/office/drawing/2017/decorative" xmlns="" val="0"/>
               </a:ext>
             </a:extLst>
           </p:cNvPr>
@@ -5434,7 +5711,7 @@
           <a:p>
             <a:pPr algn="ctr"/>
             <a:r>
-              <a:rPr lang="en-US" sz="1500" b="1" dirty="0"/>
+              <a:rPr lang="en-US" dirty="0" b="1" sz="1500"/>
               <a:t>Nova Nexus</a:t>
             </a:r>
             <a:endParaRPr lang="en-IN" dirty="0"/>
@@ -5458,7 +5735,7 @@
           <a:noFill/>
         </p:spPr>
         <p:txBody>
-          <a:bodyPr wrap="square" lIns="45720" tIns="18288" rIns="45720" bIns="18288" anchor="t">
+          <a:bodyPr wrap="square" anchor="t" lIns="45720" rIns="45720" tIns="18288" bIns="18288">
             <a:spAutoFit/>
           </a:bodyPr>
           <a:lstStyle/>
@@ -5505,7 +5782,7 @@
         <p:spPr>
           <a:xfrm>
             <a:off x="411480" y="1188720"/>
-            <a:ext cx="11365992" cy="384048"/>
+            <a:ext cx="5623560" cy="384048"/>
           </a:xfrm>
           <a:prstGeom prst="roundRect">
             <a:avLst>
@@ -5539,7 +5816,6 @@
           <a:lstStyle/>
           <a:p>
             <a:pPr algn="ctr"/>
-            <a:endParaRPr/>
           </a:p>
         </p:txBody>
       </p:sp>
@@ -5552,7 +5828,7 @@
         <p:spPr>
           <a:xfrm>
             <a:off x="466344" y="1188720"/>
-            <a:ext cx="11274552" cy="384048"/>
+            <a:ext cx="5532120" cy="384048"/>
           </a:xfrm>
           <a:prstGeom prst="rect">
             <a:avLst/>
@@ -5560,7 +5836,7 @@
           <a:noFill/>
         </p:spPr>
         <p:txBody>
-          <a:bodyPr wrap="square" tIns="18288" rIns="45720" bIns="18288" anchor="ctr">
+          <a:bodyPr wrap="square" anchor="ctr" rIns="45720" tIns="18288" bIns="18288">
             <a:spAutoFit/>
           </a:bodyPr>
           <a:lstStyle/>
@@ -5577,7 +5853,7 @@
                 </a:solidFill>
                 <a:latin typeface="Calibri"/>
               </a:rPr>
-              <a:t>Proposed solution</a:t>
+              <a:t>The problem</a:t>
             </a:r>
           </a:p>
         </p:txBody>
@@ -5591,7 +5867,7 @@
         <p:spPr>
           <a:xfrm>
             <a:off x="411480" y="1627632"/>
-            <a:ext cx="11365992" cy="457200"/>
+            <a:ext cx="5623560" cy="640080"/>
           </a:xfrm>
           <a:prstGeom prst="rect">
             <a:avLst/>
@@ -5599,7 +5875,7 @@
           <a:noFill/>
         </p:spPr>
         <p:txBody>
-          <a:bodyPr wrap="square" lIns="45720" tIns="18288" rIns="45720" bIns="18288" anchor="t">
+          <a:bodyPr wrap="square" anchor="t" lIns="45720" rIns="45720" tIns="18288" bIns="18288">
             <a:spAutoFit/>
           </a:bodyPr>
           <a:lstStyle/>
@@ -5610,14 +5886,129 @@
               </a:spcAft>
             </a:pPr>
             <a:r>
-              <a:rPr sz="1500" b="1">
-                <a:solidFill>
-                  <a:srgbClr val="1F497D"/>
+              <a:rPr sz="1500" b="0">
+                <a:solidFill>
+                  <a:srgbClr val="262A33"/>
                 </a:solidFill>
                 <a:latin typeface="Calibri"/>
               </a:rPr>
-              <a:t>Paste, share or auto-read</a:t>
-            </a:r>
+              <a:t>Notices come as long paragraphs. Students miss dates, and find clashes too late.</a:t>
+            </a:r>
+          </a:p>
+        </p:txBody>
+      </p:sp>
+      <p:sp>
+        <p:nvSpPr>
+          <p:cNvPr id="15367" name="Rounded Rectangle 15366"/>
+          <p:cNvSpPr/>
+          <p:nvPr/>
+        </p:nvSpPr>
+        <p:spPr>
+          <a:xfrm>
+            <a:off x="6153912" y="1188720"/>
+            <a:ext cx="5623560" cy="384048"/>
+          </a:xfrm>
+          <a:prstGeom prst="roundRect">
+            <a:avLst>
+              <a:gd name="adj" fmla="val 18000"/>
+            </a:avLst>
+          </a:prstGeom>
+          <a:solidFill>
+            <a:srgbClr val="FFF8C2"/>
+          </a:solidFill>
+          <a:ln>
+            <a:noFill/>
+          </a:ln>
+          <a:effectLst/>
+        </p:spPr>
+        <p:style>
+          <a:lnRef idx="1">
+            <a:schemeClr val="accent1"/>
+          </a:lnRef>
+          <a:fillRef idx="3">
+            <a:schemeClr val="accent1"/>
+          </a:fillRef>
+          <a:effectRef idx="2">
+            <a:schemeClr val="accent1"/>
+          </a:effectRef>
+          <a:fontRef idx="minor">
+            <a:schemeClr val="lt1"/>
+          </a:fontRef>
+        </p:style>
+        <p:txBody>
+          <a:bodyPr rtlCol="0" anchor="ctr"/>
+          <a:lstStyle/>
+          <a:p>
+            <a:pPr algn="ctr"/>
+          </a:p>
+        </p:txBody>
+      </p:sp>
+      <p:sp>
+        <p:nvSpPr>
+          <p:cNvPr id="15368" name="TextBox 15367"/>
+          <p:cNvSpPr txBox="1"/>
+          <p:nvPr/>
+        </p:nvSpPr>
+        <p:spPr>
+          <a:xfrm>
+            <a:off x="6208776" y="1188720"/>
+            <a:ext cx="5532120" cy="384048"/>
+          </a:xfrm>
+          <a:prstGeom prst="rect">
+            <a:avLst/>
+          </a:prstGeom>
+          <a:noFill/>
+        </p:spPr>
+        <p:txBody>
+          <a:bodyPr wrap="square" anchor="ctr" rIns="45720" tIns="18288" bIns="18288">
+            <a:spAutoFit/>
+          </a:bodyPr>
+          <a:lstStyle/>
+          <a:p>
+            <a:pPr algn="l">
+              <a:spcAft>
+                <a:spcPts val="400"/>
+              </a:spcAft>
+            </a:pPr>
+            <a:r>
+              <a:rPr sz="1600" b="1">
+                <a:solidFill>
+                  <a:srgbClr val="6E5400"/>
+                </a:solidFill>
+                <a:latin typeface="Calibri"/>
+              </a:rPr>
+              <a:t>Our idea</a:t>
+            </a:r>
+          </a:p>
+        </p:txBody>
+      </p:sp>
+      <p:sp>
+        <p:nvSpPr>
+          <p:cNvPr id="15369" name="TextBox 15368"/>
+          <p:cNvSpPr txBox="1"/>
+          <p:nvPr/>
+        </p:nvSpPr>
+        <p:spPr>
+          <a:xfrm>
+            <a:off x="6153912" y="1627632"/>
+            <a:ext cx="5623560" cy="640080"/>
+          </a:xfrm>
+          <a:prstGeom prst="rect">
+            <a:avLst/>
+          </a:prstGeom>
+          <a:noFill/>
+        </p:spPr>
+        <p:txBody>
+          <a:bodyPr wrap="square" anchor="t" lIns="45720" rIns="45720" tIns="18288" bIns="18288">
+            <a:spAutoFit/>
+          </a:bodyPr>
+          <a:lstStyle/>
+          <a:p>
+            <a:pPr algn="l">
+              <a:spcAft>
+                <a:spcPts val="400"/>
+              </a:spcAft>
+            </a:pPr>
             <a:r>
               <a:rPr sz="1500" b="0">
                 <a:solidFill>
@@ -5625,7 +6016,7 @@
                 </a:solidFill>
                 <a:latin typeface="Calibri"/>
               </a:rPr>
-              <a:t> a college notice. It becomes </a:t>
+              <a:t>Paste a notice. The app finds each event, shows the words it read, checks for clashes and adds the </a:t>
             </a:r>
             <a:r>
               <a:rPr sz="1500" b="1">
@@ -5646,45 +6037,6 @@
                 </a:solidFill>
                 <a:latin typeface="Calibri"/>
               </a:rPr>
-              <a:t>, </a:t>
-            </a:r>
-            <a:r>
-              <a:rPr sz="1500" b="1">
-                <a:solidFill>
-                  <a:srgbClr val="1F497D"/>
-                </a:solidFill>
-                <a:latin typeface="Calibri"/>
-              </a:rPr>
-              <a:t>clashes</a:t>
-            </a:r>
-            <a:r>
-              <a:rPr sz="1500" b="0">
-                <a:solidFill>
-                  <a:srgbClr val="262A33"/>
-                </a:solidFill>
-                <a:latin typeface="Calibri"/>
-              </a:rPr>
-              <a:t> are found, and the student is asked only about an </a:t>
-            </a:r>
-            <a:r>
-              <a:rPr sz="1500" b="1">
-                <a:solidFill>
-                  <a:srgbClr val="262A33"/>
-                </a:solidFill>
-                <a:highlight>
-                  <a:srgbClr val="FFF176"/>
-                </a:highlight>
-                <a:latin typeface="Calibri"/>
-              </a:rPr>
-              <a:t>uncertain field</a:t>
-            </a:r>
-            <a:r>
-              <a:rPr sz="1500" b="0">
-                <a:solidFill>
-                  <a:srgbClr val="262A33"/>
-                </a:solidFill>
-                <a:latin typeface="Calibri"/>
-              </a:rPr>
               <a:t>.</a:t>
             </a:r>
           </a:p>
@@ -5692,21 +6044,21 @@
       </p:sp>
       <p:pic>
         <p:nvPicPr>
-          <p:cNvPr id="15367" name="Picture 15366" descr="shot-solution.png"/>
+          <p:cNvPr id="15370" name="Picture 15369" descr="shot-solution.png"/>
           <p:cNvPicPr>
             <a:picLocks noChangeAspect="1"/>
           </p:cNvPicPr>
           <p:nvPr/>
         </p:nvPicPr>
         <p:blipFill>
-          <a:blip r:embed="rId3"/>
+          <a:blip r:embed="rId4"/>
           <a:stretch>
             <a:fillRect/>
           </a:stretch>
         </p:blipFill>
         <p:spPr>
           <a:xfrm>
-            <a:off x="868680" y="2240280"/>
+            <a:off x="868680" y="2377440"/>
             <a:ext cx="6035040" cy="3198345"/>
           </a:xfrm>
           <a:prstGeom prst="rect">
@@ -5721,13 +6073,13 @@
       </p:pic>
       <p:sp>
         <p:nvSpPr>
-          <p:cNvPr id="15368" name="Oval 15367"/>
+          <p:cNvPr id="15371" name="Oval 15370"/>
           <p:cNvSpPr/>
           <p:nvPr/>
         </p:nvSpPr>
         <p:spPr>
           <a:xfrm>
-            <a:off x="484632" y="2228927"/>
+            <a:off x="484632" y="2366087"/>
             <a:ext cx="310896" cy="310896"/>
           </a:xfrm>
           <a:prstGeom prst="ellipse">
@@ -5758,7 +6110,7 @@
           </a:fontRef>
         </p:style>
         <p:txBody>
-          <a:bodyPr lIns="0" tIns="0" rIns="0" bIns="0" rtlCol="0" anchor="ctr"/>
+          <a:bodyPr rtlCol="0" anchor="ctr" lIns="0" rIns="0" tIns="0" bIns="0"/>
           <a:lstStyle/>
           <a:p>
             <a:pPr algn="ctr"/>
@@ -5776,13 +6128,13 @@
       </p:sp>
       <p:sp>
         <p:nvSpPr>
-          <p:cNvPr id="15369" name="Oval 15368"/>
+          <p:cNvPr id="15372" name="Oval 15371"/>
           <p:cNvSpPr/>
           <p:nvPr/>
         </p:nvSpPr>
         <p:spPr>
           <a:xfrm>
-            <a:off x="484632" y="3384512"/>
+            <a:off x="484632" y="3521672"/>
             <a:ext cx="310896" cy="310896"/>
           </a:xfrm>
           <a:prstGeom prst="ellipse">
@@ -5813,7 +6165,7 @@
           </a:fontRef>
         </p:style>
         <p:txBody>
-          <a:bodyPr lIns="0" tIns="0" rIns="0" bIns="0" rtlCol="0" anchor="ctr"/>
+          <a:bodyPr rtlCol="0" anchor="ctr" lIns="0" rIns="0" tIns="0" bIns="0"/>
           <a:lstStyle/>
           <a:p>
             <a:pPr algn="ctr"/>
@@ -5831,13 +6183,13 @@
       </p:sp>
       <p:sp>
         <p:nvSpPr>
-          <p:cNvPr id="15370" name="Oval 15369"/>
+          <p:cNvPr id="15373" name="Oval 15372"/>
           <p:cNvSpPr/>
           <p:nvPr/>
         </p:nvSpPr>
         <p:spPr>
           <a:xfrm>
-            <a:off x="484632" y="4757653"/>
+            <a:off x="484632" y="4894813"/>
             <a:ext cx="310896" cy="310896"/>
           </a:xfrm>
           <a:prstGeom prst="ellipse">
@@ -5868,7 +6220,7 @@
           </a:fontRef>
         </p:style>
         <p:txBody>
-          <a:bodyPr lIns="0" tIns="0" rIns="0" bIns="0" rtlCol="0" anchor="ctr"/>
+          <a:bodyPr rtlCol="0" anchor="ctr" lIns="0" rIns="0" tIns="0" bIns="0"/>
           <a:lstStyle/>
           <a:p>
             <a:pPr algn="ctr"/>
@@ -5886,13 +6238,13 @@
       </p:sp>
       <p:sp>
         <p:nvSpPr>
-          <p:cNvPr id="15371" name="TextBox 15370"/>
+          <p:cNvPr id="15374" name="TextBox 15373"/>
           <p:cNvSpPr txBox="1"/>
           <p:nvPr/>
         </p:nvSpPr>
         <p:spPr>
           <a:xfrm>
-            <a:off x="502920" y="5530065"/>
+            <a:off x="502920" y="5667225"/>
             <a:ext cx="6400800" cy="365760"/>
           </a:xfrm>
           <a:prstGeom prst="rect">
@@ -5901,7 +6253,7 @@
           <a:noFill/>
         </p:spPr>
         <p:txBody>
-          <a:bodyPr wrap="square" lIns="45720" tIns="18288" rIns="45720" bIns="18288" anchor="t">
+          <a:bodyPr wrap="square" anchor="t" lIns="45720" rIns="45720" tIns="18288" bIns="18288">
             <a:spAutoFit/>
           </a:bodyPr>
           <a:lstStyle/>
@@ -5927,7 +6279,7 @@
                 </a:solidFill>
                 <a:latin typeface="Calibri"/>
               </a:rPr>
-              <a:t> The answer first      </a:t>
+              <a:t> The answer first     </a:t>
             </a:r>
             <a:r>
               <a:rPr sz="1300" b="1">
@@ -5945,7 +6297,7 @@
                 </a:solidFill>
                 <a:latin typeface="Calibri"/>
               </a:rPr>
-              <a:t> Highlighter shows the source words      </a:t>
+              <a:t> Each date shows the words it came from     </a:t>
             </a:r>
             <a:r>
               <a:rPr sz="1300" b="1">
@@ -5963,20 +6315,20 @@
                 </a:solidFill>
                 <a:latin typeface="Calibri"/>
               </a:rPr>
-              <a:t> One clean line per event</a:t>
-            </a:r>
-          </a:p>
-        </p:txBody>
-      </p:sp>
-      <p:sp>
-        <p:nvSpPr>
-          <p:cNvPr id="15372" name="Rounded Rectangle 15371"/>
+              <a:t> One line per event</a:t>
+            </a:r>
+          </a:p>
+        </p:txBody>
+      </p:sp>
+      <p:sp>
+        <p:nvSpPr>
+          <p:cNvPr id="15375" name="Rounded Rectangle 15374"/>
           <p:cNvSpPr/>
           <p:nvPr/>
         </p:nvSpPr>
         <p:spPr>
           <a:xfrm>
-            <a:off x="7178040" y="2240280"/>
+            <a:off x="7178040" y="2377440"/>
             <a:ext cx="4599432" cy="384048"/>
           </a:xfrm>
           <a:prstGeom prst="roundRect">
@@ -6011,19 +6363,18 @@
           <a:lstStyle/>
           <a:p>
             <a:pPr algn="ctr"/>
-            <a:endParaRPr/>
-          </a:p>
-        </p:txBody>
-      </p:sp>
-      <p:sp>
-        <p:nvSpPr>
-          <p:cNvPr id="15373" name="TextBox 15372"/>
+          </a:p>
+        </p:txBody>
+      </p:sp>
+      <p:sp>
+        <p:nvSpPr>
+          <p:cNvPr id="15376" name="TextBox 15375"/>
           <p:cNvSpPr txBox="1"/>
           <p:nvPr/>
         </p:nvSpPr>
         <p:spPr>
           <a:xfrm>
-            <a:off x="7232903" y="2240280"/>
+            <a:off x="7232903" y="2377440"/>
             <a:ext cx="4507992" cy="384048"/>
           </a:xfrm>
           <a:prstGeom prst="rect">
@@ -6032,7 +6383,7 @@
           <a:noFill/>
         </p:spPr>
         <p:txBody>
-          <a:bodyPr wrap="square" tIns="18288" rIns="45720" bIns="18288" anchor="ctr">
+          <a:bodyPr wrap="square" anchor="ctr" rIns="45720" tIns="18288" bIns="18288">
             <a:spAutoFit/>
           </a:bodyPr>
           <a:lstStyle/>
@@ -6049,21 +6400,21 @@
                 </a:solidFill>
                 <a:latin typeface="Calibri"/>
               </a:rPr>
-              <a:t>How it addresses the problem</a:t>
-            </a:r>
-          </a:p>
-        </p:txBody>
-      </p:sp>
-      <p:sp>
-        <p:nvSpPr>
-          <p:cNvPr id="15374" name="TextBox 15373"/>
+              <a:t>Why it is different</a:t>
+            </a:r>
+          </a:p>
+        </p:txBody>
+      </p:sp>
+      <p:sp>
+        <p:nvSpPr>
+          <p:cNvPr id="15377" name="TextBox 15376"/>
           <p:cNvSpPr txBox="1"/>
           <p:nvPr/>
         </p:nvSpPr>
         <p:spPr>
           <a:xfrm>
-            <a:off x="7178040" y="2697480"/>
-            <a:ext cx="4599432" cy="1371600"/>
+            <a:off x="7178040" y="2834640"/>
+            <a:ext cx="4599432" cy="2651760"/>
           </a:xfrm>
           <a:prstGeom prst="rect">
             <a:avLst/>
@@ -6071,14 +6422,14 @@
           <a:noFill/>
         </p:spPr>
         <p:txBody>
-          <a:bodyPr wrap="square" lIns="45720" tIns="18288" rIns="45720" bIns="18288" anchor="t">
+          <a:bodyPr wrap="square" anchor="t" lIns="45720" rIns="45720" tIns="18288" bIns="18288">
             <a:spAutoFit/>
           </a:bodyPr>
           <a:lstStyle/>
           <a:p>
             <a:pPr algn="l">
               <a:spcAft>
-                <a:spcPts val="500"/>
+                <a:spcPts val="700"/>
               </a:spcAft>
             </a:pPr>
             <a:r>
@@ -6088,7 +6439,7 @@
                 </a:solidFill>
                 <a:latin typeface="Calibri"/>
               </a:rPr>
-              <a:t>Every field shows why:</a:t>
+              <a:t>Shows its working.</a:t>
             </a:r>
             <a:r>
               <a:rPr sz="1400" b="0">
@@ -6097,13 +6448,13 @@
                 </a:solidFill>
                 <a:latin typeface="Calibri"/>
               </a:rPr>
-              <a:t> the exact words it came from.</a:t>
+              <a:t> Every date, time and room points to the words it came from.</a:t>
             </a:r>
           </a:p>
           <a:p>
             <a:pPr algn="l">
               <a:spcAft>
-                <a:spcPts val="500"/>
+                <a:spcPts val="700"/>
               </a:spcAft>
             </a:pPr>
             <a:r>
@@ -6113,7 +6464,7 @@
                 </a:solidFill>
                 <a:latin typeface="Calibri"/>
               </a:rPr>
-              <a:t>Clash check:</a:t>
+              <a:t>Asks when unsure.</a:t>
             </a:r>
             <a:r>
               <a:rPr sz="1400" b="0">
@@ -6122,13 +6473,13 @@
                 </a:solidFill>
                 <a:latin typeface="Calibri"/>
               </a:rPr>
-              <a:t> overlap, and a deadline that falls inside another event.</a:t>
+              <a:t> "Thursday? But 13 Nov 2026 is a Friday."</a:t>
             </a:r>
           </a:p>
           <a:p>
             <a:pPr algn="l">
               <a:spcAft>
-                <a:spcPts val="500"/>
+                <a:spcPts val="700"/>
               </a:spcAft>
             </a:pPr>
             <a:r>
@@ -6138,7 +6489,7 @@
                 </a:solidFill>
                 <a:latin typeface="Calibri"/>
               </a:rPr>
-              <a:t>One tap</a:t>
+              <a:t>Finds clashes.</a:t>
             </a:r>
             <a:r>
               <a:rPr sz="1400" b="0">
@@ -6147,166 +6498,32 @@
                 </a:solidFill>
                 <a:latin typeface="Calibri"/>
               </a:rPr>
-              <a:t> to Google Calendar; .ics and a class link as backups.</a:t>
-            </a:r>
-          </a:p>
-        </p:txBody>
-      </p:sp>
-      <p:sp>
-        <p:nvSpPr>
-          <p:cNvPr id="15375" name="Rounded Rectangle 15374"/>
-          <p:cNvSpPr/>
-          <p:nvPr/>
-        </p:nvSpPr>
-        <p:spPr>
-          <a:xfrm>
-            <a:off x="7178040" y="4069080"/>
-            <a:ext cx="4599432" cy="384048"/>
-          </a:xfrm>
-          <a:prstGeom prst="roundRect">
-            <a:avLst>
-              <a:gd name="adj" fmla="val 18000"/>
-            </a:avLst>
-          </a:prstGeom>
-          <a:solidFill>
-            <a:srgbClr val="FFF8C2"/>
-          </a:solidFill>
-          <a:ln>
-            <a:noFill/>
-          </a:ln>
-          <a:effectLst/>
-        </p:spPr>
-        <p:style>
-          <a:lnRef idx="1">
-            <a:schemeClr val="accent1"/>
-          </a:lnRef>
-          <a:fillRef idx="3">
-            <a:schemeClr val="accent1"/>
-          </a:fillRef>
-          <a:effectRef idx="2">
-            <a:schemeClr val="accent1"/>
-          </a:effectRef>
-          <a:fontRef idx="minor">
-            <a:schemeClr val="lt1"/>
-          </a:fontRef>
-        </p:style>
-        <p:txBody>
-          <a:bodyPr rtlCol="0" anchor="ctr"/>
-          <a:lstStyle/>
-          <a:p>
-            <a:pPr algn="ctr"/>
-            <a:endParaRPr/>
-          </a:p>
-        </p:txBody>
-      </p:sp>
-      <p:sp>
-        <p:nvSpPr>
-          <p:cNvPr id="15376" name="TextBox 15375"/>
-          <p:cNvSpPr txBox="1"/>
-          <p:nvPr/>
-        </p:nvSpPr>
-        <p:spPr>
-          <a:xfrm>
-            <a:off x="7232903" y="4069080"/>
-            <a:ext cx="4507992" cy="384048"/>
-          </a:xfrm>
-          <a:prstGeom prst="rect">
-            <a:avLst/>
-          </a:prstGeom>
-          <a:noFill/>
-        </p:spPr>
-        <p:txBody>
-          <a:bodyPr wrap="square" tIns="18288" rIns="45720" bIns="18288" anchor="ctr">
-            <a:spAutoFit/>
-          </a:bodyPr>
-          <a:lstStyle/>
+              <a:t> Two events at once, or a deadline during a class.</a:t>
+            </a:r>
+          </a:p>
           <a:p>
             <a:pPr algn="l">
               <a:spcAft>
-                <a:spcPts val="400"/>
+                <a:spcPts val="700"/>
               </a:spcAft>
             </a:pPr>
             <a:r>
-              <a:rPr sz="1600" b="1">
-                <a:solidFill>
-                  <a:srgbClr val="6E5400"/>
+              <a:rPr sz="1400" b="1">
+                <a:solidFill>
+                  <a:srgbClr val="1F497D"/>
                 </a:solidFill>
                 <a:latin typeface="Calibri"/>
               </a:rPr>
-              <a:t>Innovation and uniqueness</a:t>
-            </a:r>
-          </a:p>
-        </p:txBody>
-      </p:sp>
-      <p:sp>
-        <p:nvSpPr>
-          <p:cNvPr id="15377" name="TextBox 15376"/>
-          <p:cNvSpPr txBox="1"/>
-          <p:nvPr/>
-        </p:nvSpPr>
-        <p:spPr>
-          <a:xfrm>
-            <a:off x="7178040" y="4526280"/>
-            <a:ext cx="4599432" cy="1005840"/>
-          </a:xfrm>
-          <a:prstGeom prst="rect">
-            <a:avLst/>
-          </a:prstGeom>
-          <a:noFill/>
-        </p:spPr>
-        <p:txBody>
-          <a:bodyPr wrap="square" lIns="45720" tIns="18288" rIns="45720" bIns="18288" anchor="t">
-            <a:spAutoFit/>
-          </a:bodyPr>
-          <a:lstStyle/>
-          <a:p>
-            <a:pPr algn="l">
-              <a:spcAft>
-                <a:spcPts val="500"/>
-              </a:spcAft>
-            </a:pPr>
-            <a:r>
-              <a:rPr sz="1400" b="1">
-                <a:solidFill>
-                  <a:srgbClr val="1F497D"/>
+              <a:t>No AI.</a:t>
+            </a:r>
+            <a:r>
+              <a:rPr sz="1400" b="0">
+                <a:solidFill>
+                  <a:srgbClr val="262A33"/>
                 </a:solidFill>
                 <a:latin typeface="Calibri"/>
               </a:rPr>
-              <a:t>Plain rules on the phone</a:t>
-            </a:r>
-            <a:r>
-              <a:rPr sz="1400" b="0">
-                <a:solidFill>
-                  <a:srgbClr val="262A33"/>
-                </a:solidFill>
-                <a:latin typeface="Calibri"/>
-              </a:rPr>
-              <a:t>, no AI: same answer every time, the notice never leaves the device.</a:t>
-            </a:r>
-          </a:p>
-          <a:p>
-            <a:pPr algn="l">
-              <a:spcAft>
-                <a:spcPts val="500"/>
-              </a:spcAft>
-            </a:pPr>
-            <a:r>
-              <a:rPr sz="1400" b="1">
-                <a:solidFill>
-                  <a:srgbClr val="1F497D"/>
-                </a:solidFill>
-                <a:latin typeface="Calibri"/>
-              </a:rPr>
-              <a:t>Asks, never guesses:</a:t>
-            </a:r>
-            <a:r>
-              <a:rPr sz="1400" b="0">
-                <a:solidFill>
-                  <a:srgbClr val="262A33"/>
-                </a:solidFill>
-                <a:latin typeface="Calibri"/>
-              </a:rPr>
-              <a:t> "Thursday, but 13 Nov 2026 is a Friday."</a:t>
+              <a:t> Same answer every time, and the reading happens on the phone.</a:t>
             </a:r>
           </a:p>
         </p:txBody>
@@ -6348,7 +6565,7 @@
           </a:fontRef>
         </p:style>
         <p:txBody>
-          <a:bodyPr wrap="square" lIns="128016" rIns="128016" rtlCol="0" anchor="ctr"/>
+          <a:bodyPr rtlCol="0" anchor="ctr" wrap="square" lIns="128016" rIns="128016"/>
           <a:lstStyle/>
           <a:p>
             <a:pPr algn="ctr"/>
@@ -6443,7 +6660,6 @@
           <a:lstStyle/>
           <a:p>
             <a:pPr algn="ctr"/>
-            <a:endParaRPr/>
           </a:p>
         </p:txBody>
       </p:sp>
@@ -6531,7 +6747,7 @@
           <a:bodyPr anchor="ctr"/>
           <a:lstStyle/>
           <a:p>
-            <a:pPr algn="ctr" eaLnBrk="1" hangingPunct="1"/>
+            <a:pPr eaLnBrk="1" hangingPunct="1" algn="ctr"/>
             <a:r>
               <a:rPr lang="en-US" sz="3600" b="1" dirty="0">
                 <a:latin typeface="Times New Roman" panose="02020603050405020304" pitchFamily="18" charset="0"/>
@@ -6622,7 +6838,7 @@
                 <a16:creationId xmlns:a16="http://schemas.microsoft.com/office/drawing/2014/main" id="{5DBCE864-823D-4A13-9607-5DA1F0ED5FB8}"/>
               </a:ext>
               <a:ext uri="{C183D7F6-B498-43B3-948B-1728B52AA6E4}">
-                <adec:decorative xmlns:adec="http://schemas.microsoft.com/office/drawing/2017/decorative" val="0"/>
+                <adec:decorative xmlns:adec="http://schemas.microsoft.com/office/drawing/2017/decorative" xmlns="" val="0"/>
               </a:ext>
             </a:extLst>
           </p:cNvPr>
@@ -6658,7 +6874,7 @@
           <a:p>
             <a:pPr algn="ctr"/>
             <a:r>
-              <a:rPr lang="en-US" sz="1500" b="1" dirty="0"/>
+              <a:rPr lang="en-US" dirty="0" b="1" sz="1500"/>
               <a:t>Nova Nexus</a:t>
             </a:r>
             <a:endParaRPr lang="en-IN" dirty="0"/>
@@ -6682,7 +6898,7 @@
           <a:noFill/>
         </p:spPr>
         <p:txBody>
-          <a:bodyPr wrap="square" lIns="45720" tIns="18288" rIns="45720" bIns="18288" anchor="t">
+          <a:bodyPr wrap="square" anchor="t" lIns="45720" rIns="45720" tIns="18288" bIns="18288">
             <a:spAutoFit/>
           </a:bodyPr>
           <a:lstStyle/>
@@ -6763,7 +6979,6 @@
           <a:lstStyle/>
           <a:p>
             <a:pPr algn="ctr"/>
-            <a:endParaRPr/>
           </a:p>
         </p:txBody>
       </p:sp>
@@ -6784,7 +6999,7 @@
           <a:noFill/>
         </p:spPr>
         <p:txBody>
-          <a:bodyPr wrap="square" tIns="18288" rIns="45720" bIns="18288" anchor="ctr">
+          <a:bodyPr wrap="square" anchor="ctr" rIns="45720" tIns="18288" bIns="18288">
             <a:spAutoFit/>
           </a:bodyPr>
           <a:lstStyle/>
@@ -6801,7 +7016,7 @@
                 </a:solidFill>
                 <a:latin typeface="Calibri"/>
               </a:rPr>
-              <a:t>Technologies used</a:t>
+              <a:t>What we use</a:t>
             </a:r>
           </a:p>
         </p:txBody>
@@ -6815,7 +7030,7 @@
         <p:spPr>
           <a:xfrm>
             <a:off x="411480" y="1691640"/>
-            <a:ext cx="4983480" cy="3291840"/>
+            <a:ext cx="4983480" cy="3566160"/>
           </a:xfrm>
           <a:prstGeom prst="rect">
             <a:avLst/>
@@ -6823,14 +7038,14 @@
           <a:noFill/>
         </p:spPr>
         <p:txBody>
-          <a:bodyPr wrap="square" lIns="45720" tIns="18288" rIns="45720" bIns="18288" anchor="t">
+          <a:bodyPr wrap="square" anchor="t" lIns="45720" rIns="45720" tIns="18288" bIns="18288">
             <a:spAutoFit/>
           </a:bodyPr>
           <a:lstStyle/>
           <a:p>
             <a:pPr algn="l">
               <a:spcAft>
-                <a:spcPts val="1000"/>
+                <a:spcPts val="900"/>
               </a:spcAft>
             </a:pPr>
             <a:r>
@@ -6840,7 +7055,7 @@
                 </a:solidFill>
                 <a:latin typeface="Calibri"/>
               </a:rPr>
-              <a:t>Engine:</a:t>
+              <a:t>App:</a:t>
             </a:r>
             <a:r>
               <a:rPr sz="1400" b="0">
@@ -6849,13 +7064,13 @@
                 </a:solidFill>
                 <a:latin typeface="Calibri"/>
               </a:rPr>
-              <a:t> plain JavaScript rules; runs in the browser. No server, no AI model.</a:t>
+              <a:t> a web page in plain JavaScript. It runs in the browser, so it works offline.</a:t>
             </a:r>
           </a:p>
           <a:p>
             <a:pPr algn="l">
               <a:spcAft>
-                <a:spcPts val="1000"/>
+                <a:spcPts val="900"/>
               </a:spcAft>
             </a:pPr>
             <a:r>
@@ -6865,7 +7080,7 @@
                 </a:solidFill>
                 <a:latin typeface="Calibri"/>
               </a:rPr>
-              <a:t>Inputs:</a:t>
+              <a:t>Reading rules:</a:t>
             </a:r>
             <a:r>
               <a:rPr sz="1400" b="0">
@@ -6874,13 +7089,13 @@
                 </a:solidFill>
                 <a:latin typeface="Calibri"/>
               </a:rPr>
-              <a:t> paste or share (installable web app), photos and PDFs read on the device, a Gmail Apps Script, an Android companion app.</a:t>
+              <a:t> dates (13 Nov, 13/11/2026), times (2 PM, 14:00, 12 noon), rooms, and words like "postponed to".</a:t>
             </a:r>
           </a:p>
           <a:p>
             <a:pPr algn="l">
               <a:spcAft>
-                <a:spcPts val="1000"/>
+                <a:spcPts val="900"/>
               </a:spcAft>
             </a:pPr>
             <a:r>
@@ -6890,7 +7105,7 @@
                 </a:solidFill>
                 <a:latin typeface="Calibri"/>
               </a:rPr>
-              <a:t>Calendar:</a:t>
+              <a:t>Photos and PDFs:</a:t>
             </a:r>
             <a:r>
               <a:rPr sz="1400" b="0">
@@ -6899,13 +7114,13 @@
                 </a:solidFill>
                 <a:latin typeface="Calibri"/>
               </a:rPr>
-              <a:t> .ics file (India time, reminders), Google Calendar in one tap, a class feed on a free Cloudflare Worker.</a:t>
+              <a:t> read on the phone; every date from a photo is marked for a check.</a:t>
             </a:r>
           </a:p>
           <a:p>
             <a:pPr algn="l">
               <a:spcAft>
-                <a:spcPts val="1000"/>
+                <a:spcPts val="900"/>
               </a:spcAft>
             </a:pPr>
             <a:r>
@@ -6915,7 +7130,7 @@
                 </a:solidFill>
                 <a:latin typeface="Calibri"/>
               </a:rPr>
-              <a:t>Tests on every push:</a:t>
+              <a:t>Calendar:</a:t>
             </a:r>
             <a:r>
               <a:rPr sz="1400" b="0">
@@ -6924,36 +7139,13 @@
                 </a:solidFill>
                 <a:latin typeface="Calibri"/>
               </a:rPr>
-              <a:t> 32 engine, 9 feed, 7 Gmail, 5 app tests; 73 browser checks.</a:t>
-            </a:r>
-          </a:p>
-        </p:txBody>
-      </p:sp>
-      <p:sp>
-        <p:nvSpPr>
-          <p:cNvPr id="17415" name="TextBox 17414"/>
-          <p:cNvSpPr txBox="1"/>
-          <p:nvPr/>
-        </p:nvSpPr>
-        <p:spPr>
-          <a:xfrm>
-            <a:off x="411480" y="5074920"/>
-            <a:ext cx="4983480" cy="1097280"/>
-          </a:xfrm>
-          <a:prstGeom prst="rect">
-            <a:avLst/>
-          </a:prstGeom>
-          <a:noFill/>
-        </p:spPr>
-        <p:txBody>
-          <a:bodyPr wrap="square" lIns="45720" tIns="18288" rIns="45720" bIns="18288" anchor="t">
-            <a:spAutoFit/>
-          </a:bodyPr>
-          <a:lstStyle/>
+              <a:t> an .ics file, Google Calendar in one tap, or a class calendar link from a free Cloudflare Worker.</a:t>
+            </a:r>
+          </a:p>
           <a:p>
             <a:pPr algn="l">
               <a:spcAft>
-                <a:spcPts val="400"/>
+                <a:spcPts val="900"/>
               </a:spcAft>
             </a:pPr>
             <a:r>
@@ -6963,7 +7155,7 @@
                 </a:solidFill>
                 <a:latin typeface="Calibri"/>
               </a:rPr>
-              <a:t>One engine everywhere:</a:t>
+              <a:t>Tested:</a:t>
             </a:r>
             <a:r>
               <a:rPr sz="1400" b="0">
@@ -6972,14 +7164,14 @@
                 </a:solidFill>
                 <a:latin typeface="Calibri"/>
               </a:rPr>
-              <a:t> the web app, the Gmail script and the Android app run the same bundled rules file.</a:t>
-            </a:r>
-          </a:p>
-        </p:txBody>
-      </p:sp>
-      <p:sp>
-        <p:nvSpPr>
-          <p:cNvPr id="17416" name="Rounded Rectangle 17415"/>
+              <a:t> 34 rule tests and 75 browser checks run on every change.</a:t>
+            </a:r>
+          </a:p>
+        </p:txBody>
+      </p:sp>
+      <p:sp>
+        <p:nvSpPr>
+          <p:cNvPr id="17415" name="Rounded Rectangle 17414"/>
           <p:cNvSpPr/>
           <p:nvPr/>
         </p:nvSpPr>
@@ -7020,13 +7212,12 @@
           <a:lstStyle/>
           <a:p>
             <a:pPr algn="ctr"/>
-            <a:endParaRPr/>
-          </a:p>
-        </p:txBody>
-      </p:sp>
-      <p:sp>
-        <p:nvSpPr>
-          <p:cNvPr id="17417" name="TextBox 17416"/>
+          </a:p>
+        </p:txBody>
+      </p:sp>
+      <p:sp>
+        <p:nvSpPr>
+          <p:cNvPr id="17416" name="TextBox 17415"/>
           <p:cNvSpPr txBox="1"/>
           <p:nvPr/>
         </p:nvSpPr>
@@ -7041,7 +7232,7 @@
           <a:noFill/>
         </p:spPr>
         <p:txBody>
-          <a:bodyPr wrap="square" tIns="18288" rIns="45720" bIns="18288" anchor="ctr">
+          <a:bodyPr wrap="square" anchor="ctr" rIns="45720" tIns="18288" bIns="18288">
             <a:spAutoFit/>
           </a:bodyPr>
           <a:lstStyle/>
@@ -7058,14 +7249,14 @@
                 </a:solidFill>
                 <a:latin typeface="Calibri"/>
               </a:rPr>
-              <a:t>Methodology</a:t>
-            </a:r>
-          </a:p>
-        </p:txBody>
-      </p:sp>
-      <p:sp>
-        <p:nvSpPr>
-          <p:cNvPr id="17418" name="Rounded Rectangle 17417"/>
+              <a:t>How a notice becomes events</a:t>
+            </a:r>
+          </a:p>
+        </p:txBody>
+      </p:sp>
+      <p:sp>
+        <p:nvSpPr>
+          <p:cNvPr id="17417" name="Rounded Rectangle 17416"/>
           <p:cNvSpPr/>
           <p:nvPr/>
         </p:nvSpPr>
@@ -7104,7 +7295,7 @@
           </a:fontRef>
         </p:style>
         <p:txBody>
-          <a:bodyPr wrap="square" tIns="36576" bIns="36576" rtlCol="0" anchor="ctr"/>
+          <a:bodyPr rtlCol="0" anchor="ctr" wrap="square" tIns="36576" bIns="36576"/>
           <a:lstStyle/>
           <a:p>
             <a:pPr algn="ctr"/>
@@ -7122,7 +7313,7 @@
       </p:sp>
       <p:cxnSp>
         <p:nvCxnSpPr>
-          <p:cNvPr id="17419" name="Connector 17418"/>
+          <p:cNvPr id="17418" name="Connector 17417"/>
           <p:cNvCxnSpPr/>
           <p:nvPr/>
         </p:nvCxnSpPr>
@@ -7158,7 +7349,7 @@
       </p:cxnSp>
       <p:sp>
         <p:nvSpPr>
-          <p:cNvPr id="17420" name="Rounded Rectangle 17419"/>
+          <p:cNvPr id="17419" name="Rounded Rectangle 17418"/>
           <p:cNvSpPr/>
           <p:nvPr/>
         </p:nvSpPr>
@@ -7197,7 +7388,7 @@
           </a:fontRef>
         </p:style>
         <p:txBody>
-          <a:bodyPr wrap="square" tIns="36576" bIns="36576" rtlCol="0" anchor="ctr"/>
+          <a:bodyPr rtlCol="0" anchor="ctr" wrap="square" tIns="36576" bIns="36576"/>
           <a:lstStyle/>
           <a:p>
             <a:pPr algn="ctr"/>
@@ -7215,7 +7406,7 @@
       </p:sp>
       <p:cxnSp>
         <p:nvCxnSpPr>
-          <p:cNvPr id="17421" name="Connector 17420"/>
+          <p:cNvPr id="17420" name="Connector 17419"/>
           <p:cNvCxnSpPr/>
           <p:nvPr/>
         </p:nvCxnSpPr>
@@ -7251,7 +7442,7 @@
       </p:cxnSp>
       <p:sp>
         <p:nvSpPr>
-          <p:cNvPr id="17422" name="Rounded Rectangle 17421"/>
+          <p:cNvPr id="17421" name="Rounded Rectangle 17420"/>
           <p:cNvSpPr/>
           <p:nvPr/>
         </p:nvSpPr>
@@ -7266,12 +7457,13 @@
             </a:avLst>
           </a:prstGeom>
           <a:solidFill>
-            <a:srgbClr val="FFD59C"/>
+            <a:srgbClr val="FFFFFF"/>
           </a:solidFill>
           <a:ln w="15875">
             <a:solidFill>
               <a:srgbClr val="864500"/>
             </a:solidFill>
+            <a:prstDash val="dash"/>
           </a:ln>
           <a:effectLst/>
         </p:spPr>
@@ -7290,7 +7482,7 @@
           </a:fontRef>
         </p:style>
         <p:txBody>
-          <a:bodyPr wrap="square" tIns="36576" bIns="36576" rtlCol="0" anchor="ctr"/>
+          <a:bodyPr rtlCol="0" anchor="ctr" wrap="square" tIns="36576" bIns="36576"/>
           <a:lstStyle/>
           <a:p>
             <a:pPr algn="ctr"/>
@@ -7308,7 +7500,7 @@
       </p:sp>
       <p:cxnSp>
         <p:nvCxnSpPr>
-          <p:cNvPr id="17423" name="Connector 17422"/>
+          <p:cNvPr id="17422" name="Connector 17421"/>
           <p:cNvCxnSpPr/>
           <p:nvPr/>
         </p:nvCxnSpPr>
@@ -7344,7 +7536,7 @@
       </p:cxnSp>
       <p:sp>
         <p:nvSpPr>
-          <p:cNvPr id="17424" name="Rounded Rectangle 17423"/>
+          <p:cNvPr id="17423" name="Rounded Rectangle 17422"/>
           <p:cNvSpPr/>
           <p:nvPr/>
         </p:nvSpPr>
@@ -7359,12 +7551,13 @@
             </a:avLst>
           </a:prstGeom>
           <a:solidFill>
-            <a:srgbClr val="B9F5A6"/>
+            <a:srgbClr val="FFFFFF"/>
           </a:solidFill>
           <a:ln w="15875">
             <a:solidFill>
               <a:srgbClr val="1E6116"/>
             </a:solidFill>
+            <a:prstDash val="dash"/>
           </a:ln>
           <a:effectLst/>
         </p:spPr>
@@ -7383,7 +7576,7 @@
           </a:fontRef>
         </p:style>
         <p:txBody>
-          <a:bodyPr wrap="square" tIns="36576" bIns="36576" rtlCol="0" anchor="ctr"/>
+          <a:bodyPr rtlCol="0" anchor="ctr" wrap="square" tIns="36576" bIns="36576"/>
           <a:lstStyle/>
           <a:p>
             <a:pPr algn="ctr"/>
@@ -7401,7 +7594,7 @@
       </p:sp>
       <p:cxnSp>
         <p:nvCxnSpPr>
-          <p:cNvPr id="17425" name="Connector 17424"/>
+          <p:cNvPr id="17424" name="Connector 17423"/>
           <p:cNvCxnSpPr/>
           <p:nvPr/>
         </p:nvCxnSpPr>
@@ -7437,7 +7630,7 @@
       </p:cxnSp>
       <p:sp>
         <p:nvSpPr>
-          <p:cNvPr id="17426" name="Rounded Rectangle 17425"/>
+          <p:cNvPr id="17425" name="Rounded Rectangle 17424"/>
           <p:cNvSpPr/>
           <p:nvPr/>
         </p:nvSpPr>
@@ -7476,7 +7669,7 @@
           </a:fontRef>
         </p:style>
         <p:txBody>
-          <a:bodyPr wrap="square" tIns="36576" bIns="36576" rtlCol="0" anchor="ctr"/>
+          <a:bodyPr rtlCol="0" anchor="ctr" wrap="square" tIns="36576" bIns="36576"/>
           <a:lstStyle/>
           <a:p>
             <a:pPr algn="l"/>
@@ -7487,7 +7680,7 @@
                 </a:solidFill>
                 <a:latin typeface="Calibri"/>
               </a:rPr>
-              <a:t>Rules engine</a:t>
+              <a:t>Reading rules</a:t>
             </a:r>
           </a:p>
           <a:p>
@@ -7503,14 +7696,14 @@
                 </a:solidFill>
                 <a:latin typeface="Calibri"/>
               </a:rPr>
-              <a:t>dates, times, rooms; a reason for every field</a:t>
-            </a:r>
-          </a:p>
-        </p:txBody>
-      </p:sp>
-      <p:sp>
-        <p:nvSpPr>
-          <p:cNvPr id="17427" name="Rounded Rectangle 17426"/>
+              <a:t>find dates, times and rooms; keep a reason for each</a:t>
+            </a:r>
+          </a:p>
+        </p:txBody>
+      </p:sp>
+      <p:sp>
+        <p:nvSpPr>
+          <p:cNvPr id="17426" name="Rounded Rectangle 17425"/>
           <p:cNvSpPr/>
           <p:nvPr/>
         </p:nvSpPr>
@@ -7549,18 +7742,18 @@
           </a:fontRef>
         </p:style>
         <p:txBody>
-          <a:bodyPr wrap="square" tIns="36576" bIns="36576" rtlCol="0" anchor="ctr"/>
+          <a:bodyPr rtlCol="0" anchor="ctr" wrap="square" tIns="36576" bIns="36576"/>
           <a:lstStyle/>
           <a:p>
             <a:pPr algn="l"/>
             <a:r>
-              <a:rPr sz="1300" b="1">
+              <a:rPr sz="1400" b="1">
                 <a:solidFill>
                   <a:srgbClr val="1E6B34"/>
                 </a:solidFill>
                 <a:latin typeface="Calibri"/>
               </a:rPr>
-              <a:t>Nothing uncertain</a:t>
+              <a:t>Sure</a:t>
             </a:r>
           </a:p>
           <a:p>
@@ -7583,7 +7776,7 @@
       </p:sp>
       <p:sp>
         <p:nvSpPr>
-          <p:cNvPr id="17428" name="Rounded Rectangle 17427"/>
+          <p:cNvPr id="17427" name="Rounded Rectangle 17426"/>
           <p:cNvSpPr/>
           <p:nvPr/>
         </p:nvSpPr>
@@ -7622,18 +7815,18 @@
           </a:fontRef>
         </p:style>
         <p:txBody>
-          <a:bodyPr wrap="square" tIns="36576" bIns="36576" rtlCol="0" anchor="ctr"/>
+          <a:bodyPr rtlCol="0" anchor="ctr" wrap="square" tIns="36576" bIns="36576"/>
           <a:lstStyle/>
           <a:p>
             <a:pPr algn="l"/>
             <a:r>
-              <a:rPr sz="1300" b="1">
+              <a:rPr sz="1400" b="1">
                 <a:solidFill>
                   <a:srgbClr val="9A5B00"/>
                 </a:solidFill>
                 <a:latin typeface="Calibri"/>
               </a:rPr>
-              <a:t>An amber field</a:t>
+              <a:t>Not sure</a:t>
             </a:r>
           </a:p>
           <a:p>
@@ -7649,14 +7842,14 @@
                 </a:solidFill>
                 <a:latin typeface="Calibri"/>
               </a:rPr>
-              <a:t>asks only for that one</a:t>
+              <a:t>asks you first</a:t>
             </a:r>
           </a:p>
         </p:txBody>
       </p:sp>
       <p:cxnSp>
         <p:nvCxnSpPr>
-          <p:cNvPr id="17429" name="Connector 17428"/>
+          <p:cNvPr id="17428" name="Connector 17427"/>
           <p:cNvCxnSpPr/>
           <p:nvPr/>
         </p:nvCxnSpPr>
@@ -7692,7 +7885,7 @@
       </p:cxnSp>
       <p:cxnSp>
         <p:nvCxnSpPr>
-          <p:cNvPr id="17430" name="Connector 17429"/>
+          <p:cNvPr id="17429" name="Connector 17428"/>
           <p:cNvCxnSpPr/>
           <p:nvPr/>
         </p:nvCxnSpPr>
@@ -7728,7 +7921,7 @@
       </p:cxnSp>
       <p:sp>
         <p:nvSpPr>
-          <p:cNvPr id="17431" name="Rounded Rectangle 17430"/>
+          <p:cNvPr id="17430" name="Rounded Rectangle 17429"/>
           <p:cNvSpPr/>
           <p:nvPr/>
         </p:nvSpPr>
@@ -7767,7 +7960,7 @@
           </a:fontRef>
         </p:style>
         <p:txBody>
-          <a:bodyPr wrap="square" tIns="36576" bIns="36576" rtlCol="0" anchor="ctr"/>
+          <a:bodyPr rtlCol="0" anchor="ctr" wrap="square" tIns="36576" bIns="36576"/>
           <a:lstStyle/>
           <a:p>
             <a:pPr algn="l"/>
@@ -7794,14 +7987,14 @@
                 </a:solidFill>
                 <a:latin typeface="Calibri"/>
               </a:rPr>
-              <a:t>overlap; a deadline is a point</a:t>
+              <a:t>two events at once? a deadline in a class?</a:t>
             </a:r>
           </a:p>
         </p:txBody>
       </p:sp>
       <p:cxnSp>
         <p:nvCxnSpPr>
-          <p:cNvPr id="17432" name="Connector 17431"/>
+          <p:cNvPr id="17431" name="Connector 17430"/>
           <p:cNvCxnSpPr/>
           <p:nvPr/>
         </p:nvCxnSpPr>
@@ -7837,7 +8030,7 @@
       </p:cxnSp>
       <p:sp>
         <p:nvSpPr>
-          <p:cNvPr id="17433" name="Rounded Rectangle 17432"/>
+          <p:cNvPr id="17432" name="Rounded Rectangle 17431"/>
           <p:cNvSpPr/>
           <p:nvPr/>
         </p:nvSpPr>
@@ -7876,7 +8069,7 @@
           </a:fontRef>
         </p:style>
         <p:txBody>
-          <a:bodyPr wrap="square" tIns="36576" bIns="36576" rtlCol="0" anchor="ctr"/>
+          <a:bodyPr rtlCol="0" anchor="ctr" wrap="square" tIns="36576" bIns="36576"/>
           <a:lstStyle/>
           <a:p>
             <a:pPr algn="l"/>
@@ -7903,14 +8096,14 @@
                 </a:solidFill>
                 <a:latin typeface="Calibri"/>
               </a:rPr>
-              <a:t>Google, phone, class feed, .ics</a:t>
+              <a:t>Google, phone or .ics file</a:t>
             </a:r>
           </a:p>
         </p:txBody>
       </p:sp>
       <p:cxnSp>
         <p:nvCxnSpPr>
-          <p:cNvPr id="17434" name="Connector 17433"/>
+          <p:cNvPr id="17433" name="Connector 17432"/>
           <p:cNvCxnSpPr/>
           <p:nvPr/>
         </p:nvCxnSpPr>
@@ -7946,14 +8139,14 @@
       </p:cxnSp>
       <p:sp>
         <p:nvSpPr>
-          <p:cNvPr id="17435" name="TextBox 17434"/>
+          <p:cNvPr id="17434" name="TextBox 17433"/>
           <p:cNvSpPr txBox="1"/>
           <p:nvPr/>
         </p:nvSpPr>
         <p:spPr>
           <a:xfrm>
-            <a:off x="5669280" y="5303520"/>
-            <a:ext cx="6108192" cy="914400"/>
+            <a:off x="5669280" y="5257800"/>
+            <a:ext cx="6108192" cy="1005840"/>
           </a:xfrm>
           <a:prstGeom prst="rect">
             <a:avLst/>
@@ -7961,27 +8154,43 @@
           <a:noFill/>
         </p:spPr>
         <p:txBody>
-          <a:bodyPr wrap="square" lIns="45720" tIns="18288" rIns="45720" bIns="18288" anchor="t">
+          <a:bodyPr wrap="square" anchor="t" lIns="45720" rIns="45720" tIns="18288" bIns="18288">
             <a:spAutoFit/>
           </a:bodyPr>
           <a:lstStyle/>
           <a:p>
             <a:pPr algn="l">
               <a:spcAft>
-                <a:spcPts val="400"/>
+                <a:spcPts val="500"/>
               </a:spcAft>
             </a:pPr>
             <a:r>
-              <a:rPr sz="1400" b="0">
+              <a:rPr sz="1300" b="0">
                 <a:solidFill>
                   <a:srgbClr val="262A33"/>
                 </a:solidFill>
                 <a:latin typeface="Calibri"/>
               </a:rPr>
-              <a:t>Re-adding a notice </a:t>
-            </a:r>
-            <a:r>
-              <a:rPr sz="1400" b="1">
+              <a:t>Dashed boxes need a one-time install: the Gmail script or the Android app.</a:t>
+            </a:r>
+          </a:p>
+          <a:p>
+            <a:pPr algn="l">
+              <a:spcAft>
+                <a:spcPts val="500"/>
+              </a:spcAft>
+            </a:pPr>
+            <a:r>
+              <a:rPr sz="1300" b="0">
+                <a:solidFill>
+                  <a:srgbClr val="262A33"/>
+                </a:solidFill>
+                <a:latin typeface="Calibri"/>
+              </a:rPr>
+              <a:t>Adding the same notice twice </a:t>
+            </a:r>
+            <a:r>
+              <a:rPr sz="1300" b="1">
                 <a:solidFill>
                   <a:srgbClr val="262A33"/>
                 </a:solidFill>
@@ -7990,16 +8199,16 @@
                 </a:highlight>
                 <a:latin typeface="Calibri"/>
               </a:rPr>
-              <a:t>updates</a:t>
-            </a:r>
-            <a:r>
-              <a:rPr sz="1400" b="0">
+              <a:t>updates the events</a:t>
+            </a:r>
+            <a:r>
+              <a:rPr sz="1300" b="0">
                 <a:solidFill>
                   <a:srgbClr val="262A33"/>
                 </a:solidFill>
                 <a:latin typeface="Calibri"/>
               </a:rPr>
-              <a:t> the same calendar events instead of copying them (one ID per event).</a:t>
+              <a:t>. It does not make copies.</a:t>
             </a:r>
           </a:p>
         </p:txBody>
@@ -8037,8 +8246,8 @@
         </p:nvSpPr>
         <p:spPr>
           <a:xfrm>
-            <a:off x="2158948" y="658368"/>
-            <a:ext cx="6929223" cy="164592"/>
+            <a:off x="2617666" y="658368"/>
+            <a:ext cx="6011787" cy="164592"/>
           </a:xfrm>
           <a:prstGeom prst="roundRect">
             <a:avLst>
@@ -8072,7 +8281,6 @@
           <a:lstStyle/>
           <a:p>
             <a:pPr algn="ctr"/>
-            <a:endParaRPr/>
           </a:p>
         </p:txBody>
       </p:sp>
@@ -8175,14 +8383,14 @@
           <a:bodyPr anchor="ctr"/>
           <a:lstStyle/>
           <a:p>
-            <a:pPr algn="ctr" eaLnBrk="1" hangingPunct="1"/>
+            <a:pPr eaLnBrk="1" hangingPunct="1" algn="ctr"/>
             <a:r>
               <a:rPr lang="en-US" sz="3600" b="1" dirty="0">
                 <a:latin typeface="Times New Roman" panose="02020603050405020304" pitchFamily="18" charset="0"/>
                 <a:ea typeface="ＭＳ Ｐゴシック" pitchFamily="1" charset="-128"/>
                 <a:cs typeface="Times New Roman" panose="02020603050405020304" pitchFamily="18" charset="0"/>
               </a:rPr>
-              <a:t>FEASIBILITY AND VIABILITY</a:t>
+              <a:t>SCOPE AND FEASIBILITY</a:t>
             </a:r>
           </a:p>
         </p:txBody>
@@ -8349,7 +8557,7 @@
                 <a16:creationId xmlns:a16="http://schemas.microsoft.com/office/drawing/2014/main" id="{5DBCE864-823D-4A13-9607-5DA1F0ED5FB8}"/>
               </a:ext>
               <a:ext uri="{C183D7F6-B498-43B3-948B-1728B52AA6E4}">
-                <adec:decorative xmlns:adec="http://schemas.microsoft.com/office/drawing/2017/decorative" val="0"/>
+                <adec:decorative xmlns:adec="http://schemas.microsoft.com/office/drawing/2017/decorative" xmlns="" val="0"/>
               </a:ext>
             </a:extLst>
           </p:cNvPr>
@@ -8385,7 +8593,7 @@
           <a:p>
             <a:pPr algn="ctr"/>
             <a:r>
-              <a:rPr lang="en-US" sz="1500" b="1" dirty="0"/>
+              <a:rPr lang="en-US" dirty="0" b="1" sz="1500"/>
               <a:t>Nova Nexus</a:t>
             </a:r>
             <a:endParaRPr lang="en-IN" dirty="0"/>
@@ -8409,7 +8617,7 @@
           <a:noFill/>
         </p:spPr>
         <p:txBody>
-          <a:bodyPr wrap="square" lIns="45720" tIns="18288" rIns="45720" bIns="18288" anchor="t">
+          <a:bodyPr wrap="square" anchor="t" lIns="45720" rIns="45720" tIns="18288" bIns="18288">
             <a:spAutoFit/>
           </a:bodyPr>
           <a:lstStyle/>
@@ -8456,7 +8664,7 @@
         <p:spPr>
           <a:xfrm>
             <a:off x="411480" y="1188720"/>
-            <a:ext cx="5120640" cy="384048"/>
+            <a:ext cx="5257800" cy="384048"/>
           </a:xfrm>
           <a:prstGeom prst="roundRect">
             <a:avLst>
@@ -8490,7 +8698,6 @@
           <a:lstStyle/>
           <a:p>
             <a:pPr algn="ctr"/>
-            <a:endParaRPr/>
           </a:p>
         </p:txBody>
       </p:sp>
@@ -8503,7 +8710,7 @@
         <p:spPr>
           <a:xfrm>
             <a:off x="466344" y="1188720"/>
-            <a:ext cx="5029200" cy="384048"/>
+            <a:ext cx="5166360" cy="384048"/>
           </a:xfrm>
           <a:prstGeom prst="rect">
             <a:avLst/>
@@ -8511,7 +8718,7 @@
           <a:noFill/>
         </p:spPr>
         <p:txBody>
-          <a:bodyPr wrap="square" tIns="18288" rIns="45720" bIns="18288" anchor="ctr">
+          <a:bodyPr wrap="square" anchor="ctr" rIns="45720" tIns="18288" bIns="18288">
             <a:spAutoFit/>
           </a:bodyPr>
           <a:lstStyle/>
@@ -8528,50 +8735,419 @@
                 </a:solidFill>
                 <a:latin typeface="Calibri"/>
               </a:rPr>
-              <a:t>Works today</a:t>
-            </a:r>
-          </a:p>
-        </p:txBody>
-      </p:sp>
-      <p:pic>
-        <p:nvPicPr>
-          <p:cNvPr id="17414" name="Picture 17413" descr="phone-amber-top.png"/>
-          <p:cNvPicPr>
-            <a:picLocks noChangeAspect="1"/>
-          </p:cNvPicPr>
+              <a:t>What is ready</a:t>
+            </a:r>
+          </a:p>
+        </p:txBody>
+      </p:sp>
+      <p:sp>
+        <p:nvSpPr>
+          <p:cNvPr id="17414" name="Rounded Rectangle 17413"/>
+          <p:cNvSpPr/>
           <p:nvPr/>
-        </p:nvPicPr>
-        <p:blipFill>
-          <a:blip r:embed="rId3"/>
-          <a:stretch>
-            <a:fillRect/>
-          </a:stretch>
-        </p:blipFill>
-        <p:spPr>
-          <a:xfrm>
-            <a:off x="411480" y="1691640"/>
-            <a:ext cx="2148840" cy="2889129"/>
+        </p:nvSpPr>
+        <p:spPr>
+          <a:xfrm>
+            <a:off x="411480" y="1719072"/>
+            <a:ext cx="5257800" cy="1325880"/>
+          </a:xfrm>
+          <a:prstGeom prst="roundRect">
+            <a:avLst>
+              <a:gd name="adj" fmla="val 8000"/>
+            </a:avLst>
+          </a:prstGeom>
+          <a:solidFill>
+            <a:srgbClr val="FFFFFF"/>
+          </a:solidFill>
+          <a:ln w="19050">
+            <a:solidFill>
+              <a:srgbClr val="1E6B34"/>
+            </a:solidFill>
+          </a:ln>
+          <a:effectLst/>
+        </p:spPr>
+        <p:style>
+          <a:lnRef idx="1">
+            <a:schemeClr val="accent1"/>
+          </a:lnRef>
+          <a:fillRef idx="3">
+            <a:schemeClr val="accent1"/>
+          </a:fillRef>
+          <a:effectRef idx="2">
+            <a:schemeClr val="accent1"/>
+          </a:effectRef>
+          <a:fontRef idx="minor">
+            <a:schemeClr val="lt1"/>
+          </a:fontRef>
+        </p:style>
+        <p:txBody>
+          <a:bodyPr rtlCol="0" anchor="ctr" wrap="square" tIns="36576" bIns="36576"/>
+          <a:lstStyle/>
+          <a:p>
+            <a:pPr algn="l"/>
+            <a:r>
+              <a:rPr sz="1500" b="1">
+                <a:solidFill>
+                  <a:srgbClr val="1E6B34"/>
+                </a:solidFill>
+                <a:latin typeface="Calibri"/>
+              </a:rPr>
+              <a:t>Works now on the website</a:t>
+            </a:r>
+          </a:p>
+          <a:p>
+            <a:pPr algn="l">
+              <a:spcBef>
+                <a:spcPts val="200"/>
+              </a:spcBef>
+            </a:pPr>
+            <a:r>
+              <a:rPr sz="1300" b="0">
+                <a:solidFill>
+                  <a:srgbClr val="262A33"/>
+                </a:solidFill>
+                <a:latin typeface="Calibri"/>
+              </a:rPr>
+              <a:t>Paste or share a notice, a photo or a PDF. Events with reasons, clash check, review before export, .ics file, Hindi and Hinglish times. A class calendar link: the class rep publishes, the class subscribes.</a:t>
+            </a:r>
+          </a:p>
+        </p:txBody>
+      </p:sp>
+      <p:sp>
+        <p:nvSpPr>
+          <p:cNvPr id="17415" name="Rounded Rectangle 17414"/>
+          <p:cNvSpPr/>
+          <p:nvPr/>
+        </p:nvSpPr>
+        <p:spPr>
+          <a:xfrm>
+            <a:off x="411480" y="3200400"/>
+            <a:ext cx="5257800" cy="1325880"/>
+          </a:xfrm>
+          <a:prstGeom prst="roundRect">
+            <a:avLst>
+              <a:gd name="adj" fmla="val 8000"/>
+            </a:avLst>
+          </a:prstGeom>
+          <a:solidFill>
+            <a:srgbClr val="FFFFFF"/>
+          </a:solidFill>
+          <a:ln w="19050">
+            <a:solidFill>
+              <a:srgbClr val="9A5B00"/>
+            </a:solidFill>
+            <a:prstDash val="dash"/>
+          </a:ln>
+          <a:effectLst/>
+        </p:spPr>
+        <p:style>
+          <a:lnRef idx="1">
+            <a:schemeClr val="accent1"/>
+          </a:lnRef>
+          <a:fillRef idx="3">
+            <a:schemeClr val="accent1"/>
+          </a:fillRef>
+          <a:effectRef idx="2">
+            <a:schemeClr val="accent1"/>
+          </a:effectRef>
+          <a:fontRef idx="minor">
+            <a:schemeClr val="lt1"/>
+          </a:fontRef>
+        </p:style>
+        <p:txBody>
+          <a:bodyPr rtlCol="0" anchor="ctr" wrap="square" tIns="36576" bIns="36576"/>
+          <a:lstStyle/>
+          <a:p>
+            <a:pPr algn="l"/>
+            <a:r>
+              <a:rPr sz="1500" b="1">
+                <a:solidFill>
+                  <a:srgbClr val="9A5B00"/>
+                </a:solidFill>
+                <a:latin typeface="Calibri"/>
+              </a:rPr>
+              <a:t>Built, needs a one-time install or sign-in</a:t>
+            </a:r>
+          </a:p>
+          <a:p>
+            <a:pPr algn="l">
+              <a:spcBef>
+                <a:spcPts val="200"/>
+              </a:spcBef>
+            </a:pPr>
+            <a:r>
+              <a:rPr sz="1300" b="0">
+                <a:solidFill>
+                  <a:srgbClr val="262A33"/>
+                </a:solidFill>
+                <a:latin typeface="Calibri"/>
+              </a:rPr>
+              <a:t>Google Calendar in one tap (Google sign-in), college email (Gmail script), WhatsApp group reading (Android app), Chrome extension.</a:t>
+            </a:r>
+          </a:p>
+        </p:txBody>
+      </p:sp>
+      <p:sp>
+        <p:nvSpPr>
+          <p:cNvPr id="17416" name="Rounded Rectangle 17415"/>
+          <p:cNvSpPr/>
+          <p:nvPr/>
+        </p:nvSpPr>
+        <p:spPr>
+          <a:xfrm>
+            <a:off x="411480" y="4681728"/>
+            <a:ext cx="5257800" cy="1325880"/>
+          </a:xfrm>
+          <a:prstGeom prst="roundRect">
+            <a:avLst>
+              <a:gd name="adj" fmla="val 8000"/>
+            </a:avLst>
+          </a:prstGeom>
+          <a:solidFill>
+            <a:srgbClr val="FFFFFF"/>
+          </a:solidFill>
+          <a:ln w="19050">
+            <a:solidFill>
+              <a:srgbClr val="1F497D"/>
+            </a:solidFill>
+          </a:ln>
+          <a:effectLst/>
+        </p:spPr>
+        <p:style>
+          <a:lnRef idx="1">
+            <a:schemeClr val="accent1"/>
+          </a:lnRef>
+          <a:fillRef idx="3">
+            <a:schemeClr val="accent1"/>
+          </a:fillRef>
+          <a:effectRef idx="2">
+            <a:schemeClr val="accent1"/>
+          </a:effectRef>
+          <a:fontRef idx="minor">
+            <a:schemeClr val="lt1"/>
+          </a:fontRef>
+        </p:style>
+        <p:txBody>
+          <a:bodyPr rtlCol="0" anchor="ctr" wrap="square" tIns="36576" bIns="36576"/>
+          <a:lstStyle/>
+          <a:p>
+            <a:pPr algn="l"/>
+            <a:r>
+              <a:rPr sz="1500" b="1">
+                <a:solidFill>
+                  <a:srgbClr val="1F497D"/>
+                </a:solidFill>
+                <a:latin typeface="Calibri"/>
+              </a:rPr>
+              <a:t>Next</a:t>
+            </a:r>
+          </a:p>
+          <a:p>
+            <a:pPr algn="l">
+              <a:spcBef>
+                <a:spcPts val="200"/>
+              </a:spcBef>
+            </a:pPr>
+            <a:r>
+              <a:rPr sz="1300" b="0">
+                <a:solidFill>
+                  <a:srgbClr val="262A33"/>
+                </a:solidFill>
+                <a:latin typeface="Calibri"/>
+              </a:rPr>
+              <a:t>Try it with one real class for a term. Read more notice styles. Handle spelling mistakes.</a:t>
+            </a:r>
+          </a:p>
+        </p:txBody>
+      </p:sp>
+      <p:sp>
+        <p:nvSpPr>
+          <p:cNvPr id="17417" name="Rounded Rectangle 17416"/>
+          <p:cNvSpPr/>
+          <p:nvPr/>
+        </p:nvSpPr>
+        <p:spPr>
+          <a:xfrm>
+            <a:off x="5943600" y="1188720"/>
+            <a:ext cx="5833872" cy="384048"/>
+          </a:xfrm>
+          <a:prstGeom prst="roundRect">
+            <a:avLst>
+              <a:gd name="adj" fmla="val 18000"/>
+            </a:avLst>
+          </a:prstGeom>
+          <a:solidFill>
+            <a:srgbClr val="E3FBDB"/>
+          </a:solidFill>
+          <a:ln>
+            <a:noFill/>
+          </a:ln>
+          <a:effectLst/>
+        </p:spPr>
+        <p:style>
+          <a:lnRef idx="1">
+            <a:schemeClr val="accent1"/>
+          </a:lnRef>
+          <a:fillRef idx="3">
+            <a:schemeClr val="accent1"/>
+          </a:fillRef>
+          <a:effectRef idx="2">
+            <a:schemeClr val="accent1"/>
+          </a:effectRef>
+          <a:fontRef idx="minor">
+            <a:schemeClr val="lt1"/>
+          </a:fontRef>
+        </p:style>
+        <p:txBody>
+          <a:bodyPr rtlCol="0" anchor="ctr"/>
+          <a:lstStyle/>
+          <a:p>
+            <a:pPr algn="ctr"/>
+          </a:p>
+        </p:txBody>
+      </p:sp>
+      <p:sp>
+        <p:nvSpPr>
+          <p:cNvPr id="17418" name="TextBox 17417"/>
+          <p:cNvSpPr txBox="1"/>
+          <p:nvPr/>
+        </p:nvSpPr>
+        <p:spPr>
+          <a:xfrm>
+            <a:off x="5998464" y="1188720"/>
+            <a:ext cx="5742432" cy="384048"/>
           </a:xfrm>
           <a:prstGeom prst="rect">
             <a:avLst/>
           </a:prstGeom>
-          <a:ln w="12700">
+          <a:noFill/>
+        </p:spPr>
+        <p:txBody>
+          <a:bodyPr wrap="square" anchor="ctr" rIns="45720" tIns="18288" bIns="18288">
+            <a:spAutoFit/>
+          </a:bodyPr>
+          <a:lstStyle/>
+          <a:p>
+            <a:pPr algn="l">
+              <a:spcAft>
+                <a:spcPts val="400"/>
+              </a:spcAft>
+            </a:pPr>
+            <a:r>
+              <a:rPr sz="1600" b="1">
+                <a:solidFill>
+                  <a:srgbClr val="1E6116"/>
+                </a:solidFill>
+                <a:latin typeface="Calibri"/>
+              </a:rPr>
+              <a:t>Problems we expect, and our plan</a:t>
+            </a:r>
+          </a:p>
+        </p:txBody>
+      </p:sp>
+      <p:sp>
+        <p:nvSpPr>
+          <p:cNvPr id="17419" name="Rounded Rectangle 17418"/>
+          <p:cNvSpPr/>
+          <p:nvPr/>
+        </p:nvSpPr>
+        <p:spPr>
+          <a:xfrm>
+            <a:off x="5943600" y="1737360"/>
+            <a:ext cx="2606040" cy="896112"/>
+          </a:xfrm>
+          <a:prstGeom prst="roundRect">
+            <a:avLst>
+              <a:gd name="adj" fmla="val 8000"/>
+            </a:avLst>
+          </a:prstGeom>
+          <a:solidFill>
+            <a:srgbClr val="FFFFFF"/>
+          </a:solidFill>
+          <a:ln w="15875">
             <a:solidFill>
-              <a:srgbClr val="C9D2DF"/>
+              <a:srgbClr val="B42318"/>
             </a:solidFill>
           </a:ln>
-        </p:spPr>
-      </p:pic>
-      <p:sp>
-        <p:nvSpPr>
-          <p:cNvPr id="17415" name="Rounded Rectangle 17414"/>
+          <a:effectLst/>
+        </p:spPr>
+        <p:style>
+          <a:lnRef idx="1">
+            <a:schemeClr val="accent1"/>
+          </a:lnRef>
+          <a:fillRef idx="3">
+            <a:schemeClr val="accent1"/>
+          </a:fillRef>
+          <a:effectRef idx="2">
+            <a:schemeClr val="accent1"/>
+          </a:effectRef>
+          <a:fontRef idx="minor">
+            <a:schemeClr val="lt1"/>
+          </a:fontRef>
+        </p:style>
+        <p:txBody>
+          <a:bodyPr rtlCol="0" anchor="ctr" wrap="square" tIns="36576" bIns="36576"/>
+          <a:lstStyle/>
+          <a:p>
+            <a:pPr algn="l"/>
+            <a:r>
+              <a:rPr sz="1300" b="1">
+                <a:solidFill>
+                  <a:srgbClr val="B42318"/>
+                </a:solidFill>
+                <a:latin typeface="Calibri"/>
+              </a:rPr>
+              <a:t>A long notice is cut off in a phone notification</a:t>
+            </a:r>
+          </a:p>
+        </p:txBody>
+      </p:sp>
+      <p:cxnSp>
+        <p:nvCxnSpPr>
+          <p:cNvPr id="17420" name="Connector 17419"/>
+          <p:cNvCxnSpPr/>
+          <p:nvPr/>
+        </p:nvCxnSpPr>
+        <p:spPr>
+          <a:xfrm>
+            <a:off x="8567928" y="2185415"/>
+            <a:ext cx="320040" cy="0"/>
+          </a:xfrm>
+          <a:prstGeom prst="line">
+            <a:avLst/>
+          </a:prstGeom>
+          <a:ln w="22225">
+            <a:solidFill>
+              <a:srgbClr val="1F497D"/>
+            </a:solidFill>
+            <a:tailEnd type="triangle" w="med" len="med"/>
+          </a:ln>
+        </p:spPr>
+        <p:style>
+          <a:lnRef idx="2">
+            <a:schemeClr val="accent1"/>
+          </a:lnRef>
+          <a:fillRef idx="0">
+            <a:schemeClr val="accent1"/>
+          </a:fillRef>
+          <a:effectRef idx="1">
+            <a:schemeClr val="accent1"/>
+          </a:effectRef>
+          <a:fontRef idx="minor">
+            <a:schemeClr val="tx1"/>
+          </a:fontRef>
+        </p:style>
+      </p:cxnSp>
+      <p:sp>
+        <p:nvSpPr>
+          <p:cNvPr id="17421" name="Rounded Rectangle 17420"/>
           <p:cNvSpPr/>
           <p:nvPr/>
         </p:nvSpPr>
         <p:spPr>
           <a:xfrm>
-            <a:off x="2743200" y="1691640"/>
-            <a:ext cx="2788920" cy="896112"/>
+            <a:off x="8915400" y="1737360"/>
+            <a:ext cx="2862072" cy="896112"/>
           </a:xfrm>
           <a:prstGeom prst="roundRect">
             <a:avLst>
@@ -8603,48 +9179,125 @@
           </a:fontRef>
         </p:style>
         <p:txBody>
-          <a:bodyPr wrap="square" tIns="36576" bIns="36576" rtlCol="0" anchor="ctr"/>
+          <a:bodyPr rtlCol="0" anchor="ctr" wrap="square" tIns="36576" bIns="36576"/>
           <a:lstStyle/>
           <a:p>
             <a:pPr algn="l"/>
             <a:r>
-              <a:rPr sz="1500" b="1">
+              <a:rPr sz="1300" b="1">
                 <a:solidFill>
                   <a:srgbClr val="1E6B34"/>
                 </a:solidFill>
                 <a:latin typeface="Calibri"/>
               </a:rPr>
-              <a:t>✓ Live now</a:t>
-            </a:r>
-          </a:p>
-          <a:p>
-            <a:pPr algn="l">
-              <a:spcBef>
-                <a:spcPts val="200"/>
-              </a:spcBef>
-            </a:pPr>
-            <a:r>
-              <a:rPr sz="1300" b="0">
-                <a:solidFill>
-                  <a:srgbClr val="262A33"/>
-                </a:solidFill>
-                <a:latin typeface="Calibri"/>
-              </a:rPr>
-              <a:t>anki1kr.me/NoticeDecoder</a:t>
-            </a:r>
-          </a:p>
-        </p:txBody>
-      </p:sp>
-      <p:sp>
-        <p:nvSpPr>
-          <p:cNvPr id="17416" name="Rounded Rectangle 17415"/>
+              <a:t>Share or paste the full text</a:t>
+            </a:r>
+          </a:p>
+        </p:txBody>
+      </p:sp>
+      <p:sp>
+        <p:nvSpPr>
+          <p:cNvPr id="17422" name="Rounded Rectangle 17421"/>
           <p:cNvSpPr/>
           <p:nvPr/>
         </p:nvSpPr>
         <p:spPr>
           <a:xfrm>
-            <a:off x="2743200" y="2715768"/>
-            <a:ext cx="2788920" cy="896112"/>
+            <a:off x="5943600" y="2816352"/>
+            <a:ext cx="2606040" cy="896112"/>
+          </a:xfrm>
+          <a:prstGeom prst="roundRect">
+            <a:avLst>
+              <a:gd name="adj" fmla="val 8000"/>
+            </a:avLst>
+          </a:prstGeom>
+          <a:solidFill>
+            <a:srgbClr val="FFFFFF"/>
+          </a:solidFill>
+          <a:ln w="15875">
+            <a:solidFill>
+              <a:srgbClr val="B42318"/>
+            </a:solidFill>
+          </a:ln>
+          <a:effectLst/>
+        </p:spPr>
+        <p:style>
+          <a:lnRef idx="1">
+            <a:schemeClr val="accent1"/>
+          </a:lnRef>
+          <a:fillRef idx="3">
+            <a:schemeClr val="accent1"/>
+          </a:fillRef>
+          <a:effectRef idx="2">
+            <a:schemeClr val="accent1"/>
+          </a:effectRef>
+          <a:fontRef idx="minor">
+            <a:schemeClr val="lt1"/>
+          </a:fontRef>
+        </p:style>
+        <p:txBody>
+          <a:bodyPr rtlCol="0" anchor="ctr" wrap="square" tIns="36576" bIns="36576"/>
+          <a:lstStyle/>
+          <a:p>
+            <a:pPr algn="l"/>
+            <a:r>
+              <a:rPr sz="1300" b="1">
+                <a:solidFill>
+                  <a:srgbClr val="B42318"/>
+                </a:solidFill>
+                <a:latin typeface="Calibri"/>
+              </a:rPr>
+              <a:t>Google updates a shared calendar only every 12 to 24 hours</a:t>
+            </a:r>
+          </a:p>
+        </p:txBody>
+      </p:sp>
+      <p:cxnSp>
+        <p:nvCxnSpPr>
+          <p:cNvPr id="17423" name="Connector 17422"/>
+          <p:cNvCxnSpPr/>
+          <p:nvPr/>
+        </p:nvCxnSpPr>
+        <p:spPr>
+          <a:xfrm>
+            <a:off x="8567928" y="3264408"/>
+            <a:ext cx="320040" cy="0"/>
+          </a:xfrm>
+          <a:prstGeom prst="line">
+            <a:avLst/>
+          </a:prstGeom>
+          <a:ln w="22225">
+            <a:solidFill>
+              <a:srgbClr val="1F497D"/>
+            </a:solidFill>
+            <a:tailEnd type="triangle" w="med" len="med"/>
+          </a:ln>
+        </p:spPr>
+        <p:style>
+          <a:lnRef idx="2">
+            <a:schemeClr val="accent1"/>
+          </a:lnRef>
+          <a:fillRef idx="0">
+            <a:schemeClr val="accent1"/>
+          </a:fillRef>
+          <a:effectRef idx="1">
+            <a:schemeClr val="accent1"/>
+          </a:effectRef>
+          <a:fontRef idx="minor">
+            <a:schemeClr val="tx1"/>
+          </a:fontRef>
+        </p:style>
+      </p:cxnSp>
+      <p:sp>
+        <p:nvSpPr>
+          <p:cNvPr id="17424" name="Rounded Rectangle 17423"/>
+          <p:cNvSpPr/>
+          <p:nvPr/>
+        </p:nvSpPr>
+        <p:spPr>
+          <a:xfrm>
+            <a:off x="8915400" y="2816352"/>
+            <a:ext cx="2862072" cy="896112"/>
           </a:xfrm>
           <a:prstGeom prst="roundRect">
             <a:avLst>
@@ -8676,48 +9329,125 @@
           </a:fontRef>
         </p:style>
         <p:txBody>
-          <a:bodyPr wrap="square" tIns="36576" bIns="36576" rtlCol="0" anchor="ctr"/>
+          <a:bodyPr rtlCol="0" anchor="ctr" wrap="square" tIns="36576" bIns="36576"/>
           <a:lstStyle/>
           <a:p>
             <a:pPr algn="l"/>
             <a:r>
-              <a:rPr sz="1500" b="1">
+              <a:rPr sz="1300" b="1">
                 <a:solidFill>
                   <a:srgbClr val="1E6B34"/>
                 </a:solidFill>
                 <a:latin typeface="Calibri"/>
               </a:rPr>
-              <a:t>✓ Tested</a:t>
-            </a:r>
-          </a:p>
-          <a:p>
-            <a:pPr algn="l">
-              <a:spcBef>
-                <a:spcPts val="200"/>
-              </a:spcBef>
-            </a:pPr>
-            <a:r>
-              <a:rPr sz="1300" b="0">
-                <a:solidFill>
-                  <a:srgbClr val="262A33"/>
-                </a:solidFill>
-                <a:latin typeface="Calibri"/>
-              </a:rPr>
-              <a:t>53 tests, 73 browser checks, 6 real notices</a:t>
-            </a:r>
-          </a:p>
-        </p:txBody>
-      </p:sp>
-      <p:sp>
-        <p:nvSpPr>
-          <p:cNvPr id="17417" name="Rounded Rectangle 17416"/>
+              <a:t>One-tap add writes the events at once</a:t>
+            </a:r>
+          </a:p>
+        </p:txBody>
+      </p:sp>
+      <p:sp>
+        <p:nvSpPr>
+          <p:cNvPr id="17425" name="Rounded Rectangle 17424"/>
           <p:cNvSpPr/>
           <p:nvPr/>
         </p:nvSpPr>
         <p:spPr>
           <a:xfrm>
-            <a:off x="2743200" y="3739896"/>
-            <a:ext cx="2788920" cy="896112"/>
+            <a:off x="5943600" y="3895344"/>
+            <a:ext cx="2606040" cy="896112"/>
+          </a:xfrm>
+          <a:prstGeom prst="roundRect">
+            <a:avLst>
+              <a:gd name="adj" fmla="val 8000"/>
+            </a:avLst>
+          </a:prstGeom>
+          <a:solidFill>
+            <a:srgbClr val="FFFFFF"/>
+          </a:solidFill>
+          <a:ln w="15875">
+            <a:solidFill>
+              <a:srgbClr val="B42318"/>
+            </a:solidFill>
+          </a:ln>
+          <a:effectLst/>
+        </p:spPr>
+        <p:style>
+          <a:lnRef idx="1">
+            <a:schemeClr val="accent1"/>
+          </a:lnRef>
+          <a:fillRef idx="3">
+            <a:schemeClr val="accent1"/>
+          </a:fillRef>
+          <a:effectRef idx="2">
+            <a:schemeClr val="accent1"/>
+          </a:effectRef>
+          <a:fontRef idx="minor">
+            <a:schemeClr val="lt1"/>
+          </a:fontRef>
+        </p:style>
+        <p:txBody>
+          <a:bodyPr rtlCol="0" anchor="ctr" wrap="square" tIns="36576" bIns="36576"/>
+          <a:lstStyle/>
+          <a:p>
+            <a:pPr algn="l"/>
+            <a:r>
+              <a:rPr sz="1300" b="1">
+                <a:solidFill>
+                  <a:srgbClr val="B42318"/>
+                </a:solidFill>
+                <a:latin typeface="Calibri"/>
+              </a:rPr>
+              <a:t>iPhone does not let apps read WhatsApp</a:t>
+            </a:r>
+          </a:p>
+        </p:txBody>
+      </p:sp>
+      <p:cxnSp>
+        <p:nvCxnSpPr>
+          <p:cNvPr id="17426" name="Connector 17425"/>
+          <p:cNvCxnSpPr/>
+          <p:nvPr/>
+        </p:nvCxnSpPr>
+        <p:spPr>
+          <a:xfrm>
+            <a:off x="8567928" y="4343400"/>
+            <a:ext cx="320040" cy="0"/>
+          </a:xfrm>
+          <a:prstGeom prst="line">
+            <a:avLst/>
+          </a:prstGeom>
+          <a:ln w="22225">
+            <a:solidFill>
+              <a:srgbClr val="1F497D"/>
+            </a:solidFill>
+            <a:tailEnd type="triangle" w="med" len="med"/>
+          </a:ln>
+        </p:spPr>
+        <p:style>
+          <a:lnRef idx="2">
+            <a:schemeClr val="accent1"/>
+          </a:lnRef>
+          <a:fillRef idx="0">
+            <a:schemeClr val="accent1"/>
+          </a:fillRef>
+          <a:effectRef idx="1">
+            <a:schemeClr val="accent1"/>
+          </a:effectRef>
+          <a:fontRef idx="minor">
+            <a:schemeClr val="tx1"/>
+          </a:fontRef>
+        </p:style>
+      </p:cxnSp>
+      <p:sp>
+        <p:nvSpPr>
+          <p:cNvPr id="17427" name="Rounded Rectangle 17426"/>
+          <p:cNvSpPr/>
+          <p:nvPr/>
+        </p:nvSpPr>
+        <p:spPr>
+          <a:xfrm>
+            <a:off x="8915400" y="3895344"/>
+            <a:ext cx="2862072" cy="896112"/>
           </a:xfrm>
           <a:prstGeom prst="roundRect">
             <a:avLst>
@@ -8749,172 +9479,31 @@
           </a:fontRef>
         </p:style>
         <p:txBody>
-          <a:bodyPr wrap="square" tIns="36576" bIns="36576" rtlCol="0" anchor="ctr"/>
+          <a:bodyPr rtlCol="0" anchor="ctr" wrap="square" tIns="36576" bIns="36576"/>
           <a:lstStyle/>
           <a:p>
             <a:pPr algn="l"/>
             <a:r>
-              <a:rPr sz="1500" b="1">
+              <a:rPr sz="1300" b="1">
                 <a:solidFill>
                   <a:srgbClr val="1E6B34"/>
                 </a:solidFill>
                 <a:latin typeface="Calibri"/>
               </a:rPr>
-              <a:t>✓ ₹0 per notice</a:t>
-            </a:r>
-          </a:p>
-          <a:p>
-            <a:pPr algn="l">
-              <a:spcBef>
-                <a:spcPts val="200"/>
-              </a:spcBef>
-            </a:pPr>
-            <a:r>
-              <a:rPr sz="1300" b="0">
-                <a:solidFill>
-                  <a:srgbClr val="262A33"/>
-                </a:solidFill>
-                <a:latin typeface="Calibri"/>
-              </a:rPr>
-              <a:t>runs on the phone; the class feed fits a free tier</a:t>
-            </a:r>
-          </a:p>
-        </p:txBody>
-      </p:sp>
-      <p:sp>
-        <p:nvSpPr>
-          <p:cNvPr id="17418" name="TextBox 17417"/>
-          <p:cNvSpPr txBox="1"/>
-          <p:nvPr/>
-        </p:nvSpPr>
-        <p:spPr>
-          <a:xfrm>
-            <a:off x="2743200" y="4846320"/>
-            <a:ext cx="2788920" cy="1371600"/>
-          </a:xfrm>
-          <a:prstGeom prst="rect">
-            <a:avLst/>
-          </a:prstGeom>
-          <a:noFill/>
-        </p:spPr>
-        <p:txBody>
-          <a:bodyPr wrap="square" lIns="45720" tIns="18288" rIns="45720" bIns="18288" anchor="t">
-            <a:spAutoFit/>
-          </a:bodyPr>
-          <a:lstStyle/>
-          <a:p>
-            <a:pPr algn="l">
-              <a:spcAft>
-                <a:spcPts val="400"/>
-              </a:spcAft>
-            </a:pPr>
-            <a:r>
-              <a:rPr sz="1300" b="0">
-                <a:solidFill>
-                  <a:srgbClr val="5B6370"/>
-                </a:solidFill>
-                <a:latin typeface="Calibri"/>
-              </a:rPr>
-              <a:t>Left: a doubtful date is outlined in amber; export waits until it is fixed or marked "Looks right".</a:t>
-            </a:r>
-          </a:p>
-        </p:txBody>
-      </p:sp>
-      <p:sp>
-        <p:nvSpPr>
-          <p:cNvPr id="17419" name="Rounded Rectangle 17418"/>
+              <a:t>On iPhone, paste the notice or use the email script</a:t>
+            </a:r>
+          </a:p>
+        </p:txBody>
+      </p:sp>
+      <p:sp>
+        <p:nvSpPr>
+          <p:cNvPr id="17428" name="Rounded Rectangle 17427"/>
           <p:cNvSpPr/>
           <p:nvPr/>
         </p:nvSpPr>
         <p:spPr>
           <a:xfrm>
-            <a:off x="5806440" y="1188720"/>
-            <a:ext cx="5971032" cy="384048"/>
-          </a:xfrm>
-          <a:prstGeom prst="roundRect">
-            <a:avLst>
-              <a:gd name="adj" fmla="val 18000"/>
-            </a:avLst>
-          </a:prstGeom>
-          <a:solidFill>
-            <a:srgbClr val="E3FBDB"/>
-          </a:solidFill>
-          <a:ln>
-            <a:noFill/>
-          </a:ln>
-          <a:effectLst/>
-        </p:spPr>
-        <p:style>
-          <a:lnRef idx="1">
-            <a:schemeClr val="accent1"/>
-          </a:lnRef>
-          <a:fillRef idx="3">
-            <a:schemeClr val="accent1"/>
-          </a:fillRef>
-          <a:effectRef idx="2">
-            <a:schemeClr val="accent1"/>
-          </a:effectRef>
-          <a:fontRef idx="minor">
-            <a:schemeClr val="lt1"/>
-          </a:fontRef>
-        </p:style>
-        <p:txBody>
-          <a:bodyPr rtlCol="0" anchor="ctr"/>
-          <a:lstStyle/>
-          <a:p>
-            <a:pPr algn="ctr"/>
-            <a:endParaRPr/>
-          </a:p>
-        </p:txBody>
-      </p:sp>
-      <p:sp>
-        <p:nvSpPr>
-          <p:cNvPr id="17420" name="TextBox 17419"/>
-          <p:cNvSpPr txBox="1"/>
-          <p:nvPr/>
-        </p:nvSpPr>
-        <p:spPr>
-          <a:xfrm>
-            <a:off x="5861303" y="1188720"/>
-            <a:ext cx="5879592" cy="384048"/>
-          </a:xfrm>
-          <a:prstGeom prst="rect">
-            <a:avLst/>
-          </a:prstGeom>
-          <a:noFill/>
-        </p:spPr>
-        <p:txBody>
-          <a:bodyPr wrap="square" tIns="18288" rIns="45720" bIns="18288" anchor="ctr">
-            <a:spAutoFit/>
-          </a:bodyPr>
-          <a:lstStyle/>
-          <a:p>
-            <a:pPr algn="l">
-              <a:spcAft>
-                <a:spcPts val="400"/>
-              </a:spcAft>
-            </a:pPr>
-            <a:r>
-              <a:rPr sz="1600" b="1">
-                <a:solidFill>
-                  <a:srgbClr val="1E6116"/>
-                </a:solidFill>
-                <a:latin typeface="Calibri"/>
-              </a:rPr>
-              <a:t>Challenges and how we handle them</a:t>
-            </a:r>
-          </a:p>
-        </p:txBody>
-      </p:sp>
-      <p:sp>
-        <p:nvSpPr>
-          <p:cNvPr id="17421" name="Rounded Rectangle 17420"/>
-          <p:cNvSpPr/>
-          <p:nvPr/>
-        </p:nvSpPr>
-        <p:spPr>
-          <a:xfrm>
-            <a:off x="5806440" y="1737360"/>
+            <a:off x="5943600" y="4974336"/>
             <a:ext cx="2606040" cy="896112"/>
           </a:xfrm>
           <a:prstGeom prst="roundRect">
@@ -8947,7 +9536,7 @@
           </a:fontRef>
         </p:style>
         <p:txBody>
-          <a:bodyPr wrap="square" tIns="36576" bIns="36576" rtlCol="0" anchor="ctr"/>
+          <a:bodyPr rtlCol="0" anchor="ctr" wrap="square" tIns="36576" bIns="36576"/>
           <a:lstStyle/>
           <a:p>
             <a:pPr algn="l"/>
@@ -8958,21 +9547,21 @@
                 </a:solidFill>
                 <a:latin typeface="Calibri"/>
               </a:rPr>
-              <a:t>Long notice cut off in a notification</a:t>
+              <a:t>Spelling mistakes ("tset", "Nvo")</a:t>
             </a:r>
           </a:p>
         </p:txBody>
       </p:sp>
       <p:cxnSp>
         <p:nvCxnSpPr>
-          <p:cNvPr id="17422" name="Connector 17421"/>
+          <p:cNvPr id="17429" name="Connector 17428"/>
           <p:cNvCxnSpPr/>
           <p:nvPr/>
         </p:nvCxnSpPr>
         <p:spPr>
           <a:xfrm>
-            <a:off x="8430768" y="2185415"/>
-            <a:ext cx="365760" cy="0"/>
+            <a:off x="8567928" y="5422392"/>
+            <a:ext cx="320040" cy="0"/>
           </a:xfrm>
           <a:prstGeom prst="line">
             <a:avLst/>
@@ -9001,14 +9590,14 @@
       </p:cxnSp>
       <p:sp>
         <p:nvSpPr>
-          <p:cNvPr id="17423" name="Rounded Rectangle 17422"/>
+          <p:cNvPr id="17430" name="Rounded Rectangle 17429"/>
           <p:cNvSpPr/>
           <p:nvPr/>
         </p:nvSpPr>
         <p:spPr>
           <a:xfrm>
-            <a:off x="8823960" y="1737360"/>
-            <a:ext cx="2953512" cy="896112"/>
+            <a:off x="8915400" y="4974336"/>
+            <a:ext cx="2862072" cy="896112"/>
           </a:xfrm>
           <a:prstGeom prst="roundRect">
             <a:avLst>
@@ -9040,7 +9629,7 @@
           </a:fontRef>
         </p:style>
         <p:txBody>
-          <a:bodyPr wrap="square" tIns="36576" bIns="36576" rtlCol="0" anchor="ctr"/>
+          <a:bodyPr rtlCol="0" anchor="ctr" wrap="square" tIns="36576" bIns="36576"/>
           <a:lstStyle/>
           <a:p>
             <a:pPr algn="l"/>
@@ -9051,457 +9640,7 @@
                 </a:solidFill>
                 <a:latin typeface="Calibri"/>
               </a:rPr>
-              <a:t>Share or paste reads the full text</a:t>
-            </a:r>
-          </a:p>
-        </p:txBody>
-      </p:sp>
-      <p:sp>
-        <p:nvSpPr>
-          <p:cNvPr id="17424" name="Rounded Rectangle 17423"/>
-          <p:cNvSpPr/>
-          <p:nvPr/>
-        </p:nvSpPr>
-        <p:spPr>
-          <a:xfrm>
-            <a:off x="5806440" y="2816352"/>
-            <a:ext cx="2606040" cy="896112"/>
-          </a:xfrm>
-          <a:prstGeom prst="roundRect">
-            <a:avLst>
-              <a:gd name="adj" fmla="val 8000"/>
-            </a:avLst>
-          </a:prstGeom>
-          <a:solidFill>
-            <a:srgbClr val="FFFFFF"/>
-          </a:solidFill>
-          <a:ln w="15875">
-            <a:solidFill>
-              <a:srgbClr val="B42318"/>
-            </a:solidFill>
-          </a:ln>
-          <a:effectLst/>
-        </p:spPr>
-        <p:style>
-          <a:lnRef idx="1">
-            <a:schemeClr val="accent1"/>
-          </a:lnRef>
-          <a:fillRef idx="3">
-            <a:schemeClr val="accent1"/>
-          </a:fillRef>
-          <a:effectRef idx="2">
-            <a:schemeClr val="accent1"/>
-          </a:effectRef>
-          <a:fontRef idx="minor">
-            <a:schemeClr val="lt1"/>
-          </a:fontRef>
-        </p:style>
-        <p:txBody>
-          <a:bodyPr wrap="square" tIns="36576" bIns="36576" rtlCol="0" anchor="ctr"/>
-          <a:lstStyle/>
-          <a:p>
-            <a:pPr algn="l"/>
-            <a:r>
-              <a:rPr sz="1300" b="1">
-                <a:solidFill>
-                  <a:srgbClr val="B42318"/>
-                </a:solidFill>
-                <a:latin typeface="Calibri"/>
-              </a:rPr>
-              <a:t>Google refreshes a subscribed feed every 12 to 24 h</a:t>
-            </a:r>
-          </a:p>
-        </p:txBody>
-      </p:sp>
-      <p:cxnSp>
-        <p:nvCxnSpPr>
-          <p:cNvPr id="17425" name="Connector 17424"/>
-          <p:cNvCxnSpPr/>
-          <p:nvPr/>
-        </p:nvCxnSpPr>
-        <p:spPr>
-          <a:xfrm>
-            <a:off x="8430768" y="3264408"/>
-            <a:ext cx="365760" cy="0"/>
-          </a:xfrm>
-          <a:prstGeom prst="line">
-            <a:avLst/>
-          </a:prstGeom>
-          <a:ln w="22225">
-            <a:solidFill>
-              <a:srgbClr val="1F497D"/>
-            </a:solidFill>
-            <a:tailEnd type="triangle" w="med" len="med"/>
-          </a:ln>
-        </p:spPr>
-        <p:style>
-          <a:lnRef idx="2">
-            <a:schemeClr val="accent1"/>
-          </a:lnRef>
-          <a:fillRef idx="0">
-            <a:schemeClr val="accent1"/>
-          </a:fillRef>
-          <a:effectRef idx="1">
-            <a:schemeClr val="accent1"/>
-          </a:effectRef>
-          <a:fontRef idx="minor">
-            <a:schemeClr val="tx1"/>
-          </a:fontRef>
-        </p:style>
-      </p:cxnSp>
-      <p:sp>
-        <p:nvSpPr>
-          <p:cNvPr id="17426" name="Rounded Rectangle 17425"/>
-          <p:cNvSpPr/>
-          <p:nvPr/>
-        </p:nvSpPr>
-        <p:spPr>
-          <a:xfrm>
-            <a:off x="8823960" y="2816352"/>
-            <a:ext cx="2953512" cy="896112"/>
-          </a:xfrm>
-          <a:prstGeom prst="roundRect">
-            <a:avLst>
-              <a:gd name="adj" fmla="val 8000"/>
-            </a:avLst>
-          </a:prstGeom>
-          <a:solidFill>
-            <a:srgbClr val="FFFFFF"/>
-          </a:solidFill>
-          <a:ln w="15875">
-            <a:solidFill>
-              <a:srgbClr val="1E6B34"/>
-            </a:solidFill>
-          </a:ln>
-          <a:effectLst/>
-        </p:spPr>
-        <p:style>
-          <a:lnRef idx="1">
-            <a:schemeClr val="accent1"/>
-          </a:lnRef>
-          <a:fillRef idx="3">
-            <a:schemeClr val="accent1"/>
-          </a:fillRef>
-          <a:effectRef idx="2">
-            <a:schemeClr val="accent1"/>
-          </a:effectRef>
-          <a:fontRef idx="minor">
-            <a:schemeClr val="lt1"/>
-          </a:fontRef>
-        </p:style>
-        <p:txBody>
-          <a:bodyPr wrap="square" tIns="36576" bIns="36576" rtlCol="0" anchor="ctr"/>
-          <a:lstStyle/>
-          <a:p>
-            <a:pPr algn="l"/>
-            <a:r>
-              <a:rPr sz="1300" b="1">
-                <a:solidFill>
-                  <a:srgbClr val="1E6B34"/>
-                </a:solidFill>
-                <a:latin typeface="Calibri"/>
-              </a:rPr>
-              <a:t>One-tap add writes events at once</a:t>
-            </a:r>
-          </a:p>
-        </p:txBody>
-      </p:sp>
-      <p:sp>
-        <p:nvSpPr>
-          <p:cNvPr id="17427" name="Rounded Rectangle 17426"/>
-          <p:cNvSpPr/>
-          <p:nvPr/>
-        </p:nvSpPr>
-        <p:spPr>
-          <a:xfrm>
-            <a:off x="5806440" y="3895344"/>
-            <a:ext cx="2606040" cy="896112"/>
-          </a:xfrm>
-          <a:prstGeom prst="roundRect">
-            <a:avLst>
-              <a:gd name="adj" fmla="val 8000"/>
-            </a:avLst>
-          </a:prstGeom>
-          <a:solidFill>
-            <a:srgbClr val="FFFFFF"/>
-          </a:solidFill>
-          <a:ln w="15875">
-            <a:solidFill>
-              <a:srgbClr val="B42318"/>
-            </a:solidFill>
-          </a:ln>
-          <a:effectLst/>
-        </p:spPr>
-        <p:style>
-          <a:lnRef idx="1">
-            <a:schemeClr val="accent1"/>
-          </a:lnRef>
-          <a:fillRef idx="3">
-            <a:schemeClr val="accent1"/>
-          </a:fillRef>
-          <a:effectRef idx="2">
-            <a:schemeClr val="accent1"/>
-          </a:effectRef>
-          <a:fontRef idx="minor">
-            <a:schemeClr val="lt1"/>
-          </a:fontRef>
-        </p:style>
-        <p:txBody>
-          <a:bodyPr wrap="square" tIns="36576" bIns="36576" rtlCol="0" anchor="ctr"/>
-          <a:lstStyle/>
-          <a:p>
-            <a:pPr algn="l"/>
-            <a:r>
-              <a:rPr sz="1300" b="1">
-                <a:solidFill>
-                  <a:srgbClr val="B42318"/>
-                </a:solidFill>
-                <a:latin typeface="Calibri"/>
-              </a:rPr>
-              <a:t>Reading WhatsApp needs Android (iOS blocks it)</a:t>
-            </a:r>
-          </a:p>
-        </p:txBody>
-      </p:sp>
-      <p:cxnSp>
-        <p:nvCxnSpPr>
-          <p:cNvPr id="17428" name="Connector 17427"/>
-          <p:cNvCxnSpPr/>
-          <p:nvPr/>
-        </p:nvCxnSpPr>
-        <p:spPr>
-          <a:xfrm>
-            <a:off x="8430768" y="4343400"/>
-            <a:ext cx="365760" cy="0"/>
-          </a:xfrm>
-          <a:prstGeom prst="line">
-            <a:avLst/>
-          </a:prstGeom>
-          <a:ln w="22225">
-            <a:solidFill>
-              <a:srgbClr val="1F497D"/>
-            </a:solidFill>
-            <a:tailEnd type="triangle" w="med" len="med"/>
-          </a:ln>
-        </p:spPr>
-        <p:style>
-          <a:lnRef idx="2">
-            <a:schemeClr val="accent1"/>
-          </a:lnRef>
-          <a:fillRef idx="0">
-            <a:schemeClr val="accent1"/>
-          </a:fillRef>
-          <a:effectRef idx="1">
-            <a:schemeClr val="accent1"/>
-          </a:effectRef>
-          <a:fontRef idx="minor">
-            <a:schemeClr val="tx1"/>
-          </a:fontRef>
-        </p:style>
-      </p:cxnSp>
-      <p:sp>
-        <p:nvSpPr>
-          <p:cNvPr id="17429" name="Rounded Rectangle 17428"/>
-          <p:cNvSpPr/>
-          <p:nvPr/>
-        </p:nvSpPr>
-        <p:spPr>
-          <a:xfrm>
-            <a:off x="8823960" y="3895344"/>
-            <a:ext cx="2953512" cy="896112"/>
-          </a:xfrm>
-          <a:prstGeom prst="roundRect">
-            <a:avLst>
-              <a:gd name="adj" fmla="val 8000"/>
-            </a:avLst>
-          </a:prstGeom>
-          <a:solidFill>
-            <a:srgbClr val="FFFFFF"/>
-          </a:solidFill>
-          <a:ln w="15875">
-            <a:solidFill>
-              <a:srgbClr val="1E6B34"/>
-            </a:solidFill>
-          </a:ln>
-          <a:effectLst/>
-        </p:spPr>
-        <p:style>
-          <a:lnRef idx="1">
-            <a:schemeClr val="accent1"/>
-          </a:lnRef>
-          <a:fillRef idx="3">
-            <a:schemeClr val="accent1"/>
-          </a:fillRef>
-          <a:effectRef idx="2">
-            <a:schemeClr val="accent1"/>
-          </a:effectRef>
-          <a:fontRef idx="minor">
-            <a:schemeClr val="lt1"/>
-          </a:fontRef>
-        </p:style>
-        <p:txBody>
-          <a:bodyPr wrap="square" tIns="36576" bIns="36576" rtlCol="0" anchor="ctr"/>
-          <a:lstStyle/>
-          <a:p>
-            <a:pPr algn="l"/>
-            <a:r>
-              <a:rPr sz="1300" b="1">
-                <a:solidFill>
-                  <a:srgbClr val="1E6B34"/>
-                </a:solidFill>
-                <a:latin typeface="Calibri"/>
-              </a:rPr>
-              <a:t>On iPhone: paste, or the Gmail script</a:t>
-            </a:r>
-          </a:p>
-        </p:txBody>
-      </p:sp>
-      <p:sp>
-        <p:nvSpPr>
-          <p:cNvPr id="17430" name="Rounded Rectangle 17429"/>
-          <p:cNvSpPr/>
-          <p:nvPr/>
-        </p:nvSpPr>
-        <p:spPr>
-          <a:xfrm>
-            <a:off x="5806440" y="4974336"/>
-            <a:ext cx="2606040" cy="896112"/>
-          </a:xfrm>
-          <a:prstGeom prst="roundRect">
-            <a:avLst>
-              <a:gd name="adj" fmla="val 8000"/>
-            </a:avLst>
-          </a:prstGeom>
-          <a:solidFill>
-            <a:srgbClr val="FFFFFF"/>
-          </a:solidFill>
-          <a:ln w="15875">
-            <a:solidFill>
-              <a:srgbClr val="B42318"/>
-            </a:solidFill>
-          </a:ln>
-          <a:effectLst/>
-        </p:spPr>
-        <p:style>
-          <a:lnRef idx="1">
-            <a:schemeClr val="accent1"/>
-          </a:lnRef>
-          <a:fillRef idx="3">
-            <a:schemeClr val="accent1"/>
-          </a:fillRef>
-          <a:effectRef idx="2">
-            <a:schemeClr val="accent1"/>
-          </a:effectRef>
-          <a:fontRef idx="minor">
-            <a:schemeClr val="lt1"/>
-          </a:fontRef>
-        </p:style>
-        <p:txBody>
-          <a:bodyPr wrap="square" tIns="36576" bIns="36576" rtlCol="0" anchor="ctr"/>
-          <a:lstStyle/>
-          <a:p>
-            <a:pPr algn="l"/>
-            <a:r>
-              <a:rPr sz="1300" b="1">
-                <a:solidFill>
-                  <a:srgbClr val="B42318"/>
-                </a:solidFill>
-                <a:latin typeface="Calibri"/>
-              </a:rPr>
-              <a:t>Spelling mistakes ("tset", "Nvo")</a:t>
-            </a:r>
-          </a:p>
-        </p:txBody>
-      </p:sp>
-      <p:cxnSp>
-        <p:nvCxnSpPr>
-          <p:cNvPr id="17431" name="Connector 17430"/>
-          <p:cNvCxnSpPr/>
-          <p:nvPr/>
-        </p:nvCxnSpPr>
-        <p:spPr>
-          <a:xfrm>
-            <a:off x="8430768" y="5422392"/>
-            <a:ext cx="365760" cy="0"/>
-          </a:xfrm>
-          <a:prstGeom prst="line">
-            <a:avLst/>
-          </a:prstGeom>
-          <a:ln w="22225">
-            <a:solidFill>
-              <a:srgbClr val="1F497D"/>
-            </a:solidFill>
-            <a:tailEnd type="triangle" w="med" len="med"/>
-          </a:ln>
-        </p:spPr>
-        <p:style>
-          <a:lnRef idx="2">
-            <a:schemeClr val="accent1"/>
-          </a:lnRef>
-          <a:fillRef idx="0">
-            <a:schemeClr val="accent1"/>
-          </a:fillRef>
-          <a:effectRef idx="1">
-            <a:schemeClr val="accent1"/>
-          </a:effectRef>
-          <a:fontRef idx="minor">
-            <a:schemeClr val="tx1"/>
-          </a:fontRef>
-        </p:style>
-      </p:cxnSp>
-      <p:sp>
-        <p:nvSpPr>
-          <p:cNvPr id="17432" name="Rounded Rectangle 17431"/>
-          <p:cNvSpPr/>
-          <p:nvPr/>
-        </p:nvSpPr>
-        <p:spPr>
-          <a:xfrm>
-            <a:off x="8823960" y="4974336"/>
-            <a:ext cx="2953512" cy="896112"/>
-          </a:xfrm>
-          <a:prstGeom prst="roundRect">
-            <a:avLst>
-              <a:gd name="adj" fmla="val 8000"/>
-            </a:avLst>
-          </a:prstGeom>
-          <a:solidFill>
-            <a:srgbClr val="FFFFFF"/>
-          </a:solidFill>
-          <a:ln w="15875">
-            <a:solidFill>
-              <a:srgbClr val="1E6B34"/>
-            </a:solidFill>
-          </a:ln>
-          <a:effectLst/>
-        </p:spPr>
-        <p:style>
-          <a:lnRef idx="1">
-            <a:schemeClr val="accent1"/>
-          </a:lnRef>
-          <a:fillRef idx="3">
-            <a:schemeClr val="accent1"/>
-          </a:fillRef>
-          <a:effectRef idx="2">
-            <a:schemeClr val="accent1"/>
-          </a:effectRef>
-          <a:fontRef idx="minor">
-            <a:schemeClr val="lt1"/>
-          </a:fontRef>
-        </p:style>
-        <p:txBody>
-          <a:bodyPr wrap="square" tIns="36576" bIns="36576" rtlCol="0" anchor="ctr"/>
-          <a:lstStyle/>
-          <a:p>
-            <a:pPr algn="l"/>
-            <a:r>
-              <a:rPr sz="1300" b="1">
-                <a:solidFill>
-                  <a:srgbClr val="1E6B34"/>
-                </a:solidFill>
-                <a:latin typeface="Calibri"/>
-              </a:rPr>
-              <a:t>Date stays empty; export stays locked</a:t>
+              <a:t>The date stays empty and export stays locked</a:t>
             </a:r>
           </a:p>
         </p:txBody>
@@ -9579,7 +9718,6 @@
           <a:lstStyle/>
           <a:p>
             <a:pPr algn="ctr"/>
-            <a:endParaRPr/>
           </a:p>
         </p:txBody>
       </p:sp>
@@ -9682,7 +9820,7 @@
           <a:bodyPr anchor="ctr"/>
           <a:lstStyle/>
           <a:p>
-            <a:pPr algn="ctr" eaLnBrk="1" hangingPunct="1"/>
+            <a:pPr eaLnBrk="1" hangingPunct="1" algn="ctr"/>
             <a:r>
               <a:rPr lang="en-US" sz="3600" b="1" dirty="0">
                 <a:latin typeface="Times New Roman" panose="02020603050405020304" pitchFamily="18" charset="0"/>
@@ -9856,7 +9994,7 @@
                 <a16:creationId xmlns:a16="http://schemas.microsoft.com/office/drawing/2014/main" id="{5DBCE864-823D-4A13-9607-5DA1F0ED5FB8}"/>
               </a:ext>
               <a:ext uri="{C183D7F6-B498-43B3-948B-1728B52AA6E4}">
-                <adec:decorative xmlns:adec="http://schemas.microsoft.com/office/drawing/2017/decorative" val="0"/>
+                <adec:decorative xmlns:adec="http://schemas.microsoft.com/office/drawing/2017/decorative" xmlns="" val="0"/>
               </a:ext>
             </a:extLst>
           </p:cNvPr>
@@ -9892,7 +10030,7 @@
           <a:p>
             <a:pPr algn="ctr"/>
             <a:r>
-              <a:rPr lang="en-US" sz="1500" b="1" dirty="0"/>
+              <a:rPr lang="en-US" dirty="0" b="1" sz="1500"/>
               <a:t>Nova Nexus</a:t>
             </a:r>
             <a:endParaRPr lang="en-IN" dirty="0"/>
@@ -9916,7 +10054,7 @@
           <a:noFill/>
         </p:spPr>
         <p:txBody>
-          <a:bodyPr wrap="square" lIns="45720" tIns="18288" rIns="45720" bIns="18288" anchor="t">
+          <a:bodyPr wrap="square" anchor="t" lIns="45720" rIns="45720" tIns="18288" bIns="18288">
             <a:spAutoFit/>
           </a:bodyPr>
           <a:lstStyle/>
@@ -9997,7 +10135,6 @@
           <a:lstStyle/>
           <a:p>
             <a:pPr algn="ctr"/>
-            <a:endParaRPr/>
           </a:p>
         </p:txBody>
       </p:sp>
@@ -10018,7 +10155,7 @@
           <a:noFill/>
         </p:spPr>
         <p:txBody>
-          <a:bodyPr wrap="square" tIns="18288" rIns="45720" bIns="18288" anchor="ctr">
+          <a:bodyPr wrap="square" anchor="ctr" rIns="45720" tIns="18288" bIns="18288">
             <a:spAutoFit/>
           </a:bodyPr>
           <a:lstStyle/>
@@ -10059,27 +10196,9 @@
                 <a:tableStyleId>{5C22544A-7EE6-4342-B048-85BDC9FD1C3A}</a:tableStyleId>
               </a:tblPr>
               <a:tblGrid>
-                <a:gridCol w="1234440">
-                  <a:extLst>
-                    <a:ext uri="{9D8B030D-6E8A-4147-A177-3AD203B41FA5}">
-                      <a16:colId xmlns:a16="http://schemas.microsoft.com/office/drawing/2014/main" val="20000"/>
-                    </a:ext>
-                  </a:extLst>
-                </a:gridCol>
-                <a:gridCol w="2103120">
-                  <a:extLst>
-                    <a:ext uri="{9D8B030D-6E8A-4147-A177-3AD203B41FA5}">
-                      <a16:colId xmlns:a16="http://schemas.microsoft.com/office/drawing/2014/main" val="20001"/>
-                    </a:ext>
-                  </a:extLst>
-                </a:gridCol>
-                <a:gridCol w="2240280">
-                  <a:extLst>
-                    <a:ext uri="{9D8B030D-6E8A-4147-A177-3AD203B41FA5}">
-                      <a16:colId xmlns:a16="http://schemas.microsoft.com/office/drawing/2014/main" val="20002"/>
-                    </a:ext>
-                  </a:extLst>
-                </a:gridCol>
+                <a:gridCol w="1234440"/>
+                <a:gridCol w="2103120"/>
+                <a:gridCol w="2240280"/>
               </a:tblGrid>
               <a:tr h="566928">
                 <a:tc>
@@ -10148,11 +10267,6 @@
                     </a:solidFill>
                   </a:tcPr>
                 </a:tc>
-                <a:extLst>
-                  <a:ext uri="{0D108BD9-81ED-4DB2-BD59-A6C34878D82A}">
-                    <a16:rowId xmlns:a16="http://schemas.microsoft.com/office/drawing/2014/main" val="10000"/>
-                  </a:ext>
-                </a:extLst>
               </a:tr>
               <a:tr h="566928">
                 <a:tc>
@@ -10189,7 +10303,7 @@
                           </a:solidFill>
                           <a:latin typeface="Calibri"/>
                         </a:rPr>
-                        <a:t>Reads a paragraph, misses a date</a:t>
+                        <a:t>Reads a long paragraph, misses a date</a:t>
                       </a:r>
                     </a:p>
                   </a:txBody>
@@ -10211,7 +10325,7 @@
                           </a:solidFill>
                           <a:latin typeface="Calibri"/>
                         </a:rPr>
-                        <a:t>Events in the calendar; checks only amber fields</a:t>
+                        <a:t>Gets the dates in the calendar; checks only the unsure ones</a:t>
                       </a:r>
                     </a:p>
                   </a:txBody>
@@ -10221,11 +10335,6 @@
                     </a:solidFill>
                   </a:tcPr>
                 </a:tc>
-                <a:extLst>
-                  <a:ext uri="{0D108BD9-81ED-4DB2-BD59-A6C34878D82A}">
-                    <a16:rowId xmlns:a16="http://schemas.microsoft.com/office/drawing/2014/main" val="10001"/>
-                  </a:ext>
-                </a:extLst>
               </a:tr>
               <a:tr h="566928">
                 <a:tc>
@@ -10294,11 +10403,6 @@
                     </a:solidFill>
                   </a:tcPr>
                 </a:tc>
-                <a:extLst>
-                  <a:ext uri="{0D108BD9-81ED-4DB2-BD59-A6C34878D82A}">
-                    <a16:rowId xmlns:a16="http://schemas.microsoft.com/office/drawing/2014/main" val="10002"/>
-                  </a:ext>
-                </a:extLst>
               </a:tr>
               <a:tr h="566928">
                 <a:tc>
@@ -10335,7 +10439,7 @@
                           </a:solidFill>
                           <a:latin typeface="Calibri"/>
                         </a:rPr>
-                        <a:t>Clashes found too late</a:t>
+                        <a:t>Finds clashes too late</a:t>
                       </a:r>
                     </a:p>
                   </a:txBody>
@@ -10357,7 +10461,7 @@
                           </a:solidFill>
                           <a:latin typeface="Calibri"/>
                         </a:rPr>
-                        <a:t>A clash report across the term</a:t>
+                        <a:t>Sees every clash in the term</a:t>
                       </a:r>
                     </a:p>
                   </a:txBody>
@@ -10367,11 +10471,6 @@
                     </a:solidFill>
                   </a:tcPr>
                 </a:tc>
-                <a:extLst>
-                  <a:ext uri="{0D108BD9-81ED-4DB2-BD59-A6C34878D82A}">
-                    <a16:rowId xmlns:a16="http://schemas.microsoft.com/office/drawing/2014/main" val="10003"/>
-                  </a:ext>
-                </a:extLst>
               </a:tr>
             </a:tbl>
           </a:graphicData>
@@ -10394,7 +10493,7 @@
           <a:noFill/>
         </p:spPr>
         <p:txBody>
-          <a:bodyPr wrap="square" lIns="45720" tIns="18288" rIns="45720" bIns="18288" anchor="t">
+          <a:bodyPr wrap="square" anchor="t" lIns="45720" rIns="45720" tIns="18288" bIns="18288">
             <a:spAutoFit/>
           </a:bodyPr>
           <a:lstStyle/>
@@ -10420,7 +10519,7 @@
                 </a:solidFill>
                 <a:latin typeface="Calibri"/>
               </a:rPr>
-              <a:t> Fedena, a full college ERP, lists $999 to $1,699 a year for a whole college, so one feature for one department must cost far less.</a:t>
+              <a:t> Fedena, a full college ERP, lists $999 to $1,699 a year for a whole college. One feature for one department must cost far less.</a:t>
             </a:r>
           </a:p>
           <a:p>
@@ -10436,7 +10535,7 @@
                 </a:solidFill>
                 <a:latin typeface="Calibri"/>
               </a:rPr>
-              <a:t>Honest status:</a:t>
+              <a:t>Where we are:</a:t>
             </a:r>
             <a:r>
               <a:rPr sz="1400" b="0">
@@ -10493,7 +10592,6 @@
           <a:lstStyle/>
           <a:p>
             <a:pPr algn="ctr"/>
-            <a:endParaRPr/>
           </a:p>
         </p:txBody>
       </p:sp>
@@ -10514,7 +10612,7 @@
           <a:noFill/>
         </p:spPr>
         <p:txBody>
-          <a:bodyPr wrap="square" tIns="18288" rIns="45720" bIns="18288" anchor="ctr">
+          <a:bodyPr wrap="square" anchor="ctr" rIns="45720" tIns="18288" bIns="18288">
             <a:spAutoFit/>
           </a:bodyPr>
           <a:lstStyle/>
@@ -10531,7 +10629,7 @@
                 </a:solidFill>
                 <a:latin typeface="Calibri"/>
               </a:rPr>
-              <a:t>Business model</a:t>
+              <a:t>Who pays</a:t>
             </a:r>
           </a:p>
         </p:txBody>
@@ -10573,7 +10671,7 @@
           </a:fontRef>
         </p:style>
         <p:txBody>
-          <a:bodyPr wrap="square" lIns="128016" rIns="128016" rtlCol="0" anchor="ctr"/>
+          <a:bodyPr rtlCol="0" anchor="ctr" wrap="square" lIns="128016" rIns="128016"/>
           <a:lstStyle/>
           <a:p>
             <a:pPr algn="ctr"/>
@@ -10595,7 +10693,7 @@
                 </a:solidFill>
                 <a:latin typeface="Calibri"/>
               </a:rPr>
-              <a:t>proposed price; the first term is free</a:t>
+              <a:t>our proposed price; the first term is free</a:t>
             </a:r>
           </a:p>
         </p:txBody>
@@ -10617,7 +10715,7 @@
           <a:noFill/>
         </p:spPr>
         <p:txBody>
-          <a:bodyPr wrap="square" lIns="45720" tIns="18288" rIns="45720" bIns="18288" anchor="t">
+          <a:bodyPr wrap="square" anchor="t" lIns="45720" rIns="45720" tIns="18288" bIns="18288">
             <a:spAutoFit/>
           </a:bodyPr>
           <a:lstStyle/>
@@ -10634,7 +10732,7 @@
                 </a:solidFill>
                 <a:latin typeface="Calibri"/>
               </a:rPr>
-              <a:t>Free for every student:</a:t>
+              <a:t>Free for students:</a:t>
             </a:r>
             <a:r>
               <a:rPr sz="1400" b="0">
@@ -10643,7 +10741,7 @@
                 </a:solidFill>
                 <a:latin typeface="Calibri"/>
               </a:rPr>
-              <a:t> paste, share or auto-read; clashes; Google Calendar, .ics, class link. Costs us about ₹0.</a:t>
+              <a:t> everything in "Works now". It runs on the phone, so it costs us about ₹0.</a:t>
             </a:r>
           </a:p>
           <a:p>
@@ -10668,7 +10766,7 @@
                 </a:solidFill>
                 <a:latin typeface="Calibri"/>
               </a:rPr>
-              <a:t> the class rep or a teacher publishes; the HOD signs off. One free-tier Worker and storage.</a:t>
+              <a:t> the class rep or a teacher publishes notices, and the HOD pays.</a:t>
             </a:r>
           </a:p>
           <a:p>
@@ -10684,7 +10782,7 @@
                 </a:solidFill>
                 <a:latin typeface="Calibri"/>
               </a:rPr>
-              <a:t>Why pay when WhatsApp is free?</a:t>
+              <a:t>Why pay?</a:t>
             </a:r>
             <a:r>
               <a:rPr sz="1400" b="0">
@@ -10693,7 +10791,7 @@
                 </a:solidFill>
                 <a:latin typeface="Calibri"/>
               </a:rPr>
-              <a:t> Nobody's calendar moves when a date changes; the plan </a:t>
+              <a:t> On WhatsApp, nobody's calendar changes when a date changes. With the plan, it changes </a:t>
             </a:r>
             <a:r>
               <a:rPr sz="1400" b="1">
@@ -10705,7 +10803,7 @@
                 </a:highlight>
                 <a:latin typeface="Calibri"/>
               </a:rPr>
-              <a:t>moves it for everyone</a:t>
+              <a:t>for the whole class</a:t>
             </a:r>
             <a:r>
               <a:rPr sz="1400" b="0">
@@ -10714,7 +10812,7 @@
                 </a:solidFill>
                 <a:latin typeface="Calibri"/>
               </a:rPr>
-              <a:t> and catches term-wide clashes.</a:t>
+              <a:t>.</a:t>
             </a:r>
           </a:p>
           <a:p>
@@ -10739,7 +10837,7 @@
                 </a:solidFill>
                 <a:latin typeface="Calibri"/>
               </a:rPr>
-              <a:t> one department, one term; it works if the HOD pays for the next term.</a:t>
+              <a:t> one department for one term. If the HOD pays for the next term, it works.</a:t>
             </a:r>
           </a:p>
         </p:txBody>
@@ -10817,7 +10915,6 @@
           <a:lstStyle/>
           <a:p>
             <a:pPr algn="ctr"/>
-            <a:endParaRPr/>
           </a:p>
         </p:txBody>
       </p:sp>
@@ -10920,7 +11017,7 @@
           <a:bodyPr anchor="ctr"/>
           <a:lstStyle/>
           <a:p>
-            <a:pPr algn="ctr" eaLnBrk="1" hangingPunct="1"/>
+            <a:pPr eaLnBrk="1" hangingPunct="1" algn="ctr"/>
             <a:r>
               <a:rPr lang="en-US" sz="3600" b="1" dirty="0">
                 <a:latin typeface="Times New Roman" panose="02020603050405020304" pitchFamily="18" charset="0"/>
@@ -11094,7 +11191,7 @@
                 <a16:creationId xmlns:a16="http://schemas.microsoft.com/office/drawing/2014/main" id="{5DBCE864-823D-4A13-9607-5DA1F0ED5FB8}"/>
               </a:ext>
               <a:ext uri="{C183D7F6-B498-43B3-948B-1728B52AA6E4}">
-                <adec:decorative xmlns:adec="http://schemas.microsoft.com/office/drawing/2017/decorative" val="0"/>
+                <adec:decorative xmlns:adec="http://schemas.microsoft.com/office/drawing/2017/decorative" xmlns="" val="0"/>
               </a:ext>
             </a:extLst>
           </p:cNvPr>
@@ -11130,7 +11227,7 @@
           <a:p>
             <a:pPr algn="ctr"/>
             <a:r>
-              <a:rPr lang="en-US" sz="1500" b="1" dirty="0"/>
+              <a:rPr lang="en-US" dirty="0" b="1" sz="1500"/>
               <a:t>Nova Nexus</a:t>
             </a:r>
             <a:endParaRPr lang="en-IN" dirty="0"/>
@@ -11154,7 +11251,7 @@
           <a:noFill/>
         </p:spPr>
         <p:txBody>
-          <a:bodyPr wrap="square" lIns="45720" tIns="18288" rIns="45720" bIns="18288" anchor="t">
+          <a:bodyPr wrap="square" anchor="t" lIns="45720" rIns="45720" tIns="18288" bIns="18288">
             <a:spAutoFit/>
           </a:bodyPr>
           <a:lstStyle/>
@@ -11235,7 +11332,6 @@
           <a:lstStyle/>
           <a:p>
             <a:pPr algn="ctr"/>
-            <a:endParaRPr/>
           </a:p>
         </p:txBody>
       </p:sp>
@@ -11256,7 +11352,7 @@
           <a:noFill/>
         </p:spPr>
         <p:txBody>
-          <a:bodyPr wrap="square" tIns="18288" rIns="45720" bIns="18288" anchor="ctr">
+          <a:bodyPr wrap="square" anchor="ctr" rIns="45720" tIns="18288" bIns="18288">
             <a:spAutoFit/>
           </a:bodyPr>
           <a:lstStyle/>
@@ -11273,7 +11369,7 @@
                 </a:solidFill>
                 <a:latin typeface="Calibri"/>
               </a:rPr>
-              <a:t>Other notice tools: we read their code (Oct 2026)</a:t>
+              <a:t>Other notice tools (we read their code, Oct 2026)</a:t>
             </a:r>
           </a:p>
         </p:txBody>
@@ -11297,27 +11393,9 @@
                 <a:tableStyleId>{5C22544A-7EE6-4342-B048-85BDC9FD1C3A}</a:tableStyleId>
               </a:tblPr>
               <a:tblGrid>
-                <a:gridCol w="4206240">
-                  <a:extLst>
-                    <a:ext uri="{9D8B030D-6E8A-4147-A177-3AD203B41FA5}">
-                      <a16:colId xmlns:a16="http://schemas.microsoft.com/office/drawing/2014/main" val="20000"/>
-                    </a:ext>
-                  </a:extLst>
-                </a:gridCol>
-                <a:gridCol w="1645920">
-                  <a:extLst>
-                    <a:ext uri="{9D8B030D-6E8A-4147-A177-3AD203B41FA5}">
-                      <a16:colId xmlns:a16="http://schemas.microsoft.com/office/drawing/2014/main" val="20001"/>
-                    </a:ext>
-                  </a:extLst>
-                </a:gridCol>
-                <a:gridCol w="1645920">
-                  <a:extLst>
-                    <a:ext uri="{9D8B030D-6E8A-4147-A177-3AD203B41FA5}">
-                      <a16:colId xmlns:a16="http://schemas.microsoft.com/office/drawing/2014/main" val="20002"/>
-                    </a:ext>
-                  </a:extLst>
-                </a:gridCol>
+                <a:gridCol w="4206240"/>
+                <a:gridCol w="1645920"/>
+                <a:gridCol w="1645920"/>
               </a:tblGrid>
               <a:tr h="457200">
                 <a:tc>
@@ -11386,11 +11464,6 @@
                     </a:solidFill>
                   </a:tcPr>
                 </a:tc>
-                <a:extLst>
-                  <a:ext uri="{0D108BD9-81ED-4DB2-BD59-A6C34878D82A}">
-                    <a16:rowId xmlns:a16="http://schemas.microsoft.com/office/drawing/2014/main" val="10000"/>
-                  </a:ext>
-                </a:extLst>
               </a:tr>
               <a:tr h="457200">
                 <a:tc>
@@ -11405,7 +11478,7 @@
                           </a:solidFill>
                           <a:latin typeface="Calibri"/>
                         </a:rPr>
-                        <a:t>7 public notice tools on GitHub, most send text to an AI model</a:t>
+                        <a:t>7 notice tools on GitHub, most send the text to an AI model</a:t>
                       </a:r>
                     </a:p>
                   </a:txBody>
@@ -11459,11 +11532,6 @@
                     </a:solidFill>
                   </a:tcPr>
                 </a:tc>
-                <a:extLst>
-                  <a:ext uri="{0D108BD9-81ED-4DB2-BD59-A6C34878D82A}">
-                    <a16:rowId xmlns:a16="http://schemas.microsoft.com/office/drawing/2014/main" val="10001"/>
-                  </a:ext>
-                </a:extLst>
               </a:tr>
               <a:tr h="457200">
                 <a:tc>
@@ -11532,11 +11600,6 @@
                     </a:solidFill>
                   </a:tcPr>
                 </a:tc>
-                <a:extLst>
-                  <a:ext uri="{0D108BD9-81ED-4DB2-BD59-A6C34878D82A}">
-                    <a16:rowId xmlns:a16="http://schemas.microsoft.com/office/drawing/2014/main" val="10002"/>
-                  </a:ext>
-                </a:extLst>
               </a:tr>
               <a:tr h="457200">
                 <a:tc>
@@ -11605,11 +11668,6 @@
                     </a:solidFill>
                   </a:tcPr>
                 </a:tc>
-                <a:extLst>
-                  <a:ext uri="{0D108BD9-81ED-4DB2-BD59-A6C34878D82A}">
-                    <a16:rowId xmlns:a16="http://schemas.microsoft.com/office/drawing/2014/main" val="10003"/>
-                  </a:ext>
-                </a:extLst>
               </a:tr>
             </a:tbl>
           </a:graphicData>
@@ -11658,7 +11716,6 @@
           <a:lstStyle/>
           <a:p>
             <a:pPr algn="ctr"/>
-            <a:endParaRPr/>
           </a:p>
         </p:txBody>
       </p:sp>
@@ -11679,7 +11736,7 @@
           <a:noFill/>
         </p:spPr>
         <p:txBody>
-          <a:bodyPr wrap="square" tIns="18288" rIns="45720" bIns="18288" anchor="ctr">
+          <a:bodyPr wrap="square" anchor="ctr" rIns="45720" tIns="18288" bIns="18288">
             <a:spAutoFit/>
           </a:bodyPr>
           <a:lstStyle/>
@@ -11718,7 +11775,7 @@
           <a:noFill/>
         </p:spPr>
         <p:txBody>
-          <a:bodyPr wrap="square" lIns="45720" tIns="18288" rIns="45720" bIns="18288" anchor="t">
+          <a:bodyPr wrap="square" anchor="t" lIns="45720" rIns="45720" tIns="18288" bIns="18288">
             <a:spAutoFit/>
           </a:bodyPr>
           <a:lstStyle/>
@@ -11744,7 +11801,7 @@
                 </a:solidFill>
                 <a:latin typeface="Calibri"/>
               </a:rPr>
-              <a:t> moved notices out of WhatsApp groups: "many students miss important notices" (e-notice board post, 23 Sep 2025).</a:t>
+              <a:t> stopped sharing notices in WhatsApp groups because "many students miss important notices" (e-notice board post, 23 Sep 2025).</a:t>
             </a:r>
           </a:p>
           <a:p>
@@ -11769,7 +11826,7 @@
                 </a:solidFill>
                 <a:latin typeface="Calibri"/>
               </a:rPr>
-              <a:t> keeps academic notices in official class groups run by the class representative (Careers360, 9 Sep 2026).</a:t>
+              <a:t> keeps academic notices in official class groups run by the class rep (Careers360, 9 Sep 2026).</a:t>
             </a:r>
           </a:p>
           <a:p>
@@ -11794,7 +11851,7 @@
                 </a:solidFill>
                 <a:latin typeface="Calibri"/>
               </a:rPr>
-              <a:t> set semester exams in the Dasara holidays; students protested (PTI via Careers360, 12 Oct 2026).</a:t>
+              <a:t> set semester exams in the Dasara holidays, and students protested (PTI via Careers360, 12 Oct 2026).</a:t>
             </a:r>
           </a:p>
           <a:p>
@@ -11810,7 +11867,7 @@
                 </a:solidFill>
                 <a:latin typeface="Calibri"/>
               </a:rPr>
-              <a:t>Price anchor:</a:t>
+              <a:t>Price:</a:t>
             </a:r>
             <a:r>
               <a:rPr sz="1300" b="0">
@@ -11819,7 +11876,26 @@
                 </a:solidFill>
                 <a:latin typeface="Calibri"/>
               </a:rPr>
-              <a:t> fedena.com/pricing-and-plans.  </a:t>
+              <a:t> </a:t>
+            </a:r>
+            <a:r>
+              <a:rPr sz="1300" b="1">
+                <a:solidFill>
+                  <a:srgbClr val="1F497D"/>
+                </a:solidFill>
+                <a:latin typeface="Calibri"/>
+                <a:hlinkClick r:id="rId4"/>
+              </a:rPr>
+              <a:t>fedena.com/pricing-and-plans</a:t>
+            </a:r>
+            <a:r>
+              <a:rPr sz="1300" b="0">
+                <a:solidFill>
+                  <a:srgbClr val="262A33"/>
+                </a:solidFill>
+                <a:latin typeface="Calibri"/>
+              </a:rPr>
+              <a:t>.  </a:t>
             </a:r>
             <a:r>
               <a:rPr sz="1300" b="1">
@@ -11844,8 +11920,8 @@
       </p:sp>
       <p:pic>
         <p:nvPicPr>
-          <p:cNvPr id="17418" name="Picture 17417" descr="qr-live.png">
-            <a:hlinkClick r:id="rId3"/>
+          <p:cNvPr id="17418" name="Picture 17417" descr="qr-demovideo.png">
+            <a:hlinkClick r:id="rId6"/>
           </p:cNvPr>
           <p:cNvPicPr>
             <a:picLocks noChangeAspect="1"/>
@@ -11853,15 +11929,15 @@
           <p:nvPr/>
         </p:nvPicPr>
         <p:blipFill>
-          <a:blip r:embed="rId4"/>
+          <a:blip r:embed="rId5"/>
           <a:stretch>
             <a:fillRect/>
           </a:stretch>
         </p:blipFill>
         <p:spPr>
           <a:xfrm>
-            <a:off x="8732520" y="1463040"/>
-            <a:ext cx="2194560" cy="2194560"/>
+            <a:off x="8412480" y="1371600"/>
+            <a:ext cx="1005840" cy="1005840"/>
           </a:xfrm>
           <a:prstGeom prst="rect">
             <a:avLst/>
@@ -11881,8 +11957,8 @@
         </p:nvSpPr>
         <p:spPr>
           <a:xfrm>
-            <a:off x="8366760" y="3685032"/>
-            <a:ext cx="2926080" cy="457200"/>
+            <a:off x="8046719" y="2404872"/>
+            <a:ext cx="1737360" cy="457200"/>
           </a:xfrm>
           <a:prstGeom prst="rect">
             <a:avLst/>
@@ -11902,9 +11978,9 @@
                   <a:srgbClr val="1F497D"/>
                 </a:solidFill>
                 <a:latin typeface="Calibri"/>
-                <a:hlinkClick r:id="rId3"/>
-              </a:rPr>
-              <a:t>Live demo</a:t>
+                <a:hlinkClick r:id="rId6"/>
+              </a:rPr>
+              <a:t>Demo video</a:t>
             </a:r>
             <a:r>
               <a:t> </a:t>
@@ -11912,16 +11988,47 @@
           </a:p>
         </p:txBody>
       </p:sp>
-      <p:sp>
-        <p:nvSpPr>
-          <p:cNvPr id="17420" name="TextBox 17419"/>
+      <p:pic>
+        <p:nvPicPr>
+          <p:cNvPr id="17420" name="Picture 17419" descr="qr-website.png">
+            <a:hlinkClick r:id="rId8"/>
+          </p:cNvPr>
+          <p:cNvPicPr>
+            <a:picLocks noChangeAspect="1"/>
+          </p:cNvPicPr>
+          <p:nvPr/>
+        </p:nvPicPr>
+        <p:blipFill>
+          <a:blip r:embed="rId7"/>
+          <a:stretch>
+            <a:fillRect/>
+          </a:stretch>
+        </p:blipFill>
+        <p:spPr>
+          <a:xfrm>
+            <a:off x="9601200" y="1371600"/>
+            <a:ext cx="1005840" cy="1005840"/>
+          </a:xfrm>
+          <a:prstGeom prst="rect">
+            <a:avLst/>
+          </a:prstGeom>
+          <a:ln w="9525">
+            <a:solidFill>
+              <a:srgbClr val="C9D2DF"/>
+            </a:solidFill>
+          </a:ln>
+        </p:spPr>
+      </p:pic>
+      <p:sp>
+        <p:nvSpPr>
+          <p:cNvPr id="17421" name="TextBox 17420"/>
           <p:cNvSpPr txBox="1"/>
           <p:nvPr/>
         </p:nvSpPr>
         <p:spPr>
           <a:xfrm>
-            <a:off x="8275320" y="4114800"/>
-            <a:ext cx="3108960" cy="1097280"/>
+            <a:off x="9235440" y="2404872"/>
+            <a:ext cx="1737360" cy="457200"/>
           </a:xfrm>
           <a:prstGeom prst="rect">
             <a:avLst/>
@@ -11929,14 +12036,123 @@
           <a:noFill/>
         </p:spPr>
         <p:txBody>
-          <a:bodyPr wrap="square" lIns="45720" tIns="18288" rIns="45720" bIns="18288" anchor="t">
+          <a:bodyPr wrap="none">
             <a:spAutoFit/>
           </a:bodyPr>
           <a:lstStyle/>
           <a:p>
+            <a:pPr algn="ctr"/>
+            <a:r>
+              <a:rPr sz="1300" b="1">
+                <a:solidFill>
+                  <a:srgbClr val="1F497D"/>
+                </a:solidFill>
+                <a:latin typeface="Calibri"/>
+                <a:hlinkClick r:id="rId8"/>
+              </a:rPr>
+              <a:t>Website</a:t>
+            </a:r>
+            <a:r>
+              <a:t> </a:t>
+            </a:r>
+          </a:p>
+        </p:txBody>
+      </p:sp>
+      <p:pic>
+        <p:nvPicPr>
+          <p:cNvPr id="17422" name="Picture 17421" descr="qr-github.png">
+            <a:hlinkClick r:id="rId10"/>
+          </p:cNvPr>
+          <p:cNvPicPr>
+            <a:picLocks noChangeAspect="1"/>
+          </p:cNvPicPr>
+          <p:nvPr/>
+        </p:nvPicPr>
+        <p:blipFill>
+          <a:blip r:embed="rId9"/>
+          <a:stretch>
+            <a:fillRect/>
+          </a:stretch>
+        </p:blipFill>
+        <p:spPr>
+          <a:xfrm>
+            <a:off x="10789919" y="1371600"/>
+            <a:ext cx="1005840" cy="1005840"/>
+          </a:xfrm>
+          <a:prstGeom prst="rect">
+            <a:avLst/>
+          </a:prstGeom>
+          <a:ln w="9525">
+            <a:solidFill>
+              <a:srgbClr val="C9D2DF"/>
+            </a:solidFill>
+          </a:ln>
+        </p:spPr>
+      </p:pic>
+      <p:sp>
+        <p:nvSpPr>
+          <p:cNvPr id="17423" name="TextBox 17422"/>
+          <p:cNvSpPr txBox="1"/>
+          <p:nvPr/>
+        </p:nvSpPr>
+        <p:spPr>
+          <a:xfrm>
+            <a:off x="10424159" y="2404872"/>
+            <a:ext cx="1737360" cy="457200"/>
+          </a:xfrm>
+          <a:prstGeom prst="rect">
+            <a:avLst/>
+          </a:prstGeom>
+          <a:noFill/>
+        </p:spPr>
+        <p:txBody>
+          <a:bodyPr wrap="none">
+            <a:spAutoFit/>
+          </a:bodyPr>
+          <a:lstStyle/>
+          <a:p>
+            <a:pPr algn="ctr"/>
+            <a:r>
+              <a:rPr sz="1300" b="1">
+                <a:solidFill>
+                  <a:srgbClr val="1F497D"/>
+                </a:solidFill>
+                <a:latin typeface="Calibri"/>
+                <a:hlinkClick r:id="rId10"/>
+              </a:rPr>
+              <a:t>GitHub</a:t>
+            </a:r>
+            <a:r>
+              <a:t> </a:t>
+            </a:r>
+          </a:p>
+        </p:txBody>
+      </p:sp>
+      <p:sp>
+        <p:nvSpPr>
+          <p:cNvPr id="17424" name="TextBox 17423"/>
+          <p:cNvSpPr txBox="1"/>
+          <p:nvPr/>
+        </p:nvSpPr>
+        <p:spPr>
+          <a:xfrm>
+            <a:off x="8183879" y="3017520"/>
+            <a:ext cx="3657600" cy="1463040"/>
+          </a:xfrm>
+          <a:prstGeom prst="rect">
+            <a:avLst/>
+          </a:prstGeom>
+          <a:noFill/>
+        </p:spPr>
+        <p:txBody>
+          <a:bodyPr wrap="square" anchor="t" lIns="45720" rIns="45720" tIns="18288" bIns="18288">
+            <a:spAutoFit/>
+          </a:bodyPr>
+          <a:lstStyle/>
+          <a:p>
             <a:pPr algn="ctr">
               <a:spcAft>
-                <a:spcPts val="400"/>
+                <a:spcPts val="300"/>
               </a:spcAft>
             </a:pPr>
             <a:r>
@@ -11945,24 +12161,52 @@
                   <a:srgbClr val="1F497D"/>
                 </a:solidFill>
                 <a:latin typeface="Calibri"/>
-              </a:rPr>
-              <a:t>anki1kr.me/NoticeDecoder</a:t>
+                <a:hlinkClick r:id="rId6"/>
+              </a:rPr>
+              <a:t>youtu.be/joI75POVTr0</a:t>
+            </a:r>
+            <a:r>
+              <a:t> </a:t>
             </a:r>
           </a:p>
           <a:p>
             <a:pPr algn="ctr">
               <a:spcAft>
-                <a:spcPts val="400"/>
+                <a:spcPts val="300"/>
               </a:spcAft>
             </a:pPr>
             <a:r>
-              <a:rPr sz="1300" b="0">
-                <a:solidFill>
-                  <a:srgbClr val="5B6370"/>
+              <a:rPr sz="1300" b="1">
+                <a:solidFill>
+                  <a:srgbClr val="1F497D"/>
                 </a:solidFill>
                 <a:latin typeface="Calibri"/>
-              </a:rPr>
-              <a:t>Works in any browser; nothing to install.</a:t>
+                <a:hlinkClick r:id="rId8"/>
+              </a:rPr>
+              <a:t>anki1kr.me/NoticeDecoder</a:t>
+            </a:r>
+            <a:r>
+              <a:t> </a:t>
+            </a:r>
+          </a:p>
+          <a:p>
+            <a:pPr algn="ctr">
+              <a:spcAft>
+                <a:spcPts val="300"/>
+              </a:spcAft>
+            </a:pPr>
+            <a:r>
+              <a:rPr sz="1300" b="1">
+                <a:solidFill>
+                  <a:srgbClr val="1F497D"/>
+                </a:solidFill>
+                <a:latin typeface="Calibri"/>
+                <a:hlinkClick r:id="rId10"/>
+              </a:rPr>
+              <a:t>github.com/anki1kr/NoticeDecoder</a:t>
+            </a:r>
+            <a:r>
+              <a:t> </a:t>
             </a:r>
           </a:p>
         </p:txBody>
@@ -11971,6 +12215,859 @@
     <p:extLst>
       <p:ext uri="{BB962C8B-B14F-4D97-AF65-F5344CB8AC3E}">
         <p14:creationId xmlns:p14="http://schemas.microsoft.com/office/powerpoint/2010/main" val="3916788613"/>
+      </p:ext>
+    </p:extLst>
+  </p:cSld>
+  <p:clrMapOvr>
+    <a:masterClrMapping/>
+  </p:clrMapOvr>
+</p:sld>
+</file>
+
+<file path=ppt/slides/slide7.xml><?xml version="1.0" encoding="utf-8"?>
+<p:sld xmlns:a="http://schemas.openxmlformats.org/drawingml/2006/main" xmlns:r="http://schemas.openxmlformats.org/officeDocument/2006/relationships" xmlns:p="http://schemas.openxmlformats.org/presentationml/2006/main">
+  <p:cSld>
+    <p:spTree>
+      <p:nvGrpSpPr>
+        <p:cNvPr id="1" name=""/>
+        <p:cNvGrpSpPr/>
+        <p:nvPr/>
+      </p:nvGrpSpPr>
+      <p:grpSpPr>
+        <a:xfrm>
+          <a:off x="0" y="0"/>
+          <a:ext cx="0" cy="0"/>
+          <a:chOff x="0" y="0"/>
+          <a:chExt cx="0" cy="0"/>
+        </a:xfrm>
+      </p:grpSpPr>
+      <p:sp>
+        <p:nvSpPr>
+          <p:cNvPr id="10" name="Rectangle 9">
+            <a:extLst>
+              <a:ext uri="{FF2B5EF4-FFF2-40B4-BE49-F238E27FC236}">
+                <a16:creationId xmlns:a16="http://schemas.microsoft.com/office/drawing/2014/main" id="{AD4F69D3-EEB0-4C4C-9434-B9960FB5854C}"/>
+              </a:ext>
+            </a:extLst>
+          </p:cNvPr>
+          <p:cNvSpPr>
+            <a:spLocks noChangeArrowheads="1"/>
+          </p:cNvSpPr>
+          <p:nvPr/>
+        </p:nvSpPr>
+        <p:spPr bwMode="auto">
+          <a:xfrm>
+            <a:off x="0" y="6354762"/>
+            <a:ext cx="12191999" cy="503238"/>
+          </a:xfrm>
+          <a:prstGeom prst="rect">
+            <a:avLst/>
+          </a:prstGeom>
+          <a:solidFill>
+            <a:srgbClr val="0070C0"/>
+          </a:solidFill>
+          <a:ln w="9525">
+            <a:noFill/>
+            <a:miter lim="800000"/>
+            <a:headEnd/>
+            <a:tailEnd/>
+          </a:ln>
+          <a:effectLst>
+            <a:outerShdw dist="23000" dir="5400000" rotWithShape="0">
+              <a:srgbClr val="808080">
+                <a:alpha val="34999"/>
+              </a:srgbClr>
+            </a:outerShdw>
+          </a:effectLst>
+        </p:spPr>
+        <p:txBody>
+          <a:bodyPr anchor="ctr"/>
+          <a:lstStyle/>
+          <a:p>
+            <a:pPr marL="0" marR="0" lvl="0" indent="0" algn="ctr" defTabSz="457200" rtl="0" eaLnBrk="1" fontAlgn="auto" latinLnBrk="0" hangingPunct="1">
+              <a:lnSpc>
+                <a:spcPct val="100000"/>
+              </a:lnSpc>
+              <a:spcBef>
+                <a:spcPts val="0"/>
+              </a:spcBef>
+              <a:spcAft>
+                <a:spcPts val="0"/>
+              </a:spcAft>
+              <a:buClrTx/>
+              <a:buSzTx/>
+              <a:buFontTx/>
+              <a:buNone/>
+              <a:tabLst/>
+              <a:defRPr/>
+            </a:pPr>
+            <a:endParaRPr kumimoji="0" lang="en-US" sz="1800" b="0" i="0" u="none" strike="noStrike" kern="1200" cap="none" spc="0" normalizeH="0" baseline="0" noProof="0" dirty="0">
+              <a:ln>
+                <a:noFill/>
+              </a:ln>
+              <a:solidFill>
+                <a:srgbClr val="C0504D">
+                  <a:lumMod val="75000"/>
+                </a:srgbClr>
+              </a:solidFill>
+              <a:effectLst/>
+              <a:uLnTx/>
+              <a:uFillTx/>
+              <a:latin typeface="Calibri"/>
+              <a:ea typeface="ＭＳ Ｐゴシック" pitchFamily="1" charset="-128"/>
+              <a:cs typeface="+mn-cs"/>
+            </a:endParaRPr>
+          </a:p>
+        </p:txBody>
+      </p:sp>
+      <p:sp>
+        <p:nvSpPr>
+          <p:cNvPr id="6" name="Slide Number Placeholder 5"/>
+          <p:cNvSpPr>
+            <a:spLocks noGrp="1"/>
+          </p:cNvSpPr>
+          <p:nvPr>
+            <p:ph type="sldNum" sz="quarter" idx="12"/>
+          </p:nvPr>
+        </p:nvSpPr>
+        <p:spPr/>
+        <p:txBody>
+          <a:bodyPr/>
+          <a:lstStyle/>
+          <a:p>
+            <a:pPr marL="0" marR="0" lvl="0" indent="0" algn="r" defTabSz="457200" rtl="0" eaLnBrk="1" fontAlgn="base" latinLnBrk="0" hangingPunct="1">
+              <a:lnSpc>
+                <a:spcPct val="100000"/>
+              </a:lnSpc>
+              <a:spcBef>
+                <a:spcPct val="0"/>
+              </a:spcBef>
+              <a:spcAft>
+                <a:spcPct val="0"/>
+              </a:spcAft>
+              <a:buClrTx/>
+              <a:buSzTx/>
+              <a:buFontTx/>
+              <a:buNone/>
+              <a:tabLst/>
+              <a:defRPr/>
+            </a:pPr>
+            <a:fld id="{677C3CE7-23F7-4828-823C-E0205DF2CF97}" type="slidenum">
+              <a:rPr kumimoji="0" lang="en-US" sz="1200" b="1" i="0" u="none" strike="noStrike" kern="1200" cap="none" spc="0" normalizeH="0" baseline="0" noProof="0">
+                <a:ln>
+                  <a:noFill/>
+                </a:ln>
+                <a:solidFill>
+                  <a:prstClr val="white"/>
+                </a:solidFill>
+                <a:effectLst/>
+                <a:uLnTx/>
+                <a:uFillTx/>
+                <a:latin typeface="TradeGothic" pitchFamily="1" charset="0"/>
+                <a:ea typeface="ＭＳ Ｐゴシック" pitchFamily="1" charset="-128"/>
+                <a:cs typeface="+mn-cs"/>
+              </a:rPr>
+              <a:pPr marL="0" marR="0" lvl="0" indent="0" algn="r" defTabSz="457200" rtl="0" eaLnBrk="1" fontAlgn="base" latinLnBrk="0" hangingPunct="1">
+                <a:lnSpc>
+                  <a:spcPct val="100000"/>
+                </a:lnSpc>
+                <a:spcBef>
+                  <a:spcPct val="0"/>
+                </a:spcBef>
+                <a:spcAft>
+                  <a:spcPct val="0"/>
+                </a:spcAft>
+                <a:buClrTx/>
+                <a:buSzTx/>
+                <a:buFontTx/>
+                <a:buNone/>
+                <a:tabLst/>
+                <a:defRPr/>
+              </a:pPr>
+              <a:t>7</a:t>
+            </a:fld>
+            <a:endParaRPr kumimoji="0" lang="en-US" sz="1200" b="1" i="0" u="none" strike="noStrike" kern="1200" cap="none" spc="0" normalizeH="0" baseline="0" noProof="0" dirty="0">
+              <a:ln>
+                <a:noFill/>
+              </a:ln>
+              <a:solidFill>
+                <a:prstClr val="white"/>
+              </a:solidFill>
+              <a:effectLst/>
+              <a:uLnTx/>
+              <a:uFillTx/>
+              <a:latin typeface="TradeGothic" pitchFamily="1" charset="0"/>
+              <a:ea typeface="ＭＳ Ｐゴシック" pitchFamily="1" charset="-128"/>
+              <a:cs typeface="+mn-cs"/>
+            </a:endParaRPr>
+          </a:p>
+        </p:txBody>
+      </p:sp>
+      <p:sp>
+        <p:nvSpPr>
+          <p:cNvPr id="7" name="Footer Placeholder 6"/>
+          <p:cNvSpPr>
+            <a:spLocks noGrp="1"/>
+          </p:cNvSpPr>
+          <p:nvPr>
+            <p:ph type="ftr" sz="quarter" idx="11"/>
+          </p:nvPr>
+        </p:nvSpPr>
+        <p:spPr>
+          <a:xfrm>
+            <a:off x="4648200" y="6356353"/>
+            <a:ext cx="3204000" cy="365125"/>
+          </a:xfrm>
+        </p:spPr>
+        <p:txBody>
+          <a:bodyPr/>
+          <a:lstStyle/>
+          <a:p>
+            <a:pPr marL="0" marR="0" lvl="0" indent="0" algn="ctr" defTabSz="457200" rtl="0" eaLnBrk="1" fontAlgn="auto" latinLnBrk="0" hangingPunct="1">
+              <a:lnSpc>
+                <a:spcPct val="100000"/>
+              </a:lnSpc>
+              <a:spcBef>
+                <a:spcPts val="0"/>
+              </a:spcBef>
+              <a:spcAft>
+                <a:spcPts val="0"/>
+              </a:spcAft>
+              <a:buClrTx/>
+              <a:buSzTx/>
+              <a:buFontTx/>
+              <a:buNone/>
+              <a:tabLst/>
+              <a:defRPr/>
+            </a:pPr>
+            <a:r>
+              <a:rPr kumimoji="0" lang="en-US" sz="1200" b="0" i="0" u="none" strike="noStrike" kern="1200" cap="none" spc="0" normalizeH="0" baseline="0" noProof="0">
+                <a:ln>
+                  <a:noFill/>
+                </a:ln>
+                <a:solidFill>
+                  <a:prstClr val="white"/>
+                </a:solidFill>
+                <a:effectLst/>
+                <a:uLnTx/>
+                <a:uFillTx/>
+                <a:latin typeface="TradeGothic"/>
+                <a:ea typeface="+mn-ea"/>
+                <a:cs typeface="+mn-cs"/>
+              </a:rPr>
+              <a:t>@SIH Idea submission- Template</a:t>
+            </a:r>
+            <a:endParaRPr kumimoji="0" lang="en-US" sz="1200" b="0" i="0" u="none" strike="noStrike" kern="1200" cap="none" spc="0" normalizeH="0" baseline="0" noProof="0" dirty="0">
+              <a:ln>
+                <a:noFill/>
+              </a:ln>
+              <a:solidFill>
+                <a:prstClr val="white"/>
+              </a:solidFill>
+              <a:effectLst/>
+              <a:uLnTx/>
+              <a:uFillTx/>
+              <a:latin typeface="TradeGothic"/>
+              <a:ea typeface="+mn-ea"/>
+              <a:cs typeface="+mn-cs"/>
+            </a:endParaRPr>
+          </a:p>
+        </p:txBody>
+      </p:sp>
+      <p:sp>
+        <p:nvSpPr>
+          <p:cNvPr id="3" name="Round Diagonal Corner Rectangle 2"/>
+          <p:cNvSpPr/>
+          <p:nvPr/>
+        </p:nvSpPr>
+        <p:spPr>
+          <a:xfrm>
+            <a:off x="0" y="1791032"/>
+            <a:ext cx="12192000" cy="4319200"/>
+          </a:xfrm>
+          <a:prstGeom prst="round2DiagRect">
+            <a:avLst/>
+          </a:prstGeom>
+          <a:solidFill>
+            <a:schemeClr val="accent1">
+              <a:lumMod val="20000"/>
+              <a:lumOff val="80000"/>
+            </a:schemeClr>
+          </a:solidFill>
+          <a:ln w="38100"/>
+        </p:spPr>
+        <p:style>
+          <a:lnRef idx="1">
+            <a:schemeClr val="accent1"/>
+          </a:lnRef>
+          <a:fillRef idx="3">
+            <a:schemeClr val="accent1"/>
+          </a:fillRef>
+          <a:effectRef idx="2">
+            <a:schemeClr val="accent1"/>
+          </a:effectRef>
+          <a:fontRef idx="minor">
+            <a:schemeClr val="lt1"/>
+          </a:fontRef>
+        </p:style>
+        <p:txBody>
+          <a:bodyPr rtlCol="0" anchor="ctr"/>
+          <a:lstStyle/>
+          <a:p>
+            <a:pPr algn="ctr"/>
+            <a:endParaRPr lang="en-IN"/>
+          </a:p>
+        </p:txBody>
+      </p:sp>
+      <p:sp>
+        <p:nvSpPr>
+          <p:cNvPr id="12" name="Google Shape;100;p3"/>
+          <p:cNvSpPr txBox="1"/>
+          <p:nvPr/>
+        </p:nvSpPr>
+        <p:spPr>
+          <a:xfrm>
+            <a:off x="367832" y="1915454"/>
+            <a:ext cx="11764736" cy="4070356"/>
+          </a:xfrm>
+          <a:prstGeom prst="rect">
+            <a:avLst/>
+          </a:prstGeom>
+          <a:noFill/>
+          <a:ln>
+            <a:noFill/>
+          </a:ln>
+        </p:spPr>
+        <p:txBody>
+          <a:bodyPr spcFirstLastPara="1" wrap="square" lIns="91425" tIns="45700" rIns="91425" bIns="45700" anchor="t" anchorCtr="0">
+            <a:noAutofit/>
+          </a:bodyPr>
+          <a:lstStyle/>
+          <a:p>
+            <a:pPr marL="514350" marR="0" lvl="0" indent="-514350" algn="just" rtl="0">
+              <a:lnSpc>
+                <a:spcPct val="90000"/>
+              </a:lnSpc>
+              <a:spcBef>
+                <a:spcPts val="0"/>
+              </a:spcBef>
+              <a:spcAft>
+                <a:spcPts val="0"/>
+              </a:spcAft>
+              <a:buClr>
+                <a:schemeClr val="dk1"/>
+              </a:buClr>
+              <a:buSzPct val="100000"/>
+              <a:buFont typeface="Calibri"/>
+              <a:buAutoNum type="arabicPeriod"/>
+            </a:pPr>
+            <a:r>
+              <a:rPr lang="en-US" b="1" i="0" u="none" strike="noStrike" cap="none" dirty="0">
+                <a:solidFill>
+                  <a:schemeClr val="dk1"/>
+                </a:solidFill>
+                <a:latin typeface="Arial" panose="020B0604020202020204" pitchFamily="34" charset="0"/>
+                <a:ea typeface="Calibri"/>
+                <a:cs typeface="Arial" panose="020B0604020202020204" pitchFamily="34" charset="0"/>
+                <a:sym typeface="Calibri"/>
+              </a:rPr>
+              <a:t>Kindly keep the maximum slides limit up to six </a:t>
+            </a:r>
+            <a:r>
+              <a:rPr lang="en-US" b="1" i="0" u="none" strike="noStrike" cap="none" dirty="0">
+                <a:solidFill>
+                  <a:srgbClr val="C00000"/>
+                </a:solidFill>
+                <a:latin typeface="Arial" panose="020B0604020202020204" pitchFamily="34" charset="0"/>
+                <a:ea typeface="Calibri"/>
+                <a:cs typeface="Arial" panose="020B0604020202020204" pitchFamily="34" charset="0"/>
+                <a:sym typeface="Calibri"/>
+              </a:rPr>
+              <a:t>(6). </a:t>
+            </a:r>
+            <a:r>
+              <a:rPr lang="en-US" b="1" i="0" u="none" strike="noStrike" cap="none" dirty="0">
+                <a:solidFill>
+                  <a:schemeClr val="dk1"/>
+                </a:solidFill>
+                <a:latin typeface="Arial" panose="020B0604020202020204" pitchFamily="34" charset="0"/>
+                <a:ea typeface="Calibri"/>
+                <a:cs typeface="Arial" panose="020B0604020202020204" pitchFamily="34" charset="0"/>
+                <a:sym typeface="Calibri"/>
+              </a:rPr>
+              <a:t>( Including the </a:t>
+            </a:r>
+            <a:r>
+              <a:rPr lang="en-US" b="1" i="0" u="none" strike="noStrike" cap="none">
+                <a:solidFill>
+                  <a:schemeClr val="dk1"/>
+                </a:solidFill>
+                <a:latin typeface="Arial" panose="020B0604020202020204" pitchFamily="34" charset="0"/>
+                <a:ea typeface="Calibri"/>
+                <a:cs typeface="Arial" panose="020B0604020202020204" pitchFamily="34" charset="0"/>
+                <a:sym typeface="Calibri"/>
+              </a:rPr>
+              <a:t>title slide) </a:t>
+            </a:r>
+            <a:endParaRPr b="1" dirty="0">
+              <a:latin typeface="Arial" panose="020B0604020202020204" pitchFamily="34" charset="0"/>
+              <a:cs typeface="Arial" panose="020B0604020202020204" pitchFamily="34" charset="0"/>
+            </a:endParaRPr>
+          </a:p>
+          <a:p>
+            <a:pPr marL="514350" marR="0" lvl="0" indent="-514350" algn="just" rtl="0">
+              <a:lnSpc>
+                <a:spcPct val="90000"/>
+              </a:lnSpc>
+              <a:spcBef>
+                <a:spcPts val="1000"/>
+              </a:spcBef>
+              <a:spcAft>
+                <a:spcPts val="0"/>
+              </a:spcAft>
+              <a:buClr>
+                <a:schemeClr val="dk1"/>
+              </a:buClr>
+              <a:buSzPct val="100000"/>
+              <a:buFont typeface="Calibri"/>
+              <a:buAutoNum type="arabicPeriod"/>
+            </a:pPr>
+            <a:r>
+              <a:rPr lang="en-US" b="1" i="0" u="none" strike="noStrike" cap="none" dirty="0">
+                <a:solidFill>
+                  <a:schemeClr val="dk1"/>
+                </a:solidFill>
+                <a:latin typeface="Arial" panose="020B0604020202020204" pitchFamily="34" charset="0"/>
+                <a:ea typeface="Calibri"/>
+                <a:cs typeface="Arial" panose="020B0604020202020204" pitchFamily="34" charset="0"/>
+                <a:sym typeface="Calibri"/>
+              </a:rPr>
+              <a:t>Try to avoid paragraphs and post your idea in points /diagrams / Infographics /pictures </a:t>
+            </a:r>
+            <a:endParaRPr b="1" dirty="0">
+              <a:latin typeface="Arial" panose="020B0604020202020204" pitchFamily="34" charset="0"/>
+              <a:cs typeface="Arial" panose="020B0604020202020204" pitchFamily="34" charset="0"/>
+            </a:endParaRPr>
+          </a:p>
+          <a:p>
+            <a:pPr marL="514350" marR="0" lvl="0" indent="-514350" algn="just" rtl="0">
+              <a:lnSpc>
+                <a:spcPct val="90000"/>
+              </a:lnSpc>
+              <a:spcBef>
+                <a:spcPts val="1000"/>
+              </a:spcBef>
+              <a:spcAft>
+                <a:spcPts val="0"/>
+              </a:spcAft>
+              <a:buClr>
+                <a:schemeClr val="dk1"/>
+              </a:buClr>
+              <a:buSzPct val="100000"/>
+              <a:buFont typeface="Calibri"/>
+              <a:buAutoNum type="arabicPeriod"/>
+            </a:pPr>
+            <a:r>
+              <a:rPr lang="en-US" b="1" i="0" u="none" strike="noStrike" cap="none" dirty="0">
+                <a:solidFill>
+                  <a:schemeClr val="dk1"/>
+                </a:solidFill>
+                <a:latin typeface="Arial" panose="020B0604020202020204" pitchFamily="34" charset="0"/>
+                <a:ea typeface="Calibri"/>
+                <a:cs typeface="Arial" panose="020B0604020202020204" pitchFamily="34" charset="0"/>
+                <a:sym typeface="Calibri"/>
+              </a:rPr>
+              <a:t>Keep your explanation precise and easy to understand</a:t>
+            </a:r>
+            <a:endParaRPr b="1" dirty="0">
+              <a:latin typeface="Arial" panose="020B0604020202020204" pitchFamily="34" charset="0"/>
+              <a:cs typeface="Arial" panose="020B0604020202020204" pitchFamily="34" charset="0"/>
+            </a:endParaRPr>
+          </a:p>
+          <a:p>
+            <a:pPr marL="514350" marR="0" lvl="0" indent="-514350" algn="just" rtl="0">
+              <a:lnSpc>
+                <a:spcPct val="90000"/>
+              </a:lnSpc>
+              <a:spcBef>
+                <a:spcPts val="1000"/>
+              </a:spcBef>
+              <a:spcAft>
+                <a:spcPts val="0"/>
+              </a:spcAft>
+              <a:buClr>
+                <a:schemeClr val="dk1"/>
+              </a:buClr>
+              <a:buSzPct val="100000"/>
+              <a:buFont typeface="Calibri"/>
+              <a:buAutoNum type="arabicPeriod"/>
+            </a:pPr>
+            <a:r>
+              <a:rPr lang="en-US" b="1" i="0" u="none" strike="noStrike" cap="none" dirty="0">
+                <a:solidFill>
+                  <a:schemeClr val="dk1"/>
+                </a:solidFill>
+                <a:latin typeface="Arial" panose="020B0604020202020204" pitchFamily="34" charset="0"/>
+                <a:ea typeface="Calibri"/>
+                <a:cs typeface="Arial" panose="020B0604020202020204" pitchFamily="34" charset="0"/>
+                <a:sym typeface="Calibri"/>
+              </a:rPr>
+              <a:t>Idea should be unique and novel. </a:t>
+            </a:r>
+            <a:endParaRPr b="1" dirty="0">
+              <a:latin typeface="Arial" panose="020B0604020202020204" pitchFamily="34" charset="0"/>
+              <a:cs typeface="Arial" panose="020B0604020202020204" pitchFamily="34" charset="0"/>
+            </a:endParaRPr>
+          </a:p>
+          <a:p>
+            <a:pPr marL="514350" marR="0" lvl="0" indent="-514350" algn="just" rtl="0">
+              <a:lnSpc>
+                <a:spcPct val="90000"/>
+              </a:lnSpc>
+              <a:spcBef>
+                <a:spcPts val="1000"/>
+              </a:spcBef>
+              <a:spcAft>
+                <a:spcPts val="0"/>
+              </a:spcAft>
+              <a:buClr>
+                <a:schemeClr val="dk1"/>
+              </a:buClr>
+              <a:buSzPct val="100000"/>
+              <a:buFont typeface="Calibri"/>
+              <a:buAutoNum type="arabicPeriod"/>
+            </a:pPr>
+            <a:r>
+              <a:rPr lang="en-US" b="1" i="0" u="none" strike="noStrike" cap="none" dirty="0">
+                <a:solidFill>
+                  <a:schemeClr val="dk1"/>
+                </a:solidFill>
+                <a:latin typeface="Arial" panose="020B0604020202020204" pitchFamily="34" charset="0"/>
+                <a:ea typeface="Calibri"/>
+                <a:cs typeface="Arial" panose="020B0604020202020204" pitchFamily="34" charset="0"/>
+                <a:sym typeface="Calibri"/>
+              </a:rPr>
+              <a:t>You can only use provided </a:t>
+            </a:r>
+            <a:r>
+              <a:rPr lang="en-US" b="1" dirty="0">
+                <a:solidFill>
+                  <a:schemeClr val="dk1"/>
+                </a:solidFill>
+                <a:latin typeface="Arial" panose="020B0604020202020204" pitchFamily="34" charset="0"/>
+                <a:ea typeface="Calibri"/>
+                <a:cs typeface="Arial" panose="020B0604020202020204" pitchFamily="34" charset="0"/>
+                <a:sym typeface="Calibri"/>
+              </a:rPr>
+              <a:t>template</a:t>
+            </a:r>
+            <a:r>
+              <a:rPr lang="en-US" b="1" i="0" u="none" strike="noStrike" cap="none" dirty="0">
+                <a:solidFill>
+                  <a:schemeClr val="dk1"/>
+                </a:solidFill>
+                <a:latin typeface="Arial" panose="020B0604020202020204" pitchFamily="34" charset="0"/>
+                <a:ea typeface="Calibri"/>
+                <a:cs typeface="Arial" panose="020B0604020202020204" pitchFamily="34" charset="0"/>
+                <a:sym typeface="Calibri"/>
+              </a:rPr>
+              <a:t> for making the </a:t>
+            </a:r>
+            <a:r>
+              <a:rPr lang="en-US" b="1" dirty="0">
+                <a:solidFill>
+                  <a:schemeClr val="dk1"/>
+                </a:solidFill>
+                <a:latin typeface="Arial" panose="020B0604020202020204" pitchFamily="34" charset="0"/>
+                <a:ea typeface="Calibri"/>
+                <a:cs typeface="Arial" panose="020B0604020202020204" pitchFamily="34" charset="0"/>
+                <a:sym typeface="Calibri"/>
+              </a:rPr>
+              <a:t>PPT</a:t>
+            </a:r>
+            <a:r>
+              <a:rPr lang="en-US" b="1" i="0" u="none" strike="noStrike" cap="none" dirty="0">
+                <a:solidFill>
+                  <a:schemeClr val="dk1"/>
+                </a:solidFill>
+                <a:latin typeface="Arial" panose="020B0604020202020204" pitchFamily="34" charset="0"/>
+                <a:ea typeface="Calibri"/>
+                <a:cs typeface="Arial" panose="020B0604020202020204" pitchFamily="34" charset="0"/>
+                <a:sym typeface="Calibri"/>
+              </a:rPr>
+              <a:t> without changing the idea details pointers (mentioned in previous slides).</a:t>
+            </a:r>
+            <a:endParaRPr b="1" i="0" u="none" strike="noStrike" cap="none" dirty="0">
+              <a:solidFill>
+                <a:schemeClr val="dk1"/>
+              </a:solidFill>
+              <a:latin typeface="Arial" panose="020B0604020202020204" pitchFamily="34" charset="0"/>
+              <a:ea typeface="Calibri"/>
+              <a:cs typeface="Arial" panose="020B0604020202020204" pitchFamily="34" charset="0"/>
+              <a:sym typeface="Calibri"/>
+            </a:endParaRPr>
+          </a:p>
+          <a:p>
+            <a:pPr marL="514350" marR="0" lvl="0" indent="-514350" algn="just" rtl="0">
+              <a:lnSpc>
+                <a:spcPct val="90000"/>
+              </a:lnSpc>
+              <a:spcBef>
+                <a:spcPts val="1000"/>
+              </a:spcBef>
+              <a:spcAft>
+                <a:spcPts val="0"/>
+              </a:spcAft>
+              <a:buClr>
+                <a:schemeClr val="dk1"/>
+              </a:buClr>
+              <a:buSzPct val="100000"/>
+              <a:buFont typeface="Calibri"/>
+              <a:buAutoNum type="arabicPeriod"/>
+            </a:pPr>
+            <a:r>
+              <a:rPr lang="en-US" b="1" i="0" u="none" strike="noStrike" cap="none" dirty="0">
+                <a:solidFill>
+                  <a:schemeClr val="dk1"/>
+                </a:solidFill>
+                <a:latin typeface="Arial" panose="020B0604020202020204" pitchFamily="34" charset="0"/>
+                <a:ea typeface="Calibri"/>
+                <a:cs typeface="Arial" panose="020B0604020202020204" pitchFamily="34" charset="0"/>
+                <a:sym typeface="Calibri"/>
+              </a:rPr>
+              <a:t>You need to save the file in PDF and upload the same on portal. No PPT, Word Doc or any other format will be supported.</a:t>
+            </a:r>
+            <a:endParaRPr b="1" dirty="0">
+              <a:latin typeface="Arial" panose="020B0604020202020204" pitchFamily="34" charset="0"/>
+              <a:cs typeface="Arial" panose="020B0604020202020204" pitchFamily="34" charset="0"/>
+            </a:endParaRPr>
+          </a:p>
+          <a:p>
+            <a:pPr marL="514350" marR="0" lvl="0" indent="-349885" algn="just" rtl="0">
+              <a:lnSpc>
+                <a:spcPct val="90000"/>
+              </a:lnSpc>
+              <a:spcBef>
+                <a:spcPts val="1000"/>
+              </a:spcBef>
+              <a:spcAft>
+                <a:spcPts val="0"/>
+              </a:spcAft>
+              <a:buClr>
+                <a:schemeClr val="dk1"/>
+              </a:buClr>
+              <a:buSzPct val="100000"/>
+              <a:buFont typeface="Calibri"/>
+              <a:buNone/>
+            </a:pPr>
+            <a:endParaRPr b="1" i="0" u="none" strike="noStrike" cap="none" dirty="0">
+              <a:solidFill>
+                <a:schemeClr val="dk1"/>
+              </a:solidFill>
+              <a:latin typeface="Arial" panose="020B0604020202020204" pitchFamily="34" charset="0"/>
+              <a:ea typeface="Calibri"/>
+              <a:cs typeface="Arial" panose="020B0604020202020204" pitchFamily="34" charset="0"/>
+              <a:sym typeface="Calibri"/>
+            </a:endParaRPr>
+          </a:p>
+          <a:p>
+            <a:pPr marL="0" marR="0" lvl="0" indent="0" algn="just" rtl="0">
+              <a:lnSpc>
+                <a:spcPct val="90000"/>
+              </a:lnSpc>
+              <a:spcBef>
+                <a:spcPts val="1000"/>
+              </a:spcBef>
+              <a:spcAft>
+                <a:spcPts val="0"/>
+              </a:spcAft>
+              <a:buClr>
+                <a:schemeClr val="dk1"/>
+              </a:buClr>
+              <a:buSzPct val="100000"/>
+              <a:buFont typeface="Arial"/>
+              <a:buNone/>
+            </a:pPr>
+            <a:r>
+              <a:rPr lang="en-US" b="1" i="0" u="none" strike="noStrike" cap="none" dirty="0">
+                <a:solidFill>
+                  <a:srgbClr val="C00000"/>
+                </a:solidFill>
+                <a:latin typeface="Arial" panose="020B0604020202020204" pitchFamily="34" charset="0"/>
+                <a:ea typeface="Calibri"/>
+                <a:cs typeface="Arial" panose="020B0604020202020204" pitchFamily="34" charset="0"/>
+                <a:sym typeface="Calibri"/>
+              </a:rPr>
+              <a:t>Note - You can delete this slide (Important Pointers) when you upload the details of your idea on SIH portal.</a:t>
+            </a:r>
+            <a:endParaRPr b="1" dirty="0">
+              <a:solidFill>
+                <a:srgbClr val="C00000"/>
+              </a:solidFill>
+              <a:latin typeface="Arial" panose="020B0604020202020204" pitchFamily="34" charset="0"/>
+              <a:cs typeface="Arial" panose="020B0604020202020204" pitchFamily="34" charset="0"/>
+            </a:endParaRPr>
+          </a:p>
+          <a:p>
+            <a:pPr marL="914400" marR="0" lvl="1" indent="-316230" algn="just" rtl="0">
+              <a:lnSpc>
+                <a:spcPct val="90000"/>
+              </a:lnSpc>
+              <a:spcBef>
+                <a:spcPts val="500"/>
+              </a:spcBef>
+              <a:spcAft>
+                <a:spcPts val="0"/>
+              </a:spcAft>
+              <a:buClr>
+                <a:schemeClr val="dk1"/>
+              </a:buClr>
+              <a:buSzPct val="100000"/>
+              <a:buFont typeface="Calibri"/>
+              <a:buNone/>
+            </a:pPr>
+            <a:endParaRPr sz="2000" b="1" i="0" u="none" strike="noStrike" cap="none" dirty="0">
+              <a:solidFill>
+                <a:schemeClr val="dk1"/>
+              </a:solidFill>
+              <a:latin typeface="Arial" panose="020B0604020202020204" pitchFamily="34" charset="0"/>
+              <a:ea typeface="Calibri"/>
+              <a:cs typeface="Arial" panose="020B0604020202020204" pitchFamily="34" charset="0"/>
+              <a:sym typeface="Calibri"/>
+            </a:endParaRPr>
+          </a:p>
+        </p:txBody>
+      </p:sp>
+      <p:sp>
+        <p:nvSpPr>
+          <p:cNvPr id="4" name="TextBox 3"/>
+          <p:cNvSpPr txBox="1"/>
+          <p:nvPr/>
+        </p:nvSpPr>
+        <p:spPr>
+          <a:xfrm>
+            <a:off x="1393371" y="107066"/>
+            <a:ext cx="8410540" cy="646331"/>
+          </a:xfrm>
+          <a:prstGeom prst="rect">
+            <a:avLst/>
+          </a:prstGeom>
+          <a:noFill/>
+        </p:spPr>
+        <p:txBody>
+          <a:bodyPr wrap="square" rtlCol="0">
+            <a:spAutoFit/>
+          </a:bodyPr>
+          <a:lstStyle/>
+          <a:p>
+            <a:pPr algn="ctr"/>
+            <a:r>
+              <a:rPr lang="en-US" sz="3600" b="1" dirty="0">
+                <a:latin typeface="Times New Roman" panose="02020603050405020304" pitchFamily="18" charset="0"/>
+                <a:cs typeface="Times New Roman" panose="02020603050405020304" pitchFamily="18" charset="0"/>
+              </a:rPr>
+              <a:t>IMPORTANT INSTRUCTIONS</a:t>
+            </a:r>
+            <a:endParaRPr lang="en-IN" sz="3600" b="1" dirty="0">
+              <a:latin typeface="Times New Roman" panose="02020603050405020304" pitchFamily="18" charset="0"/>
+              <a:cs typeface="Times New Roman" panose="02020603050405020304" pitchFamily="18" charset="0"/>
+            </a:endParaRPr>
+          </a:p>
+        </p:txBody>
+      </p:sp>
+      <p:sp>
+        <p:nvSpPr>
+          <p:cNvPr id="5" name="TextBox 4"/>
+          <p:cNvSpPr txBox="1"/>
+          <p:nvPr/>
+        </p:nvSpPr>
+        <p:spPr>
+          <a:xfrm>
+            <a:off x="602343" y="1181900"/>
+            <a:ext cx="9557657" cy="341632"/>
+          </a:xfrm>
+          <a:prstGeom prst="rect">
+            <a:avLst/>
+          </a:prstGeom>
+          <a:noFill/>
+        </p:spPr>
+        <p:txBody>
+          <a:bodyPr wrap="square" rtlCol="0">
+            <a:spAutoFit/>
+          </a:bodyPr>
+          <a:lstStyle/>
+          <a:p>
+            <a:pPr algn="just">
+              <a:lnSpc>
+                <a:spcPct val="90000"/>
+              </a:lnSpc>
+              <a:spcBef>
+                <a:spcPts val="1000"/>
+              </a:spcBef>
+              <a:spcAft>
+                <a:spcPts val="0"/>
+              </a:spcAft>
+              <a:buClr>
+                <a:schemeClr val="dk1"/>
+              </a:buClr>
+              <a:buSzPct val="100000"/>
+            </a:pPr>
+            <a:r>
+              <a:rPr lang="en-US" b="1" dirty="0">
+                <a:solidFill>
+                  <a:schemeClr val="dk1"/>
+                </a:solidFill>
+                <a:latin typeface="Arial" panose="020B0604020202020204" pitchFamily="34" charset="0"/>
+                <a:ea typeface="Calibri"/>
+                <a:cs typeface="Arial" panose="020B0604020202020204" pitchFamily="34" charset="0"/>
+              </a:rPr>
+              <a:t>Please ensure below pointers are met while submitting the Idea PPT:</a:t>
+            </a:r>
+            <a:endParaRPr lang="en-IN" b="1" dirty="0">
+              <a:solidFill>
+                <a:schemeClr val="dk1"/>
+              </a:solidFill>
+              <a:latin typeface="Arial" panose="020B0604020202020204" pitchFamily="34" charset="0"/>
+              <a:ea typeface="Calibri"/>
+              <a:cs typeface="Arial" panose="020B0604020202020204" pitchFamily="34" charset="0"/>
+            </a:endParaRPr>
+          </a:p>
+        </p:txBody>
+      </p:sp>
+      <p:pic>
+        <p:nvPicPr>
+          <p:cNvPr id="13" name="Picture 12"/>
+          <p:cNvPicPr>
+            <a:picLocks noChangeAspect="1"/>
+          </p:cNvPicPr>
+          <p:nvPr/>
+        </p:nvPicPr>
+        <p:blipFill>
+          <a:blip r:embed="rId3">
+            <a:extLst>
+              <a:ext uri="{28A0092B-C50C-407E-A947-70E740481C1C}">
+                <a14:useLocalDpi xmlns:a14="http://schemas.microsoft.com/office/drawing/2010/main" val="0"/>
+              </a:ext>
+            </a:extLst>
+          </a:blip>
+          <a:stretch>
+            <a:fillRect/>
+          </a:stretch>
+        </p:blipFill>
+        <p:spPr>
+          <a:xfrm>
+            <a:off x="9780086" y="1500"/>
+            <a:ext cx="2249850" cy="1062337"/>
+          </a:xfrm>
+          <a:prstGeom prst="rect">
+            <a:avLst/>
+          </a:prstGeom>
+        </p:spPr>
+      </p:pic>
+    </p:spTree>
+    <p:extLst>
+      <p:ext uri="{BB962C8B-B14F-4D97-AF65-F5344CB8AC3E}">
+        <p14:creationId xmlns:p14="http://schemas.microsoft.com/office/powerpoint/2010/main" val="1588084416"/>
       </p:ext>
     </p:extLst>
   </p:cSld>

--- a/deck/NoticeDecoder_NovaNexus_PS02.pptx
+++ b/deck/NoticeDecoder_NovaNexus_PS02.pptx
@@ -5657,7 +5657,7 @@
                   <a:schemeClr val="bg1"/>
                 </a:solidFill>
               </a:rPr>
-              <a:t>@SETU 2026  PS-02 Idea Submission</a:t>
+              <a:t>@SETU 2026  PS-02 Prototype Submission</a:t>
             </a:r>
             <a:endParaRPr lang="en-US" dirty="0">
               <a:solidFill>
@@ -6400,7 +6400,7 @@
                 </a:solidFill>
                 <a:latin typeface="Calibri"/>
               </a:rPr>
-              <a:t>Why it is different</a:t>
+              <a:t>What others will not have</a:t>
             </a:r>
           </a:p>
         </p:txBody>
@@ -6429,101 +6429,101 @@
           <a:p>
             <a:pPr algn="l">
               <a:spcAft>
-                <a:spcPts val="700"/>
+                <a:spcPts val="600"/>
               </a:spcAft>
             </a:pPr>
             <a:r>
-              <a:rPr sz="1400" b="1">
+              <a:rPr sz="1300" b="1">
                 <a:solidFill>
                   <a:srgbClr val="1F497D"/>
                 </a:solidFill>
                 <a:latin typeface="Calibri"/>
               </a:rPr>
-              <a:t>Shows its working.</a:t>
-            </a:r>
-            <a:r>
-              <a:rPr sz="1400" b="0">
+              <a:t>Shows where each date came from.</a:t>
+            </a:r>
+            <a:r>
+              <a:rPr sz="1300" b="0">
                 <a:solidFill>
                   <a:srgbClr val="262A33"/>
                 </a:solidFill>
                 <a:latin typeface="Calibri"/>
               </a:rPr>
-              <a:t> Every date, time and room points to the words it came from.</a:t>
+              <a:t> Tap a date and the notice lights up the words.</a:t>
             </a:r>
           </a:p>
           <a:p>
             <a:pPr algn="l">
               <a:spcAft>
-                <a:spcPts val="700"/>
+                <a:spcPts val="600"/>
               </a:spcAft>
             </a:pPr>
             <a:r>
-              <a:rPr sz="1400" b="1">
+              <a:rPr sz="1300" b="1">
                 <a:solidFill>
                   <a:srgbClr val="1F497D"/>
                 </a:solidFill>
                 <a:latin typeface="Calibri"/>
               </a:rPr>
-              <a:t>Asks when unsure.</a:t>
-            </a:r>
-            <a:r>
-              <a:rPr sz="1400" b="0">
+              <a:t>Catches a notice that disagrees with itself.</a:t>
+            </a:r>
+            <a:r>
+              <a:rPr sz="1300" b="0">
                 <a:solidFill>
                   <a:srgbClr val="262A33"/>
                 </a:solidFill>
                 <a:latin typeface="Calibri"/>
               </a:rPr>
-              <a:t> "Thursday? But 13 Nov 2026 is a Friday."</a:t>
+              <a:t> "Results by 9 PM today" and "results next day": both shown, you pick one.</a:t>
             </a:r>
           </a:p>
           <a:p>
             <a:pPr algn="l">
               <a:spcAft>
-                <a:spcPts val="700"/>
+                <a:spcPts val="600"/>
               </a:spcAft>
             </a:pPr>
             <a:r>
-              <a:rPr sz="1400" b="1">
+              <a:rPr sz="1300" b="1">
                 <a:solidFill>
                   <a:srgbClr val="1F497D"/>
                 </a:solidFill>
                 <a:latin typeface="Calibri"/>
               </a:rPr>
-              <a:t>Finds clashes.</a:t>
-            </a:r>
-            <a:r>
-              <a:rPr sz="1400" b="0">
+              <a:t>Never makes up a date.</a:t>
+            </a:r>
+            <a:r>
+              <a:rPr sz="1300" b="0">
                 <a:solidFill>
                   <a:srgbClr val="262A33"/>
                 </a:solidFill>
                 <a:latin typeface="Calibri"/>
               </a:rPr>
-              <a:t> Two events at once, or a deadline during a class.</a:t>
+              <a:t> "This week or next week" waits in a list, not in your calendar.</a:t>
             </a:r>
           </a:p>
           <a:p>
             <a:pPr algn="l">
               <a:spcAft>
-                <a:spcPts val="700"/>
+                <a:spcPts val="600"/>
               </a:spcAft>
             </a:pPr>
             <a:r>
-              <a:rPr sz="1400" b="1">
+              <a:rPr sz="1300" b="1">
                 <a:solidFill>
                   <a:srgbClr val="1F497D"/>
                 </a:solidFill>
                 <a:latin typeface="Calibri"/>
               </a:rPr>
-              <a:t>No AI.</a:t>
-            </a:r>
-            <a:r>
-              <a:rPr sz="1400" b="0">
+              <a:t>One change updates the whole class.</a:t>
+            </a:r>
+            <a:r>
+              <a:rPr sz="1300" b="0">
                 <a:solidFill>
                   <a:srgbClr val="262A33"/>
                 </a:solidFill>
                 <a:latin typeface="Calibri"/>
               </a:rPr>
-              <a:t> Same answer every time, and the reading happens on the phone.</a:t>
+              <a:t> The class rep publishes once; a postponed exam moves in every student's calendar.</a:t>
             </a:r>
           </a:p>
         </p:txBody>
@@ -6820,7 +6820,7 @@
                   <a:schemeClr val="bg1"/>
                 </a:solidFill>
               </a:rPr>
-              <a:t>@SETU 2026  PS-02 Idea Submission</a:t>
+              <a:t>@SETU 2026  PS-02 Prototype Submission</a:t>
             </a:r>
             <a:endParaRPr lang="en-US" dirty="0">
               <a:solidFill>
@@ -7164,7 +7164,7 @@
                 </a:solidFill>
                 <a:latin typeface="Calibri"/>
               </a:rPr>
-              <a:t> 34 rule tests and 75 browser checks run on every change.</a:t>
+              <a:t> 35 rule tests and 75 browser checks run on every change.</a:t>
             </a:r>
           </a:p>
         </p:txBody>
@@ -8530,7 +8530,7 @@
                 <a:ea typeface="+mn-ea"/>
                 <a:cs typeface="+mn-cs"/>
               </a:rPr>
-              <a:t>@SETU 2026  PS-02 Idea Submission</a:t>
+              <a:t>@SETU 2026  PS-02 Prototype Submission</a:t>
             </a:r>
             <a:endParaRPr kumimoji="0" lang="en-US" sz="1200" b="0" i="0" u="none" strike="noStrike" kern="1200" cap="none" spc="0" normalizeH="0" baseline="0" noProof="0" dirty="0">
               <a:ln>
@@ -9967,7 +9967,7 @@
                 <a:ea typeface="+mn-ea"/>
                 <a:cs typeface="+mn-cs"/>
               </a:rPr>
-              <a:t>@SETU 2026  PS-02 Idea Submission</a:t>
+              <a:t>@SETU 2026  PS-02 Prototype Submission</a:t>
             </a:r>
             <a:endParaRPr kumimoji="0" lang="en-US" sz="1200" b="0" i="0" u="none" strike="noStrike" kern="1200" cap="none" spc="0" normalizeH="0" baseline="0" noProof="0" dirty="0">
               <a:ln>
@@ -11164,7 +11164,7 @@
                 <a:ea typeface="+mn-ea"/>
                 <a:cs typeface="+mn-cs"/>
               </a:rPr>
-              <a:t>@SETU 2026  PS-02 Idea Submission</a:t>
+              <a:t>@SETU 2026  PS-02 Prototype Submission</a:t>
             </a:r>
             <a:endParaRPr kumimoji="0" lang="en-US" sz="1200" b="0" i="0" u="none" strike="noStrike" kern="1200" cap="none" spc="0" normalizeH="0" baseline="0" noProof="0" dirty="0">
               <a:ln>
